--- a/docs/簡報-AI零程式碼開發ERP分享.pptx
+++ b/docs/簡報-AI零程式碼開發ERP分享.pptx
@@ -15,6 +15,8 @@
     <p:sldId id="263" r:id="rId14"/>
     <p:sldId id="264" r:id="rId15"/>
     <p:sldId id="265" r:id="rId16"/>
+    <p:sldId id="266" r:id="rId17"/>
+    <p:sldId id="267" r:id="rId18"/>
   </p:sldIdLst>
   <p:sldSz cx="12191695" cy="6858000" type="screen4x3"/>
   <p:notesSz cx="6858000" cy="9144000"/>
@@ -3093,7 +3095,7 @@
     <p:bg>
       <p:bgPr>
         <a:solidFill>
-          <a:srgbClr val="0F1117"/>
+          <a:srgbClr val="F4F6F9"/>
         </a:solidFill>
         <a:effectLst/>
       </p:bgPr>
@@ -3113,8 +3115,8 @@
         </p:nvSpPr>
         <p:spPr>
           <a:xfrm>
-            <a:off x="914400" y="1554480"/>
-            <a:ext cx="10332720" cy="4114800"/>
+            <a:off x="914400" y="1371600"/>
+            <a:ext cx="10332720" cy="4206240"/>
           </a:xfrm>
           <a:prstGeom prst="rect">
             <a:avLst/>
@@ -3129,16 +3131,13 @@
           <a:p>
             <a:pPr algn="l">
               <a:spcAft>
-                <a:spcPts val="2000"/>
-              </a:spcAft>
-            </a:pPr>
-            <a:r>
-              <a:t/>
-            </a:r>
-            <a:r>
-              <a:rPr sz="1600" b="1">
-                <a:solidFill>
-                  <a:srgbClr val="6EE7B7"/>
+                <a:spcPts val="1800"/>
+              </a:spcAft>
+            </a:pPr>
+            <a:r>
+              <a:rPr sz="1500" b="1">
+                <a:solidFill>
+                  <a:srgbClr val="0B8F6E"/>
                 </a:solidFill>
                 <a:latin typeface="Microsoft JhengHei"/>
               </a:rPr>
@@ -3148,34 +3147,34 @@
           <a:p>
             <a:pPr algn="l">
               <a:lnSpc>
-                <a:spcPct val="120000"/>
+                <a:spcPct val="122000"/>
               </a:lnSpc>
               <a:spcAft>
                 <a:spcPts val="200"/>
               </a:spcAft>
             </a:pPr>
             <a:r>
-              <a:rPr sz="4400" b="1">
-                <a:solidFill>
-                  <a:srgbClr val="E8EAF0"/>
+              <a:rPr sz="4200" b="1">
+                <a:solidFill>
+                  <a:srgbClr val="1B2330"/>
                 </a:solidFill>
                 <a:latin typeface="Microsoft JhengHei"/>
               </a:rPr>
               <a:t>我用 AI、</a:t>
             </a:r>
             <a:r>
-              <a:rPr sz="4400" b="1">
-                <a:solidFill>
-                  <a:srgbClr val="6EE7B7"/>
+              <a:rPr sz="4200" b="1">
+                <a:solidFill>
+                  <a:srgbClr val="0B8F6E"/>
                 </a:solidFill>
                 <a:latin typeface="Microsoft JhengHei"/>
               </a:rPr>
               <a:t>0 行手寫程式碼</a:t>
             </a:r>
             <a:r>
-              <a:rPr sz="4400" b="1">
-                <a:solidFill>
-                  <a:srgbClr val="E8EAF0"/>
+              <a:rPr sz="4200" b="1">
+                <a:solidFill>
+                  <a:srgbClr val="1B2330"/>
                 </a:solidFill>
                 <a:latin typeface="Microsoft JhengHei"/>
               </a:rPr>
@@ -3185,19 +3184,16 @@
           <a:p>
             <a:pPr algn="l">
               <a:lnSpc>
-                <a:spcPct val="120000"/>
+                <a:spcPct val="122000"/>
               </a:lnSpc>
               <a:spcAft>
-                <a:spcPts val="2400"/>
-              </a:spcAft>
-            </a:pPr>
-            <a:r>
-              <a:t/>
-            </a:r>
-            <a:r>
-              <a:rPr sz="4400" b="1">
-                <a:solidFill>
-                  <a:srgbClr val="E8EAF0"/>
+                <a:spcPts val="2200"/>
+              </a:spcAft>
+            </a:pPr>
+            <a:r>
+              <a:rPr sz="4200" b="1">
+                <a:solidFill>
+                  <a:srgbClr val="1B2330"/>
                 </a:solidFill>
                 <a:latin typeface="Microsoft JhengHei"/>
               </a:rPr>
@@ -3207,45 +3203,75 @@
           <a:p>
             <a:pPr algn="l">
               <a:lnSpc>
-                <a:spcPct val="140000"/>
+                <a:spcPct val="150000"/>
               </a:lnSpc>
               <a:spcAft>
                 <a:spcPts val="200"/>
               </a:spcAft>
             </a:pPr>
             <a:r>
-              <a:t/>
-            </a:r>
-            <a:r>
               <a:rPr sz="1800" b="0">
                 <a:solidFill>
-                  <a:srgbClr val="9AA3B5"/>
-                </a:solidFill>
-                <a:latin typeface="Microsoft JhengHei"/>
-              </a:rPr>
-              <a:t>不會寫程式也能當「產品負責人 + 驗收者」，</a:t>
+                  <a:srgbClr val="5B6678"/>
+                </a:solidFill>
+                <a:latin typeface="Microsoft JhengHei"/>
+              </a:rPr>
+              <a:t>不會寫程式，也能當「產品負責人 + 驗收者」。</a:t>
             </a:r>
           </a:p>
           <a:p>
             <a:pPr algn="l">
               <a:lnSpc>
-                <a:spcPct val="140000"/>
+                <a:spcPct val="150000"/>
               </a:lnSpc>
               <a:spcAft>
                 <a:spcPts val="600"/>
               </a:spcAft>
             </a:pPr>
             <a:r>
-              <a:t/>
-            </a:r>
-            <a:r>
               <a:rPr sz="1800" b="0">
                 <a:solidFill>
-                  <a:srgbClr val="9AA3B5"/>
-                </a:solidFill>
-                <a:latin typeface="Microsoft JhengHei"/>
-              </a:rPr>
-              <a:t>把寫 code 這件事整個交給 AI（Claude Code）。</a:t>
+                  <a:srgbClr val="5B6678"/>
+                </a:solidFill>
+                <a:latin typeface="Microsoft JhengHei"/>
+              </a:rPr>
+              <a:t>真正的關鍵，是一個 </a:t>
+            </a:r>
+            <a:r>
+              <a:rPr sz="1800" b="1">
+                <a:solidFill>
+                  <a:srgbClr val="0B8F6E"/>
+                </a:solidFill>
+                <a:latin typeface="Microsoft JhengHei"/>
+              </a:rPr>
+              <a:t>閉環</a:t>
+            </a:r>
+            <a:r>
+              <a:rPr sz="1800" b="0">
+                <a:solidFill>
+                  <a:srgbClr val="5B6678"/>
+                </a:solidFill>
+                <a:latin typeface="Microsoft JhengHei"/>
+              </a:rPr>
+              <a:t>，加上一套讓它可靠運轉的 </a:t>
+            </a:r>
+            <a:r>
+              <a:rPr sz="1800" b="1">
+                <a:solidFill>
+                  <a:srgbClr val="0B8F6E"/>
+                </a:solidFill>
+                <a:latin typeface="Microsoft JhengHei"/>
+              </a:rPr>
+              <a:t>harness</a:t>
+            </a:r>
+            <a:r>
+              <a:rPr sz="1800" b="0">
+                <a:solidFill>
+                  <a:srgbClr val="5B6678"/>
+                </a:solidFill>
+                <a:latin typeface="Microsoft JhengHei"/>
+              </a:rPr>
+              <a:t>。</a:t>
             </a:r>
           </a:p>
         </p:txBody>
@@ -3264,7 +3290,7 @@
     <p:bg>
       <p:bgPr>
         <a:solidFill>
-          <a:srgbClr val="0F1117"/>
+          <a:srgbClr val="F4F6F9"/>
         </a:solidFill>
         <a:effectLst/>
       </p:bgPr>
@@ -3284,8 +3310,8 @@
         </p:nvSpPr>
         <p:spPr>
           <a:xfrm>
-            <a:off x="914400" y="1828800"/>
-            <a:ext cx="10332720" cy="3657600"/>
+            <a:off x="731520" y="502920"/>
+            <a:ext cx="10698480" cy="914400"/>
           </a:xfrm>
           <a:prstGeom prst="rect">
             <a:avLst/>
@@ -3300,16 +3326,735 @@
           <a:p>
             <a:pPr algn="l">
               <a:spcAft>
-                <a:spcPts val="2000"/>
-              </a:spcAft>
-            </a:pPr>
-            <a:r>
-              <a:t/>
+                <a:spcPts val="600"/>
+              </a:spcAft>
+            </a:pPr>
+            <a:r>
+              <a:rPr sz="3000" b="1">
+                <a:solidFill>
+                  <a:srgbClr val="1B2330"/>
+                </a:solidFill>
+                <a:latin typeface="Microsoft JhengHei"/>
+              </a:rPr>
+              <a:t>一路下來</a:t>
+            </a:r>
+            <a:r>
+              <a:rPr sz="3000" b="1">
+                <a:solidFill>
+                  <a:srgbClr val="0B8F6E"/>
+                </a:solidFill>
+                <a:latin typeface="Microsoft JhengHei"/>
+              </a:rPr>
+              <a:t>學到的事</a:t>
+            </a:r>
+          </a:p>
+        </p:txBody>
+      </p:sp>
+      <p:sp>
+        <p:nvSpPr>
+          <p:cNvPr id="3" name="Rounded Rectangle 2"/>
+          <p:cNvSpPr/>
+          <p:nvPr/>
+        </p:nvSpPr>
+        <p:spPr>
+          <a:xfrm>
+            <a:off x="731520" y="1600200"/>
+            <a:ext cx="5212080" cy="4389120"/>
+          </a:xfrm>
+          <a:prstGeom prst="roundRect">
+            <a:avLst>
+              <a:gd name="adj" fmla="val 6000"/>
+            </a:avLst>
+          </a:prstGeom>
+          <a:solidFill>
+            <a:srgbClr val="FFFFFF"/>
+          </a:solidFill>
+          <a:ln w="12700">
+            <a:solidFill>
+              <a:srgbClr val="DDE2EA"/>
+            </a:solidFill>
+          </a:ln>
+          <a:effectLst/>
+        </p:spPr>
+        <p:style>
+          <a:lnRef idx="1">
+            <a:schemeClr val="accent1"/>
+          </a:lnRef>
+          <a:fillRef idx="3">
+            <a:schemeClr val="accent1"/>
+          </a:fillRef>
+          <a:effectRef idx="2">
+            <a:schemeClr val="accent1"/>
+          </a:effectRef>
+          <a:fontRef idx="minor">
+            <a:schemeClr val="lt1"/>
+          </a:fontRef>
+        </p:style>
+        <p:txBody>
+          <a:bodyPr rtlCol="0" anchor="ctr" wrap="square" lIns="182880" rIns="182880" tIns="128016" bIns="128016"/>
+          <a:lstStyle/>
+          <a:p>
+            <a:pPr algn="l">
+              <a:lnSpc>
+                <a:spcPct val="130000"/>
+              </a:lnSpc>
+              <a:spcAft>
+                <a:spcPts val="1200"/>
+              </a:spcAft>
+            </a:pPr>
+            <a:r>
+              <a:rPr sz="2000" b="1">
+                <a:solidFill>
+                  <a:srgbClr val="0B8F6E"/>
+                </a:solidFill>
+                <a:latin typeface="Microsoft JhengHei"/>
+              </a:rPr>
+              <a:t>有用的習慣</a:t>
             </a:r>
             <a:r>
               <a:rPr sz="1600" b="1">
                 <a:solidFill>
-                  <a:srgbClr val="6EE7B7"/>
+                  <a:srgbClr val="0B8F6E"/>
+                </a:solidFill>
+                <a:latin typeface="Microsoft JhengHei"/>
+              </a:rPr>
+              <a:t>•  </a:t>
+            </a:r>
+            <a:r>
+              <a:rPr sz="1600" b="0">
+                <a:solidFill>
+                  <a:srgbClr val="36404F"/>
+                </a:solidFill>
+                <a:latin typeface="Microsoft JhengHei"/>
+              </a:rPr>
+              <a:t>一次只要一個功能，小步快跑</a:t>
+            </a:r>
+          </a:p>
+          <a:p>
+            <a:pPr algn="l">
+              <a:lnSpc>
+                <a:spcPct val="130000"/>
+              </a:lnSpc>
+              <a:spcAft>
+                <a:spcPts val="1200"/>
+              </a:spcAft>
+            </a:pPr>
+            <a:r>
+              <a:rPr sz="1600" b="1">
+                <a:solidFill>
+                  <a:srgbClr val="0B8F6E"/>
+                </a:solidFill>
+                <a:latin typeface="Microsoft JhengHei"/>
+              </a:rPr>
+              <a:t>•  </a:t>
+            </a:r>
+            <a:r>
+              <a:rPr sz="1600" b="0">
+                <a:solidFill>
+                  <a:srgbClr val="36404F"/>
+                </a:solidFill>
+                <a:latin typeface="Microsoft JhengHei"/>
+              </a:rPr>
+              <a:t>需求講「為什麼」，不只講「做什麼」</a:t>
+            </a:r>
+          </a:p>
+          <a:p>
+            <a:pPr algn="l">
+              <a:lnSpc>
+                <a:spcPct val="130000"/>
+              </a:lnSpc>
+              <a:spcAft>
+                <a:spcPts val="1200"/>
+              </a:spcAft>
+            </a:pPr>
+            <a:r>
+              <a:rPr sz="1600" b="1">
+                <a:solidFill>
+                  <a:srgbClr val="0B8F6E"/>
+                </a:solidFill>
+                <a:latin typeface="Microsoft JhengHei"/>
+              </a:rPr>
+              <a:t>•  </a:t>
+            </a:r>
+            <a:r>
+              <a:rPr sz="1600" b="0">
+                <a:solidFill>
+                  <a:srgbClr val="36404F"/>
+                </a:solidFill>
+                <a:latin typeface="Microsoft JhengHei"/>
+              </a:rPr>
+              <a:t>每個 PR 都親手操作驗收，不盲目合併</a:t>
+            </a:r>
+          </a:p>
+          <a:p>
+            <a:pPr algn="l">
+              <a:lnSpc>
+                <a:spcPct val="130000"/>
+              </a:lnSpc>
+              <a:spcAft>
+                <a:spcPts val="1200"/>
+              </a:spcAft>
+            </a:pPr>
+            <a:r>
+              <a:rPr sz="1600" b="1">
+                <a:solidFill>
+                  <a:srgbClr val="0B8F6E"/>
+                </a:solidFill>
+                <a:latin typeface="Microsoft JhengHei"/>
+              </a:rPr>
+              <a:t>•  </a:t>
+            </a:r>
+            <a:r>
+              <a:rPr sz="1600" b="0">
+                <a:solidFill>
+                  <a:srgbClr val="36404F"/>
+                </a:solidFill>
+                <a:latin typeface="Microsoft JhengHei"/>
+              </a:rPr>
+              <a:t>出錯時描述「現象」，讓 AI 自己查原因</a:t>
+            </a:r>
+          </a:p>
+        </p:txBody>
+      </p:sp>
+      <p:sp>
+        <p:nvSpPr>
+          <p:cNvPr id="4" name="Rounded Rectangle 3"/>
+          <p:cNvSpPr/>
+          <p:nvPr/>
+        </p:nvSpPr>
+        <p:spPr>
+          <a:xfrm>
+            <a:off x="6263640" y="1600200"/>
+            <a:ext cx="5212080" cy="4389120"/>
+          </a:xfrm>
+          <a:prstGeom prst="roundRect">
+            <a:avLst>
+              <a:gd name="adj" fmla="val 6000"/>
+            </a:avLst>
+          </a:prstGeom>
+          <a:solidFill>
+            <a:srgbClr val="FFFFFF"/>
+          </a:solidFill>
+          <a:ln w="12700">
+            <a:solidFill>
+              <a:srgbClr val="DDE2EA"/>
+            </a:solidFill>
+          </a:ln>
+          <a:effectLst/>
+        </p:spPr>
+        <p:style>
+          <a:lnRef idx="1">
+            <a:schemeClr val="accent1"/>
+          </a:lnRef>
+          <a:fillRef idx="3">
+            <a:schemeClr val="accent1"/>
+          </a:fillRef>
+          <a:effectRef idx="2">
+            <a:schemeClr val="accent1"/>
+          </a:effectRef>
+          <a:fontRef idx="minor">
+            <a:schemeClr val="lt1"/>
+          </a:fontRef>
+        </p:style>
+        <p:txBody>
+          <a:bodyPr rtlCol="0" anchor="ctr" wrap="square" lIns="182880" rIns="182880" tIns="128016" bIns="128016"/>
+          <a:lstStyle/>
+          <a:p>
+            <a:pPr algn="l">
+              <a:lnSpc>
+                <a:spcPct val="130000"/>
+              </a:lnSpc>
+              <a:spcAft>
+                <a:spcPts val="1200"/>
+              </a:spcAft>
+            </a:pPr>
+            <a:r>
+              <a:rPr sz="2000" b="1">
+                <a:solidFill>
+                  <a:srgbClr val="B4690E"/>
+                </a:solidFill>
+                <a:latin typeface="Microsoft JhengHei"/>
+              </a:rPr>
+              <a:t>要注意的坑</a:t>
+            </a:r>
+            <a:r>
+              <a:rPr sz="1600" b="1">
+                <a:solidFill>
+                  <a:srgbClr val="B4690E"/>
+                </a:solidFill>
+                <a:latin typeface="Microsoft JhengHei"/>
+              </a:rPr>
+              <a:t>•  </a:t>
+            </a:r>
+            <a:r>
+              <a:rPr sz="1600" b="0">
+                <a:solidFill>
+                  <a:srgbClr val="36404F"/>
+                </a:solidFill>
+                <a:latin typeface="Microsoft JhengHei"/>
+              </a:rPr>
+              <a:t>需求講得模糊，AI 會自己腦補，要靠驗收抓出來</a:t>
+            </a:r>
+          </a:p>
+          <a:p>
+            <a:pPr algn="l">
+              <a:lnSpc>
+                <a:spcPct val="130000"/>
+              </a:lnSpc>
+              <a:spcAft>
+                <a:spcPts val="1200"/>
+              </a:spcAft>
+            </a:pPr>
+            <a:r>
+              <a:rPr sz="1600" b="1">
+                <a:solidFill>
+                  <a:srgbClr val="B4690E"/>
+                </a:solidFill>
+                <a:latin typeface="Microsoft JhengHei"/>
+              </a:rPr>
+              <a:t>•  </a:t>
+            </a:r>
+            <a:r>
+              <a:rPr sz="1600" b="0">
+                <a:solidFill>
+                  <a:srgbClr val="36404F"/>
+                </a:solidFill>
+                <a:latin typeface="Microsoft JhengHei"/>
+              </a:rPr>
+              <a:t>同個地方改多次，要提醒 AI 別蓋掉之前的修正</a:t>
+            </a:r>
+          </a:p>
+          <a:p>
+            <a:pPr algn="l">
+              <a:lnSpc>
+                <a:spcPct val="130000"/>
+              </a:lnSpc>
+              <a:spcAft>
+                <a:spcPts val="1200"/>
+              </a:spcAft>
+            </a:pPr>
+            <a:r>
+              <a:rPr sz="1600" b="1">
+                <a:solidFill>
+                  <a:srgbClr val="B4690E"/>
+                </a:solidFill>
+                <a:latin typeface="Microsoft JhengHei"/>
+              </a:rPr>
+              <a:t>•  </a:t>
+            </a:r>
+            <a:r>
+              <a:rPr sz="1600" b="0">
+                <a:solidFill>
+                  <a:srgbClr val="36404F"/>
+                </a:solidFill>
+                <a:latin typeface="Microsoft JhengHei"/>
+              </a:rPr>
+              <a:t>AI 說「做完了」不等於真的好了，驗收不能省</a:t>
+            </a:r>
+          </a:p>
+        </p:txBody>
+      </p:sp>
+    </p:spTree>
+  </p:cSld>
+  <p:clrMapOvr>
+    <a:masterClrMapping/>
+  </p:clrMapOvr>
+</p:sld>
+</file>
+
+<file path=ppt/slides/slide11.xml><?xml version="1.0" encoding="utf-8"?>
+<p:sld xmlns:a="http://schemas.openxmlformats.org/drawingml/2006/main" xmlns:p="http://schemas.openxmlformats.org/presentationml/2006/main" xmlns:r="http://schemas.openxmlformats.org/officeDocument/2006/relationships">
+  <p:cSld>
+    <p:bg>
+      <p:bgPr>
+        <a:solidFill>
+          <a:srgbClr val="F4F6F9"/>
+        </a:solidFill>
+        <a:effectLst/>
+      </p:bgPr>
+    </p:bg>
+    <p:spTree>
+      <p:nvGrpSpPr>
+        <p:cNvPr id="1" name=""/>
+        <p:cNvGrpSpPr/>
+        <p:nvPr/>
+      </p:nvGrpSpPr>
+      <p:grpSpPr/>
+      <p:sp>
+        <p:nvSpPr>
+          <p:cNvPr id="2" name="TextBox 1"/>
+          <p:cNvSpPr txBox="1"/>
+          <p:nvPr/>
+        </p:nvSpPr>
+        <p:spPr>
+          <a:xfrm>
+            <a:off x="731520" y="502920"/>
+            <a:ext cx="10698480" cy="914400"/>
+          </a:xfrm>
+          <a:prstGeom prst="rect">
+            <a:avLst/>
+          </a:prstGeom>
+          <a:noFill/>
+        </p:spPr>
+        <p:txBody>
+          <a:bodyPr wrap="square">
+            <a:spAutoFit/>
+          </a:bodyPr>
+          <a:lstStyle/>
+          <a:p>
+            <a:pPr algn="l">
+              <a:spcAft>
+                <a:spcPts val="600"/>
+              </a:spcAft>
+            </a:pPr>
+            <a:r>
+              <a:rPr sz="3000" b="1">
+                <a:solidFill>
+                  <a:srgbClr val="1B2330"/>
+                </a:solidFill>
+                <a:latin typeface="Microsoft JhengHei"/>
+              </a:rPr>
+              <a:t>如果你也想試：</a:t>
+            </a:r>
+            <a:r>
+              <a:rPr sz="3000" b="1">
+                <a:solidFill>
+                  <a:srgbClr val="0B8F6E"/>
+                </a:solidFill>
+                <a:latin typeface="Microsoft JhengHei"/>
+              </a:rPr>
+              <a:t>三個建議</a:t>
+            </a:r>
+          </a:p>
+        </p:txBody>
+      </p:sp>
+      <p:sp>
+        <p:nvSpPr>
+          <p:cNvPr id="3" name="Rounded Rectangle 2"/>
+          <p:cNvSpPr/>
+          <p:nvPr/>
+        </p:nvSpPr>
+        <p:spPr>
+          <a:xfrm>
+            <a:off x="731520" y="1554480"/>
+            <a:ext cx="10698480" cy="1143000"/>
+          </a:xfrm>
+          <a:prstGeom prst="roundRect">
+            <a:avLst>
+              <a:gd name="adj" fmla="val 6000"/>
+            </a:avLst>
+          </a:prstGeom>
+          <a:solidFill>
+            <a:srgbClr val="FFFFFF"/>
+          </a:solidFill>
+          <a:ln w="12700">
+            <a:solidFill>
+              <a:srgbClr val="DDE2EA"/>
+            </a:solidFill>
+          </a:ln>
+          <a:effectLst/>
+        </p:spPr>
+        <p:style>
+          <a:lnRef idx="1">
+            <a:schemeClr val="accent1"/>
+          </a:lnRef>
+          <a:fillRef idx="3">
+            <a:schemeClr val="accent1"/>
+          </a:fillRef>
+          <a:effectRef idx="2">
+            <a:schemeClr val="accent1"/>
+          </a:effectRef>
+          <a:fontRef idx="minor">
+            <a:schemeClr val="lt1"/>
+          </a:fontRef>
+        </p:style>
+        <p:txBody>
+          <a:bodyPr rtlCol="0" anchor="ctr" wrap="square" lIns="182880" rIns="182880" tIns="128016" bIns="128016"/>
+          <a:lstStyle/>
+          <a:p>
+            <a:pPr algn="l">
+              <a:spcAft>
+                <a:spcPts val="400"/>
+              </a:spcAft>
+            </a:pPr>
+            <a:r>
+              <a:rPr sz="1900" b="1">
+                <a:solidFill>
+                  <a:srgbClr val="1B2330"/>
+                </a:solidFill>
+                <a:latin typeface="Microsoft JhengHei"/>
+              </a:rPr>
+              <a:t>把自己當 PM，不是工程師</a:t>
+            </a:r>
+          </a:p>
+          <a:p>
+            <a:pPr algn="l">
+              <a:spcAft>
+                <a:spcPts val="0"/>
+              </a:spcAft>
+            </a:pPr>
+            <a:r>
+              <a:rPr sz="1500" b="0">
+                <a:solidFill>
+                  <a:srgbClr val="5B6678"/>
+                </a:solidFill>
+                <a:latin typeface="Microsoft JhengHei"/>
+              </a:rPr>
+              <a:t>你的價值是懂業務、會驗收，程式碼交給 AI</a:t>
+            </a:r>
+          </a:p>
+        </p:txBody>
+      </p:sp>
+      <p:sp>
+        <p:nvSpPr>
+          <p:cNvPr id="4" name="Rounded Rectangle 3"/>
+          <p:cNvSpPr/>
+          <p:nvPr/>
+        </p:nvSpPr>
+        <p:spPr>
+          <a:xfrm>
+            <a:off x="731520" y="2880360"/>
+            <a:ext cx="10698480" cy="1143000"/>
+          </a:xfrm>
+          <a:prstGeom prst="roundRect">
+            <a:avLst>
+              <a:gd name="adj" fmla="val 6000"/>
+            </a:avLst>
+          </a:prstGeom>
+          <a:solidFill>
+            <a:srgbClr val="FFFFFF"/>
+          </a:solidFill>
+          <a:ln w="12700">
+            <a:solidFill>
+              <a:srgbClr val="DDE2EA"/>
+            </a:solidFill>
+          </a:ln>
+          <a:effectLst/>
+        </p:spPr>
+        <p:style>
+          <a:lnRef idx="1">
+            <a:schemeClr val="accent1"/>
+          </a:lnRef>
+          <a:fillRef idx="3">
+            <a:schemeClr val="accent1"/>
+          </a:fillRef>
+          <a:effectRef idx="2">
+            <a:schemeClr val="accent1"/>
+          </a:effectRef>
+          <a:fontRef idx="minor">
+            <a:schemeClr val="lt1"/>
+          </a:fontRef>
+        </p:style>
+        <p:txBody>
+          <a:bodyPr rtlCol="0" anchor="ctr" wrap="square" lIns="182880" rIns="182880" tIns="128016" bIns="128016"/>
+          <a:lstStyle/>
+          <a:p>
+            <a:pPr algn="l">
+              <a:spcAft>
+                <a:spcPts val="400"/>
+              </a:spcAft>
+            </a:pPr>
+            <a:r>
+              <a:rPr sz="1900" b="1">
+                <a:solidFill>
+                  <a:srgbClr val="1B2330"/>
+                </a:solidFill>
+                <a:latin typeface="Microsoft JhengHei"/>
+              </a:rPr>
+              <a:t>先建立閉環，再追求速度</a:t>
+            </a:r>
+          </a:p>
+          <a:p>
+            <a:pPr algn="l">
+              <a:spcAft>
+                <a:spcPts val="0"/>
+              </a:spcAft>
+            </a:pPr>
+            <a:r>
+              <a:rPr sz="1500" b="0">
+                <a:solidFill>
+                  <a:srgbClr val="5B6678"/>
+                </a:solidFill>
+                <a:latin typeface="Microsoft JhengHei"/>
+              </a:rPr>
+              <a:t>把「需求、PR、驗收」一圈跑順，再放大功能範圍</a:t>
+            </a:r>
+          </a:p>
+        </p:txBody>
+      </p:sp>
+      <p:sp>
+        <p:nvSpPr>
+          <p:cNvPr id="5" name="Rounded Rectangle 4"/>
+          <p:cNvSpPr/>
+          <p:nvPr/>
+        </p:nvSpPr>
+        <p:spPr>
+          <a:xfrm>
+            <a:off x="731520" y="4206240"/>
+            <a:ext cx="10698480" cy="1143000"/>
+          </a:xfrm>
+          <a:prstGeom prst="roundRect">
+            <a:avLst>
+              <a:gd name="adj" fmla="val 6000"/>
+            </a:avLst>
+          </a:prstGeom>
+          <a:solidFill>
+            <a:srgbClr val="FFFFFF"/>
+          </a:solidFill>
+          <a:ln w="12700">
+            <a:solidFill>
+              <a:srgbClr val="DDE2EA"/>
+            </a:solidFill>
+          </a:ln>
+          <a:effectLst/>
+        </p:spPr>
+        <p:style>
+          <a:lnRef idx="1">
+            <a:schemeClr val="accent1"/>
+          </a:lnRef>
+          <a:fillRef idx="3">
+            <a:schemeClr val="accent1"/>
+          </a:fillRef>
+          <a:effectRef idx="2">
+            <a:schemeClr val="accent1"/>
+          </a:effectRef>
+          <a:fontRef idx="minor">
+            <a:schemeClr val="lt1"/>
+          </a:fontRef>
+        </p:style>
+        <p:txBody>
+          <a:bodyPr rtlCol="0" anchor="ctr" wrap="square" lIns="182880" rIns="182880" tIns="128016" bIns="128016"/>
+          <a:lstStyle/>
+          <a:p>
+            <a:pPr algn="l">
+              <a:spcAft>
+                <a:spcPts val="400"/>
+              </a:spcAft>
+            </a:pPr>
+            <a:r>
+              <a:rPr sz="1900" b="1">
+                <a:solidFill>
+                  <a:srgbClr val="1B2330"/>
+                </a:solidFill>
+                <a:latin typeface="Microsoft JhengHei"/>
+              </a:rPr>
+              <a:t>把經驗養進 harness</a:t>
+            </a:r>
+          </a:p>
+          <a:p>
+            <a:pPr algn="l">
+              <a:spcAft>
+                <a:spcPts val="0"/>
+              </a:spcAft>
+            </a:pPr>
+            <a:r>
+              <a:rPr sz="1500" b="0">
+                <a:solidFill>
+                  <a:srgbClr val="5B6678"/>
+                </a:solidFill>
+                <a:latin typeface="Microsoft JhengHei"/>
+              </a:rPr>
+              <a:t>守則檔、交接、測試，讓 AI 從「臨時工」變「老員工」</a:t>
+            </a:r>
+          </a:p>
+        </p:txBody>
+      </p:sp>
+      <p:sp>
+        <p:nvSpPr>
+          <p:cNvPr id="6" name="TextBox 5"/>
+          <p:cNvSpPr txBox="1"/>
+          <p:nvPr/>
+        </p:nvSpPr>
+        <p:spPr>
+          <a:xfrm>
+            <a:off x="731520" y="5715000"/>
+            <a:ext cx="10698480" cy="822960"/>
+          </a:xfrm>
+          <a:prstGeom prst="rect">
+            <a:avLst/>
+          </a:prstGeom>
+          <a:noFill/>
+        </p:spPr>
+        <p:txBody>
+          <a:bodyPr wrap="square">
+            <a:spAutoFit/>
+          </a:bodyPr>
+          <a:lstStyle/>
+          <a:p>
+            <a:pPr algn="l">
+              <a:spcAft>
+                <a:spcPts val="600"/>
+              </a:spcAft>
+            </a:pPr>
+            <a:r>
+              <a:rPr sz="1600" b="0">
+                <a:solidFill>
+                  <a:srgbClr val="5B6678"/>
+                </a:solidFill>
+                <a:latin typeface="Microsoft JhengHei"/>
+              </a:rPr>
+              <a:t>門檻不是會不會寫程式，是能不能把需求講清楚、願不願意認真驗收。</a:t>
+            </a:r>
+          </a:p>
+        </p:txBody>
+      </p:sp>
+    </p:spTree>
+  </p:cSld>
+  <p:clrMapOvr>
+    <a:masterClrMapping/>
+  </p:clrMapOvr>
+</p:sld>
+</file>
+
+<file path=ppt/slides/slide12.xml><?xml version="1.0" encoding="utf-8"?>
+<p:sld xmlns:a="http://schemas.openxmlformats.org/drawingml/2006/main" xmlns:p="http://schemas.openxmlformats.org/presentationml/2006/main" xmlns:r="http://schemas.openxmlformats.org/officeDocument/2006/relationships">
+  <p:cSld>
+    <p:bg>
+      <p:bgPr>
+        <a:solidFill>
+          <a:srgbClr val="F4F6F9"/>
+        </a:solidFill>
+        <a:effectLst/>
+      </p:bgPr>
+    </p:bg>
+    <p:spTree>
+      <p:nvGrpSpPr>
+        <p:cNvPr id="1" name=""/>
+        <p:cNvGrpSpPr/>
+        <p:nvPr/>
+      </p:nvGrpSpPr>
+      <p:grpSpPr/>
+      <p:sp>
+        <p:nvSpPr>
+          <p:cNvPr id="2" name="TextBox 1"/>
+          <p:cNvSpPr txBox="1"/>
+          <p:nvPr/>
+        </p:nvSpPr>
+        <p:spPr>
+          <a:xfrm>
+            <a:off x="914400" y="1737360"/>
+            <a:ext cx="10332720" cy="3840480"/>
+          </a:xfrm>
+          <a:prstGeom prst="rect">
+            <a:avLst/>
+          </a:prstGeom>
+          <a:noFill/>
+        </p:spPr>
+        <p:txBody>
+          <a:bodyPr wrap="square">
+            <a:spAutoFit/>
+          </a:bodyPr>
+          <a:lstStyle/>
+          <a:p>
+            <a:pPr algn="l">
+              <a:spcAft>
+                <a:spcPts val="1800"/>
+              </a:spcAft>
+            </a:pPr>
+            <a:r>
+              <a:rPr sz="1500" b="1">
+                <a:solidFill>
+                  <a:srgbClr val="0B8F6E"/>
                 </a:solidFill>
                 <a:latin typeface="Microsoft JhengHei"/>
               </a:rPr>
@@ -3326,12 +4071,9 @@
               </a:spcAft>
             </a:pPr>
             <a:r>
-              <a:t/>
-            </a:r>
-            <a:r>
-              <a:rPr sz="3600" b="1">
-                <a:solidFill>
-                  <a:srgbClr val="E8EAF0"/>
+              <a:rPr sz="3400" b="1">
+                <a:solidFill>
+                  <a:srgbClr val="1B2330"/>
                 </a:solidFill>
                 <a:latin typeface="Microsoft JhengHei"/>
               </a:rPr>
@@ -3344,31 +4086,31 @@
                 <a:spcPct val="125000"/>
               </a:lnSpc>
               <a:spcAft>
-                <a:spcPts val="2400"/>
-              </a:spcAft>
-            </a:pPr>
-            <a:r>
-              <a:rPr sz="3600" b="1">
-                <a:solidFill>
-                  <a:srgbClr val="E8EAF0"/>
+                <a:spcPts val="2200"/>
+              </a:spcAft>
+            </a:pPr>
+            <a:r>
+              <a:rPr sz="3400" b="1">
+                <a:solidFill>
+                  <a:srgbClr val="1B2330"/>
                 </a:solidFill>
                 <a:latin typeface="Microsoft JhengHei"/>
               </a:rPr>
               <a:t>但</a:t>
             </a:r>
             <a:r>
-              <a:rPr sz="3600" b="1">
-                <a:solidFill>
-                  <a:srgbClr val="6EE7B7"/>
+              <a:rPr sz="3400" b="1">
+                <a:solidFill>
+                  <a:srgbClr val="0B8F6E"/>
                 </a:solidFill>
                 <a:latin typeface="Microsoft JhengHei"/>
               </a:rPr>
               <a:t>「只有工程師能做系統」</a:t>
             </a:r>
             <a:r>
-              <a:rPr sz="3600" b="1">
-                <a:solidFill>
-                  <a:srgbClr val="E8EAF0"/>
+              <a:rPr sz="3400" b="1">
+                <a:solidFill>
+                  <a:srgbClr val="1B2330"/>
                 </a:solidFill>
                 <a:latin typeface="Microsoft JhengHei"/>
               </a:rPr>
@@ -3377,21 +4119,73 @@
           </a:p>
           <a:p>
             <a:pPr algn="l">
+              <a:lnSpc>
+                <a:spcPct val="150000"/>
+              </a:lnSpc>
+              <a:spcAft>
+                <a:spcPts val="400"/>
+              </a:spcAft>
+            </a:pPr>
+            <a:r>
+              <a:rPr sz="1800" b="0">
+                <a:solidFill>
+                  <a:srgbClr val="5B6678"/>
+                </a:solidFill>
+                <a:latin typeface="Microsoft JhengHei"/>
+              </a:rPr>
+              <a:t>記住兩個字：</a:t>
+            </a:r>
+            <a:r>
+              <a:rPr sz="1800" b="1">
+                <a:solidFill>
+                  <a:srgbClr val="0B8F6E"/>
+                </a:solidFill>
+                <a:latin typeface="Microsoft JhengHei"/>
+              </a:rPr>
+              <a:t>閉環</a:t>
+            </a:r>
+            <a:r>
+              <a:rPr sz="1800" b="0">
+                <a:solidFill>
+                  <a:srgbClr val="5B6678"/>
+                </a:solidFill>
+                <a:latin typeface="Microsoft JhengHei"/>
+              </a:rPr>
+              <a:t>讓品質可控，</a:t>
+            </a:r>
+            <a:r>
+              <a:rPr sz="1800" b="1">
+                <a:solidFill>
+                  <a:srgbClr val="0B8F6E"/>
+                </a:solidFill>
+                <a:latin typeface="Microsoft JhengHei"/>
+              </a:rPr>
+              <a:t>harness</a:t>
+            </a:r>
+            <a:r>
+              <a:rPr sz="1800" b="0">
+                <a:solidFill>
+                  <a:srgbClr val="5B6678"/>
+                </a:solidFill>
+                <a:latin typeface="Microsoft JhengHei"/>
+              </a:rPr>
+              <a:t>讓閉環跑得動。</a:t>
+            </a:r>
+          </a:p>
+          <a:p>
+            <a:pPr algn="l">
               <a:spcAft>
                 <a:spcPts val="600"/>
               </a:spcAft>
             </a:pPr>
             <a:r>
-              <a:t/>
-            </a:r>
-            <a:r>
               <a:rPr sz="1800" b="0">
                 <a:solidFill>
-                  <a:srgbClr val="9AA3B5"/>
-                </a:solidFill>
-                <a:latin typeface="Microsoft JhengHei"/>
-              </a:rPr>
-              <a:t>Q &amp; A — 歡迎現場示範一次「講需求 → AI 發 PR」給大家看。</a:t>
+                  <a:srgbClr val="5B6678"/>
+                </a:solidFill>
+                <a:latin typeface="Microsoft JhengHei"/>
+              </a:rPr>
+              <a:t>Q &amp; A — 歡迎現場示範一次「講需求，AI 發 PR」。</a:t>
             </a:r>
           </a:p>
         </p:txBody>
@@ -3410,7 +4204,7 @@
     <p:bg>
       <p:bgPr>
         <a:solidFill>
-          <a:srgbClr val="0F1117"/>
+          <a:srgbClr val="F4F6F9"/>
         </a:solidFill>
         <a:effectLst/>
       </p:bgPr>
@@ -3430,8 +4224,8 @@
         </p:nvSpPr>
         <p:spPr>
           <a:xfrm>
-            <a:off x="731520" y="457200"/>
-            <a:ext cx="10698480" cy="822960"/>
+            <a:off x="731520" y="502920"/>
+            <a:ext cx="10698480" cy="914400"/>
           </a:xfrm>
           <a:prstGeom prst="rect">
             <a:avLst/>
@@ -3452,7 +4246,7 @@
             <a:r>
               <a:rPr sz="3000" b="1">
                 <a:solidFill>
-                  <a:srgbClr val="E8EAF0"/>
+                  <a:srgbClr val="1B2330"/>
                 </a:solidFill>
                 <a:latin typeface="Microsoft JhengHei"/>
               </a:rPr>
@@ -3461,7 +4255,7 @@
             <a:r>
               <a:rPr sz="3000" b="1">
                 <a:solidFill>
-                  <a:srgbClr val="6EE7B7"/>
+                  <a:srgbClr val="0B8F6E"/>
                 </a:solidFill>
                 <a:latin typeface="Microsoft JhengHei"/>
               </a:rPr>
@@ -3470,7 +4264,7 @@
             <a:r>
               <a:rPr sz="3000" b="1">
                 <a:solidFill>
-                  <a:srgbClr val="E8EAF0"/>
+                  <a:srgbClr val="1B2330"/>
                 </a:solidFill>
                 <a:latin typeface="Microsoft JhengHei"/>
               </a:rPr>
@@ -3491,14 +4285,16 @@
             <a:ext cx="3429000" cy="1783080"/>
           </a:xfrm>
           <a:prstGeom prst="roundRect">
-            <a:avLst/>
+            <a:avLst>
+              <a:gd name="adj" fmla="val 6000"/>
+            </a:avLst>
           </a:prstGeom>
           <a:solidFill>
-            <a:srgbClr val="1A1F2B"/>
+            <a:srgbClr val="FFFFFF"/>
           </a:solidFill>
           <a:ln w="12700">
             <a:solidFill>
-              <a:srgbClr val="2A3245"/>
+              <a:srgbClr val="DDE2EA"/>
             </a:solidFill>
           </a:ln>
           <a:effectLst/>
@@ -3518,7 +4314,7 @@
           </a:fontRef>
         </p:style>
         <p:txBody>
-          <a:bodyPr rtlCol="0" anchor="ctr" wrap="square" lIns="164592" rIns="164592" tIns="109728" bIns="109728"/>
+          <a:bodyPr rtlCol="0" anchor="ctr" wrap="square" lIns="182880" rIns="182880" tIns="128016" bIns="128016"/>
           <a:lstStyle/>
           <a:p>
             <a:pPr algn="l">
@@ -3527,12 +4323,9 @@
               </a:spcAft>
             </a:pPr>
             <a:r>
-              <a:t/>
-            </a:r>
-            <a:r>
               <a:rPr sz="3200" b="1">
                 <a:solidFill>
-                  <a:srgbClr val="6EE7B7"/>
+                  <a:srgbClr val="0B8F6E"/>
                 </a:solidFill>
                 <a:latin typeface="Microsoft JhengHei"/>
               </a:rPr>
@@ -3549,12 +4342,9 @@
               </a:spcAft>
             </a:pPr>
             <a:r>
-              <a:t/>
-            </a:r>
-            <a:r>
               <a:rPr sz="1300" b="0">
                 <a:solidFill>
-                  <a:srgbClr val="9AA3B5"/>
+                  <a:srgbClr val="5B6678"/>
                 </a:solidFill>
                 <a:latin typeface="Microsoft JhengHei"/>
               </a:rPr>
@@ -3571,12 +4361,9 @@
               </a:spcAft>
             </a:pPr>
             <a:r>
-              <a:t/>
-            </a:r>
-            <a:r>
               <a:rPr sz="1300" b="0">
                 <a:solidFill>
-                  <a:srgbClr val="9AA3B5"/>
+                  <a:srgbClr val="5B6678"/>
                 </a:solidFill>
                 <a:latin typeface="Microsoft JhengHei"/>
               </a:rPr>
@@ -3597,14 +4384,16 @@
             <a:ext cx="3429000" cy="1783080"/>
           </a:xfrm>
           <a:prstGeom prst="roundRect">
-            <a:avLst/>
+            <a:avLst>
+              <a:gd name="adj" fmla="val 6000"/>
+            </a:avLst>
           </a:prstGeom>
           <a:solidFill>
-            <a:srgbClr val="1A1F2B"/>
+            <a:srgbClr val="FFFFFF"/>
           </a:solidFill>
           <a:ln w="12700">
             <a:solidFill>
-              <a:srgbClr val="2A3245"/>
+              <a:srgbClr val="DDE2EA"/>
             </a:solidFill>
           </a:ln>
           <a:effectLst/>
@@ -3624,7 +4413,7 @@
           </a:fontRef>
         </p:style>
         <p:txBody>
-          <a:bodyPr rtlCol="0" anchor="ctr" wrap="square" lIns="164592" rIns="164592" tIns="109728" bIns="109728"/>
+          <a:bodyPr rtlCol="0" anchor="ctr" wrap="square" lIns="182880" rIns="182880" tIns="128016" bIns="128016"/>
           <a:lstStyle/>
           <a:p>
             <a:pPr algn="l">
@@ -3633,12 +4422,9 @@
               </a:spcAft>
             </a:pPr>
             <a:r>
-              <a:t/>
-            </a:r>
-            <a:r>
               <a:rPr sz="3200" b="1">
                 <a:solidFill>
-                  <a:srgbClr val="6EE7B7"/>
+                  <a:srgbClr val="0B8F6E"/>
                 </a:solidFill>
                 <a:latin typeface="Microsoft JhengHei"/>
               </a:rPr>
@@ -3655,12 +4441,9 @@
               </a:spcAft>
             </a:pPr>
             <a:r>
-              <a:t/>
-            </a:r>
-            <a:r>
               <a:rPr sz="1300" b="0">
                 <a:solidFill>
-                  <a:srgbClr val="9AA3B5"/>
+                  <a:srgbClr val="5B6678"/>
                 </a:solidFill>
                 <a:latin typeface="Microsoft JhengHei"/>
               </a:rPr>
@@ -3677,16 +4460,13 @@
               </a:spcAft>
             </a:pPr>
             <a:r>
-              <a:t/>
-            </a:r>
-            <a:r>
               <a:rPr sz="1300" b="0">
                 <a:solidFill>
-                  <a:srgbClr val="9AA3B5"/>
-                </a:solidFill>
-                <a:latin typeface="Microsoft JhengHei"/>
-              </a:rPr>
-              <a:t>訂單／採購／撿貨／取貨／庫存／財務…</a:t>
+                  <a:srgbClr val="5B6678"/>
+                </a:solidFill>
+                <a:latin typeface="Microsoft JhengHei"/>
+              </a:rPr>
+              <a:t>訂單／採購／撿貨／取貨／庫存／財務</a:t>
             </a:r>
           </a:p>
         </p:txBody>
@@ -3703,14 +4483,16 @@
             <a:ext cx="3429000" cy="1783080"/>
           </a:xfrm>
           <a:prstGeom prst="roundRect">
-            <a:avLst/>
+            <a:avLst>
+              <a:gd name="adj" fmla="val 6000"/>
+            </a:avLst>
           </a:prstGeom>
           <a:solidFill>
-            <a:srgbClr val="1A1F2B"/>
+            <a:srgbClr val="FFFFFF"/>
           </a:solidFill>
           <a:ln w="12700">
             <a:solidFill>
-              <a:srgbClr val="2A3245"/>
+              <a:srgbClr val="DDE2EA"/>
             </a:solidFill>
           </a:ln>
           <a:effectLst/>
@@ -3730,7 +4512,7 @@
           </a:fontRef>
         </p:style>
         <p:txBody>
-          <a:bodyPr rtlCol="0" anchor="ctr" wrap="square" lIns="164592" rIns="164592" tIns="109728" bIns="109728"/>
+          <a:bodyPr rtlCol="0" anchor="ctr" wrap="square" lIns="182880" rIns="182880" tIns="128016" bIns="128016"/>
           <a:lstStyle/>
           <a:p>
             <a:pPr algn="l">
@@ -3739,12 +4521,9 @@
               </a:spcAft>
             </a:pPr>
             <a:r>
-              <a:t/>
-            </a:r>
-            <a:r>
               <a:rPr sz="3200" b="1">
                 <a:solidFill>
-                  <a:srgbClr val="6EE7B7"/>
+                  <a:srgbClr val="0B8F6E"/>
                 </a:solidFill>
                 <a:latin typeface="Microsoft JhengHei"/>
               </a:rPr>
@@ -3761,12 +4540,9 @@
               </a:spcAft>
             </a:pPr>
             <a:r>
-              <a:t/>
-            </a:r>
-            <a:r>
               <a:rPr sz="1300" b="0">
                 <a:solidFill>
-                  <a:srgbClr val="9AA3B5"/>
+                  <a:srgbClr val="5B6678"/>
                 </a:solidFill>
                 <a:latin typeface="Microsoft JhengHei"/>
               </a:rPr>
@@ -3783,12 +4559,9 @@
               </a:spcAft>
             </a:pPr>
             <a:r>
-              <a:t/>
-            </a:r>
-            <a:r>
               <a:rPr sz="1300" b="0">
                 <a:solidFill>
-                  <a:srgbClr val="9AA3B5"/>
+                  <a:srgbClr val="5B6678"/>
                 </a:solidFill>
                 <a:latin typeface="Microsoft JhengHei"/>
               </a:rPr>
@@ -3809,14 +4582,16 @@
             <a:ext cx="3429000" cy="1783080"/>
           </a:xfrm>
           <a:prstGeom prst="roundRect">
-            <a:avLst/>
+            <a:avLst>
+              <a:gd name="adj" fmla="val 6000"/>
+            </a:avLst>
           </a:prstGeom>
           <a:solidFill>
-            <a:srgbClr val="1A1F2B"/>
+            <a:srgbClr val="FFFFFF"/>
           </a:solidFill>
           <a:ln w="12700">
             <a:solidFill>
-              <a:srgbClr val="2A3245"/>
+              <a:srgbClr val="DDE2EA"/>
             </a:solidFill>
           </a:ln>
           <a:effectLst/>
@@ -3836,7 +4611,7 @@
           </a:fontRef>
         </p:style>
         <p:txBody>
-          <a:bodyPr rtlCol="0" anchor="ctr" wrap="square" lIns="164592" rIns="164592" tIns="109728" bIns="109728"/>
+          <a:bodyPr rtlCol="0" anchor="ctr" wrap="square" lIns="182880" rIns="182880" tIns="128016" bIns="128016"/>
           <a:lstStyle/>
           <a:p>
             <a:pPr algn="l">
@@ -3845,12 +4620,9 @@
               </a:spcAft>
             </a:pPr>
             <a:r>
-              <a:t/>
-            </a:r>
-            <a:r>
               <a:rPr sz="3200" b="1">
                 <a:solidFill>
-                  <a:srgbClr val="6EE7B7"/>
+                  <a:srgbClr val="0B8F6E"/>
                 </a:solidFill>
                 <a:latin typeface="Microsoft JhengHei"/>
               </a:rPr>
@@ -3867,12 +4639,9 @@
               </a:spcAft>
             </a:pPr>
             <a:r>
-              <a:t/>
-            </a:r>
-            <a:r>
               <a:rPr sz="1300" b="0">
                 <a:solidFill>
-                  <a:srgbClr val="9AA3B5"/>
+                  <a:srgbClr val="5B6678"/>
                 </a:solidFill>
                 <a:latin typeface="Microsoft JhengHei"/>
               </a:rPr>
@@ -3889,12 +4658,9 @@
               </a:spcAft>
             </a:pPr>
             <a:r>
-              <a:t/>
-            </a:r>
-            <a:r>
               <a:rPr sz="1300" b="0">
                 <a:solidFill>
-                  <a:srgbClr val="9AA3B5"/>
+                  <a:srgbClr val="5B6678"/>
                 </a:solidFill>
                 <a:latin typeface="Microsoft JhengHei"/>
               </a:rPr>
@@ -3915,14 +4681,16 @@
             <a:ext cx="3429000" cy="1783080"/>
           </a:xfrm>
           <a:prstGeom prst="roundRect">
-            <a:avLst/>
+            <a:avLst>
+              <a:gd name="adj" fmla="val 6000"/>
+            </a:avLst>
           </a:prstGeom>
           <a:solidFill>
-            <a:srgbClr val="1A1F2B"/>
+            <a:srgbClr val="FFFFFF"/>
           </a:solidFill>
           <a:ln w="12700">
             <a:solidFill>
-              <a:srgbClr val="2A3245"/>
+              <a:srgbClr val="DDE2EA"/>
             </a:solidFill>
           </a:ln>
           <a:effectLst/>
@@ -3942,7 +4710,7 @@
           </a:fontRef>
         </p:style>
         <p:txBody>
-          <a:bodyPr rtlCol="0" anchor="ctr" wrap="square" lIns="164592" rIns="164592" tIns="109728" bIns="109728"/>
+          <a:bodyPr rtlCol="0" anchor="ctr" wrap="square" lIns="182880" rIns="182880" tIns="128016" bIns="128016"/>
           <a:lstStyle/>
           <a:p>
             <a:pPr algn="l">
@@ -3951,12 +4719,9 @@
               </a:spcAft>
             </a:pPr>
             <a:r>
-              <a:t/>
-            </a:r>
-            <a:r>
               <a:rPr sz="3200" b="1">
                 <a:solidFill>
-                  <a:srgbClr val="6EE7B7"/>
+                  <a:srgbClr val="0B8F6E"/>
                 </a:solidFill>
                 <a:latin typeface="Microsoft JhengHei"/>
               </a:rPr>
@@ -3973,12 +4738,9 @@
               </a:spcAft>
             </a:pPr>
             <a:r>
-              <a:t/>
-            </a:r>
-            <a:r>
               <a:rPr sz="1300" b="0">
                 <a:solidFill>
-                  <a:srgbClr val="9AA3B5"/>
+                  <a:srgbClr val="5B6678"/>
                 </a:solidFill>
                 <a:latin typeface="Microsoft JhengHei"/>
               </a:rPr>
@@ -3995,12 +4757,9 @@
               </a:spcAft>
             </a:pPr>
             <a:r>
-              <a:t/>
-            </a:r>
-            <a:r>
               <a:rPr sz="1300" b="0">
                 <a:solidFill>
-                  <a:srgbClr val="9AA3B5"/>
+                  <a:srgbClr val="5B6678"/>
                 </a:solidFill>
                 <a:latin typeface="Microsoft JhengHei"/>
               </a:rPr>
@@ -4021,14 +4780,16 @@
             <a:ext cx="3429000" cy="1783080"/>
           </a:xfrm>
           <a:prstGeom prst="roundRect">
-            <a:avLst/>
+            <a:avLst>
+              <a:gd name="adj" fmla="val 6000"/>
+            </a:avLst>
           </a:prstGeom>
           <a:solidFill>
-            <a:srgbClr val="1A1F2B"/>
+            <a:srgbClr val="FFFFFF"/>
           </a:solidFill>
           <a:ln w="12700">
             <a:solidFill>
-              <a:srgbClr val="2A3245"/>
+              <a:srgbClr val="DDE2EA"/>
             </a:solidFill>
           </a:ln>
           <a:effectLst/>
@@ -4048,7 +4809,7 @@
           </a:fontRef>
         </p:style>
         <p:txBody>
-          <a:bodyPr rtlCol="0" anchor="ctr" wrap="square" lIns="164592" rIns="164592" tIns="109728" bIns="109728"/>
+          <a:bodyPr rtlCol="0" anchor="ctr" wrap="square" lIns="182880" rIns="182880" tIns="128016" bIns="128016"/>
           <a:lstStyle/>
           <a:p>
             <a:pPr algn="l">
@@ -4057,12 +4818,9 @@
               </a:spcAft>
             </a:pPr>
             <a:r>
-              <a:t/>
-            </a:r>
-            <a:r>
               <a:rPr sz="3200" b="1">
                 <a:solidFill>
-                  <a:srgbClr val="6EE7B7"/>
+                  <a:srgbClr val="0B8F6E"/>
                 </a:solidFill>
                 <a:latin typeface="Microsoft JhengHei"/>
               </a:rPr>
@@ -4079,12 +4837,9 @@
               </a:spcAft>
             </a:pPr>
             <a:r>
-              <a:t/>
-            </a:r>
-            <a:r>
               <a:rPr sz="1300" b="0">
                 <a:solidFill>
-                  <a:srgbClr val="9AA3B5"/>
+                  <a:srgbClr val="5B6678"/>
                 </a:solidFill>
                 <a:latin typeface="Microsoft JhengHei"/>
               </a:rPr>
@@ -4101,16 +4856,13 @@
               </a:spcAft>
             </a:pPr>
             <a:r>
-              <a:t/>
-            </a:r>
-            <a:r>
               <a:rPr sz="1300" b="0">
                 <a:solidFill>
-                  <a:srgbClr val="9AA3B5"/>
-                </a:solidFill>
-                <a:latin typeface="Microsoft JhengHei"/>
-              </a:rPr>
-              <a:t>交接文件——也都是 AI 寫的</a:t>
+                  <a:srgbClr val="5B6678"/>
+                </a:solidFill>
+                <a:latin typeface="Microsoft JhengHei"/>
+              </a:rPr>
+              <a:t>交接，也是 AI 寫的</a:t>
             </a:r>
           </a:p>
         </p:txBody>
@@ -4146,16 +4898,13 @@
               </a:spcAft>
             </a:pPr>
             <a:r>
-              <a:t/>
-            </a:r>
-            <a:r>
               <a:rPr sz="1500" b="0">
                 <a:solidFill>
-                  <a:srgbClr val="9AA3B5"/>
-                </a:solidFill>
-                <a:latin typeface="Microsoft JhengHei"/>
-              </a:rPr>
-              <a:t>場景：團購店 ERP — 總倉 1 + 門市 + 上萬 SKU，開團 → 下單 → 採購 → 進貨 → 撿貨 → 取貨全流程。</a:t>
+                  <a:srgbClr val="5B6678"/>
+                </a:solidFill>
+                <a:latin typeface="Microsoft JhengHei"/>
+              </a:rPr>
+              <a:t>場景：團購店 ERP — 總倉 1 + 門市 + 上萬 SKU，開團、下單、採購、進貨、撿貨、取貨全流程。</a:t>
             </a:r>
           </a:p>
         </p:txBody>
@@ -4174,7 +4923,7 @@
     <p:bg>
       <p:bgPr>
         <a:solidFill>
-          <a:srgbClr val="0F1117"/>
+          <a:srgbClr val="F4F6F9"/>
         </a:solidFill>
         <a:effectLst/>
       </p:bgPr>
@@ -4194,8 +4943,8 @@
         </p:nvSpPr>
         <p:spPr>
           <a:xfrm>
-            <a:off x="731520" y="548640"/>
-            <a:ext cx="10698480" cy="822960"/>
+            <a:off x="731520" y="502920"/>
+            <a:ext cx="10698480" cy="914400"/>
           </a:xfrm>
           <a:prstGeom prst="rect">
             <a:avLst/>
@@ -4216,7 +4965,7 @@
             <a:r>
               <a:rPr sz="3000" b="1">
                 <a:solidFill>
-                  <a:srgbClr val="E8EAF0"/>
+                  <a:srgbClr val="1B2330"/>
                 </a:solidFill>
                 <a:latin typeface="Microsoft JhengHei"/>
               </a:rPr>
@@ -4225,7 +4974,7 @@
             <a:r>
               <a:rPr sz="3000" b="1">
                 <a:solidFill>
-                  <a:srgbClr val="6EE7B7"/>
+                  <a:srgbClr val="0B8F6E"/>
                 </a:solidFill>
                 <a:latin typeface="Microsoft JhengHei"/>
               </a:rPr>
@@ -4242,18 +4991,20 @@
         </p:nvSpPr>
         <p:spPr>
           <a:xfrm>
-            <a:off x="731520" y="1645920"/>
-            <a:ext cx="5212080" cy="4206240"/>
+            <a:off x="731520" y="1600200"/>
+            <a:ext cx="5212080" cy="4297680"/>
           </a:xfrm>
           <a:prstGeom prst="roundRect">
-            <a:avLst/>
+            <a:avLst>
+              <a:gd name="adj" fmla="val 6000"/>
+            </a:avLst>
           </a:prstGeom>
           <a:solidFill>
-            <a:srgbClr val="1A1F2B"/>
+            <a:srgbClr val="FFFFFF"/>
           </a:solidFill>
           <a:ln w="12700">
             <a:solidFill>
-              <a:srgbClr val="2A3245"/>
+              <a:srgbClr val="DDE2EA"/>
             </a:solidFill>
           </a:ln>
           <a:effectLst/>
@@ -4273,24 +5024,21 @@
           </a:fontRef>
         </p:style>
         <p:txBody>
-          <a:bodyPr rtlCol="0" anchor="ctr" wrap="square" lIns="164592" rIns="164592" tIns="109728" bIns="109728"/>
+          <a:bodyPr rtlCol="0" anchor="ctr" wrap="square" lIns="182880" rIns="182880" tIns="128016" bIns="128016"/>
           <a:lstStyle/>
           <a:p>
             <a:pPr algn="l">
               <a:lnSpc>
-                <a:spcPct val="125000"/>
+                <a:spcPct val="130000"/>
               </a:lnSpc>
               <a:spcAft>
                 <a:spcPts val="1200"/>
               </a:spcAft>
             </a:pPr>
             <a:r>
-              <a:t/>
-            </a:r>
-            <a:r>
               <a:rPr sz="2000" b="1">
                 <a:solidFill>
-                  <a:srgbClr val="FBBF24"/>
+                  <a:srgbClr val="B4690E"/>
                 </a:solidFill>
                 <a:latin typeface="Microsoft JhengHei"/>
               </a:rPr>
@@ -4299,16 +5047,16 @@
             <a:r>
               <a:rPr sz="1700" b="1">
                 <a:solidFill>
-                  <a:srgbClr val="6EE7B7"/>
-                </a:solidFill>
-                <a:latin typeface="Microsoft JhengHei"/>
-              </a:rPr>
-              <a:t>›  </a:t>
+                  <a:srgbClr val="B4690E"/>
+                </a:solidFill>
+                <a:latin typeface="Microsoft JhengHei"/>
+              </a:rPr>
+              <a:t>•  </a:t>
             </a:r>
             <a:r>
               <a:rPr sz="1700" b="0">
                 <a:solidFill>
-                  <a:srgbClr val="E8EAF0"/>
+                  <a:srgbClr val="36404F"/>
                 </a:solidFill>
                 <a:latin typeface="Microsoft JhengHei"/>
               </a:rPr>
@@ -4318,7 +5066,7 @@
           <a:p>
             <a:pPr algn="l">
               <a:lnSpc>
-                <a:spcPct val="125000"/>
+                <a:spcPct val="130000"/>
               </a:lnSpc>
               <a:spcAft>
                 <a:spcPts val="1200"/>
@@ -4327,16 +5075,16 @@
             <a:r>
               <a:rPr sz="1700" b="1">
                 <a:solidFill>
-                  <a:srgbClr val="6EE7B7"/>
-                </a:solidFill>
-                <a:latin typeface="Microsoft JhengHei"/>
-              </a:rPr>
-              <a:t>›  </a:t>
+                  <a:srgbClr val="B4690E"/>
+                </a:solidFill>
+                <a:latin typeface="Microsoft JhengHei"/>
+              </a:rPr>
+              <a:t>•  </a:t>
             </a:r>
             <a:r>
               <a:rPr sz="1700" b="0">
                 <a:solidFill>
-                  <a:srgbClr val="E8EAF0"/>
+                  <a:srgbClr val="36404F"/>
                 </a:solidFill>
                 <a:latin typeface="Microsoft JhengHei"/>
               </a:rPr>
@@ -4346,7 +5094,7 @@
           <a:p>
             <a:pPr algn="l">
               <a:lnSpc>
-                <a:spcPct val="125000"/>
+                <a:spcPct val="130000"/>
               </a:lnSpc>
               <a:spcAft>
                 <a:spcPts val="1200"/>
@@ -4355,16 +5103,16 @@
             <a:r>
               <a:rPr sz="1700" b="1">
                 <a:solidFill>
-                  <a:srgbClr val="6EE7B7"/>
-                </a:solidFill>
-                <a:latin typeface="Microsoft JhengHei"/>
-              </a:rPr>
-              <a:t>›  </a:t>
+                  <a:srgbClr val="B4690E"/>
+                </a:solidFill>
+                <a:latin typeface="Microsoft JhengHei"/>
+              </a:rPr>
+              <a:t>•  </a:t>
             </a:r>
             <a:r>
               <a:rPr sz="1700" b="0">
                 <a:solidFill>
-                  <a:srgbClr val="E8EAF0"/>
+                  <a:srgbClr val="36404F"/>
                 </a:solidFill>
                 <a:latin typeface="Microsoft JhengHei"/>
               </a:rPr>
@@ -4374,7 +5122,7 @@
           <a:p>
             <a:pPr algn="l">
               <a:lnSpc>
-                <a:spcPct val="125000"/>
+                <a:spcPct val="130000"/>
               </a:lnSpc>
               <a:spcAft>
                 <a:spcPts val="1200"/>
@@ -4383,16 +5131,16 @@
             <a:r>
               <a:rPr sz="1700" b="1">
                 <a:solidFill>
-                  <a:srgbClr val="6EE7B7"/>
-                </a:solidFill>
-                <a:latin typeface="Microsoft JhengHei"/>
-              </a:rPr>
-              <a:t>›  </a:t>
+                  <a:srgbClr val="B4690E"/>
+                </a:solidFill>
+                <a:latin typeface="Microsoft JhengHei"/>
+              </a:rPr>
+              <a:t>•  </a:t>
             </a:r>
             <a:r>
               <a:rPr sz="1700" b="0">
                 <a:solidFill>
-                  <a:srgbClr val="E8EAF0"/>
+                  <a:srgbClr val="36404F"/>
                 </a:solidFill>
                 <a:latin typeface="Microsoft JhengHei"/>
               </a:rPr>
@@ -4409,18 +5157,20 @@
         </p:nvSpPr>
         <p:spPr>
           <a:xfrm>
-            <a:off x="6263640" y="1645920"/>
-            <a:ext cx="5212080" cy="4206240"/>
+            <a:off x="6263640" y="1600200"/>
+            <a:ext cx="5212080" cy="4297680"/>
           </a:xfrm>
           <a:prstGeom prst="roundRect">
-            <a:avLst/>
+            <a:avLst>
+              <a:gd name="adj" fmla="val 6000"/>
+            </a:avLst>
           </a:prstGeom>
           <a:solidFill>
-            <a:srgbClr val="1A1F2B"/>
+            <a:srgbClr val="FFFFFF"/>
           </a:solidFill>
           <a:ln w="12700">
             <a:solidFill>
-              <a:srgbClr val="2A3245"/>
+              <a:srgbClr val="DDE2EA"/>
             </a:solidFill>
           </a:ln>
           <a:effectLst/>
@@ -4440,42 +5190,39 @@
           </a:fontRef>
         </p:style>
         <p:txBody>
-          <a:bodyPr rtlCol="0" anchor="ctr" wrap="square" lIns="164592" rIns="164592" tIns="109728" bIns="109728"/>
+          <a:bodyPr rtlCol="0" anchor="ctr" wrap="square" lIns="182880" rIns="182880" tIns="128016" bIns="128016"/>
           <a:lstStyle/>
           <a:p>
             <a:pPr algn="l">
               <a:lnSpc>
-                <a:spcPct val="125000"/>
+                <a:spcPct val="130000"/>
               </a:lnSpc>
               <a:spcAft>
                 <a:spcPts val="1200"/>
               </a:spcAft>
             </a:pPr>
             <a:r>
-              <a:t/>
-            </a:r>
-            <a:r>
               <a:rPr sz="2000" b="1">
                 <a:solidFill>
-                  <a:srgbClr val="6EE7B7"/>
-                </a:solidFill>
-                <a:latin typeface="Microsoft JhengHei"/>
-              </a:rPr>
-              <a:t>AI 做的事（全部的「技術活」）</a:t>
+                  <a:srgbClr val="0B8F6E"/>
+                </a:solidFill>
+                <a:latin typeface="Microsoft JhengHei"/>
+              </a:rPr>
+              <a:t>AI 做的事（全部的技術活）</a:t>
             </a:r>
             <a:r>
               <a:rPr sz="1700" b="1">
                 <a:solidFill>
-                  <a:srgbClr val="6EE7B7"/>
-                </a:solidFill>
-                <a:latin typeface="Microsoft JhengHei"/>
-              </a:rPr>
-              <a:t>›  </a:t>
+                  <a:srgbClr val="0B8F6E"/>
+                </a:solidFill>
+                <a:latin typeface="Microsoft JhengHei"/>
+              </a:rPr>
+              <a:t>•  </a:t>
             </a:r>
             <a:r>
               <a:rPr sz="1700" b="0">
                 <a:solidFill>
-                  <a:srgbClr val="E8EAF0"/>
+                  <a:srgbClr val="36404F"/>
                 </a:solidFill>
                 <a:latin typeface="Microsoft JhengHei"/>
               </a:rPr>
@@ -4485,7 +5232,7 @@
           <a:p>
             <a:pPr algn="l">
               <a:lnSpc>
-                <a:spcPct val="125000"/>
+                <a:spcPct val="130000"/>
               </a:lnSpc>
               <a:spcAft>
                 <a:spcPts val="1200"/>
@@ -4494,16 +5241,16 @@
             <a:r>
               <a:rPr sz="1700" b="1">
                 <a:solidFill>
-                  <a:srgbClr val="6EE7B7"/>
-                </a:solidFill>
-                <a:latin typeface="Microsoft JhengHei"/>
-              </a:rPr>
-              <a:t>›  </a:t>
+                  <a:srgbClr val="0B8F6E"/>
+                </a:solidFill>
+                <a:latin typeface="Microsoft JhengHei"/>
+              </a:rPr>
+              <a:t>•  </a:t>
             </a:r>
             <a:r>
               <a:rPr sz="1700" b="0">
                 <a:solidFill>
-                  <a:srgbClr val="E8EAF0"/>
+                  <a:srgbClr val="36404F"/>
                 </a:solidFill>
                 <a:latin typeface="Microsoft JhengHei"/>
               </a:rPr>
@@ -4513,7 +5260,7 @@
           <a:p>
             <a:pPr algn="l">
               <a:lnSpc>
-                <a:spcPct val="125000"/>
+                <a:spcPct val="130000"/>
               </a:lnSpc>
               <a:spcAft>
                 <a:spcPts val="1200"/>
@@ -4522,16 +5269,16 @@
             <a:r>
               <a:rPr sz="1700" b="1">
                 <a:solidFill>
-                  <a:srgbClr val="6EE7B7"/>
-                </a:solidFill>
-                <a:latin typeface="Microsoft JhengHei"/>
-              </a:rPr>
-              <a:t>›  </a:t>
+                  <a:srgbClr val="0B8F6E"/>
+                </a:solidFill>
+                <a:latin typeface="Microsoft JhengHei"/>
+              </a:rPr>
+              <a:t>•  </a:t>
             </a:r>
             <a:r>
               <a:rPr sz="1700" b="0">
                 <a:solidFill>
-                  <a:srgbClr val="E8EAF0"/>
+                  <a:srgbClr val="36404F"/>
                 </a:solidFill>
                 <a:latin typeface="Microsoft JhengHei"/>
               </a:rPr>
@@ -4541,7 +5288,7 @@
           <a:p>
             <a:pPr algn="l">
               <a:lnSpc>
-                <a:spcPct val="125000"/>
+                <a:spcPct val="130000"/>
               </a:lnSpc>
               <a:spcAft>
                 <a:spcPts val="1200"/>
@@ -4550,16 +5297,16 @@
             <a:r>
               <a:rPr sz="1700" b="1">
                 <a:solidFill>
-                  <a:srgbClr val="6EE7B7"/>
-                </a:solidFill>
-                <a:latin typeface="Microsoft JhengHei"/>
-              </a:rPr>
-              <a:t>›  </a:t>
+                  <a:srgbClr val="0B8F6E"/>
+                </a:solidFill>
+                <a:latin typeface="Microsoft JhengHei"/>
+              </a:rPr>
+              <a:t>•  </a:t>
             </a:r>
             <a:r>
               <a:rPr sz="1700" b="0">
                 <a:solidFill>
-                  <a:srgbClr val="E8EAF0"/>
+                  <a:srgbClr val="36404F"/>
                 </a:solidFill>
                 <a:latin typeface="Microsoft JhengHei"/>
               </a:rPr>
@@ -4582,7 +5329,7 @@
     <p:bg>
       <p:bgPr>
         <a:solidFill>
-          <a:srgbClr val="0F1117"/>
+          <a:srgbClr val="F4F6F9"/>
         </a:solidFill>
         <a:effectLst/>
       </p:bgPr>
@@ -4602,7 +5349,46 @@
         </p:nvSpPr>
         <p:spPr>
           <a:xfrm>
-            <a:off x="731520" y="548640"/>
+            <a:off x="731520" y="274320"/>
+            <a:ext cx="5486400" cy="365760"/>
+          </a:xfrm>
+          <a:prstGeom prst="rect">
+            <a:avLst/>
+          </a:prstGeom>
+          <a:noFill/>
+        </p:spPr>
+        <p:txBody>
+          <a:bodyPr wrap="square">
+            <a:spAutoFit/>
+          </a:bodyPr>
+          <a:lstStyle/>
+          <a:p>
+            <a:pPr algn="l">
+              <a:spcAft>
+                <a:spcPts val="600"/>
+              </a:spcAft>
+            </a:pPr>
+            <a:r>
+              <a:rPr sz="1100" b="1">
+                <a:solidFill>
+                  <a:srgbClr val="0B8F6E"/>
+                </a:solidFill>
+                <a:latin typeface="Microsoft JhengHei"/>
+              </a:rPr>
+              <a:t>核心觀念 1</a:t>
+            </a:r>
+          </a:p>
+        </p:txBody>
+      </p:sp>
+      <p:sp>
+        <p:nvSpPr>
+          <p:cNvPr id="3" name="TextBox 2"/>
+          <p:cNvSpPr txBox="1"/>
+          <p:nvPr/>
+        </p:nvSpPr>
+        <p:spPr>
+          <a:xfrm>
+            <a:off x="731520" y="640080"/>
             <a:ext cx="10698480" cy="822960"/>
           </a:xfrm>
           <a:prstGeom prst="rect">
@@ -4624,44 +5410,55 @@
             <a:r>
               <a:rPr sz="3000" b="1">
                 <a:solidFill>
-                  <a:srgbClr val="E8EAF0"/>
-                </a:solidFill>
-                <a:latin typeface="Microsoft JhengHei"/>
-              </a:rPr>
-              <a:t>整個專案就是不斷重複</a:t>
+                  <a:srgbClr val="1B2330"/>
+                </a:solidFill>
+                <a:latin typeface="Microsoft JhengHei"/>
+              </a:rPr>
+              <a:t>整套系統，是同一個</a:t>
             </a:r>
             <a:r>
               <a:rPr sz="3000" b="1">
                 <a:solidFill>
-                  <a:srgbClr val="6EE7B7"/>
-                </a:solidFill>
-                <a:latin typeface="Microsoft JhengHei"/>
-              </a:rPr>
-              <a:t>這一個循環</a:t>
-            </a:r>
-          </a:p>
-        </p:txBody>
-      </p:sp>
-      <p:sp>
-        <p:nvSpPr>
-          <p:cNvPr id="3" name="Rounded Rectangle 2"/>
+                  <a:srgbClr val="0B8F6E"/>
+                </a:solidFill>
+                <a:latin typeface="Microsoft JhengHei"/>
+              </a:rPr>
+              <a:t>閉環</a:t>
+            </a:r>
+            <a:r>
+              <a:rPr sz="3000" b="1">
+                <a:solidFill>
+                  <a:srgbClr val="1B2330"/>
+                </a:solidFill>
+                <a:latin typeface="Microsoft JhengHei"/>
+              </a:rPr>
+              <a:t>跑了 438 次</a:t>
+            </a:r>
+          </a:p>
+        </p:txBody>
+      </p:sp>
+      <p:sp>
+        <p:nvSpPr>
+          <p:cNvPr id="4" name="Rounded Rectangle 3"/>
           <p:cNvSpPr/>
           <p:nvPr/>
         </p:nvSpPr>
         <p:spPr>
           <a:xfrm>
             <a:off x="731520" y="1737360"/>
-            <a:ext cx="2514600" cy="2011680"/>
+            <a:ext cx="2514600" cy="1965960"/>
           </a:xfrm>
           <a:prstGeom prst="roundRect">
-            <a:avLst/>
+            <a:avLst>
+              <a:gd name="adj" fmla="val 6000"/>
+            </a:avLst>
           </a:prstGeom>
           <a:solidFill>
-            <a:srgbClr val="1A1F2B"/>
+            <a:srgbClr val="FFFFFF"/>
           </a:solidFill>
           <a:ln w="12700">
             <a:solidFill>
-              <a:srgbClr val="2A3245"/>
+              <a:srgbClr val="DDE2EA"/>
             </a:solidFill>
           </a:ln>
           <a:effectLst/>
@@ -4681,43 +5478,53 @@
           </a:fontRef>
         </p:style>
         <p:txBody>
-          <a:bodyPr rtlCol="0" anchor="ctr" wrap="square" lIns="164592" rIns="164592" tIns="109728" bIns="109728"/>
+          <a:bodyPr rtlCol="0" anchor="ctr" wrap="square" lIns="182880" rIns="182880" tIns="128016" bIns="128016"/>
           <a:lstStyle/>
           <a:p>
             <a:pPr algn="ctr">
               <a:spcAft>
-                <a:spcPts val="800"/>
-              </a:spcAft>
-            </a:pPr>
-            <a:r>
-              <a:t/>
-            </a:r>
+                <a:spcPts val="400"/>
+              </a:spcAft>
+            </a:pPr>
+            <a:r>
+              <a:rPr sz="1100" b="1">
+                <a:solidFill>
+                  <a:srgbClr val="0B8F6E"/>
+                </a:solidFill>
+                <a:latin typeface="Microsoft JhengHei"/>
+              </a:rPr>
+              <a:t>STEP 1</a:t>
+            </a:r>
+          </a:p>
+          <a:p>
+            <a:pPr algn="ctr">
+              <a:spcAft>
+                <a:spcPts val="600"/>
+              </a:spcAft>
+            </a:pPr>
             <a:r>
               <a:rPr sz="1700" b="1">
                 <a:solidFill>
-                  <a:srgbClr val="6EE7B7"/>
-                </a:solidFill>
-                <a:latin typeface="Microsoft JhengHei"/>
-              </a:rPr>
-              <a:t>1. 我講需求</a:t>
+                  <a:srgbClr val="1B2330"/>
+                </a:solidFill>
+                <a:latin typeface="Microsoft JhengHei"/>
+              </a:rPr>
+              <a:t>我講需求</a:t>
             </a:r>
           </a:p>
           <a:p>
             <a:pPr algn="ctr">
               <a:lnSpc>
-                <a:spcPct val="125000"/>
+                <a:spcPct val="120000"/>
               </a:lnSpc>
               <a:spcAft>
                 <a:spcPts val="0"/>
               </a:spcAft>
             </a:pPr>
             <a:r>
-              <a:t/>
-            </a:r>
-            <a:r>
-              <a:rPr sz="1300" b="0">
-                <a:solidFill>
-                  <a:srgbClr val="9AA3B5"/>
+              <a:rPr sz="1200" b="0">
+                <a:solidFill>
+                  <a:srgbClr val="5B6678"/>
                 </a:solidFill>
                 <a:latin typeface="Microsoft JhengHei"/>
               </a:rPr>
@@ -4727,19 +5534,16 @@
           <a:p>
             <a:pPr algn="ctr">
               <a:lnSpc>
-                <a:spcPct val="125000"/>
+                <a:spcPct val="120000"/>
               </a:lnSpc>
               <a:spcAft>
                 <a:spcPts val="0"/>
               </a:spcAft>
             </a:pPr>
             <a:r>
-              <a:t/>
-            </a:r>
-            <a:r>
-              <a:rPr sz="1300" b="0">
-                <a:solidFill>
-                  <a:srgbClr val="9AA3B5"/>
+              <a:rPr sz="1200" b="0">
+                <a:solidFill>
+                  <a:srgbClr val="5B6678"/>
                 </a:solidFill>
                 <a:latin typeface="Microsoft JhengHei"/>
               </a:rPr>
@@ -4750,13 +5554,13 @@
       </p:sp>
       <p:sp>
         <p:nvSpPr>
-          <p:cNvPr id="4" name="TextBox 3"/>
+          <p:cNvPr id="5" name="TextBox 4"/>
           <p:cNvSpPr txBox="1"/>
           <p:nvPr/>
         </p:nvSpPr>
         <p:spPr>
           <a:xfrm>
-            <a:off x="3264408" y="2468880"/>
+            <a:off x="3264408" y="2423160"/>
             <a:ext cx="301752" cy="548640"/>
           </a:xfrm>
           <a:prstGeom prst="rect">
@@ -4776,12 +5580,9 @@
               </a:spcAft>
             </a:pPr>
             <a:r>
-              <a:t/>
-            </a:r>
-            <a:r>
               <a:rPr sz="2200" b="1">
                 <a:solidFill>
-                  <a:srgbClr val="6B7385"/>
+                  <a:srgbClr val="0B8F6E"/>
                 </a:solidFill>
                 <a:latin typeface="Microsoft JhengHei"/>
               </a:rPr>
@@ -4792,24 +5593,26 @@
       </p:sp>
       <p:sp>
         <p:nvSpPr>
-          <p:cNvPr id="5" name="Rounded Rectangle 4"/>
+          <p:cNvPr id="6" name="Rounded Rectangle 5"/>
           <p:cNvSpPr/>
           <p:nvPr/>
         </p:nvSpPr>
         <p:spPr>
           <a:xfrm>
             <a:off x="3566160" y="1737360"/>
-            <a:ext cx="2514600" cy="2011680"/>
+            <a:ext cx="2514600" cy="1965960"/>
           </a:xfrm>
           <a:prstGeom prst="roundRect">
-            <a:avLst/>
+            <a:avLst>
+              <a:gd name="adj" fmla="val 6000"/>
+            </a:avLst>
           </a:prstGeom>
           <a:solidFill>
-            <a:srgbClr val="1A1F2B"/>
+            <a:srgbClr val="FFFFFF"/>
           </a:solidFill>
           <a:ln w="12700">
             <a:solidFill>
-              <a:srgbClr val="2A3245"/>
+              <a:srgbClr val="DDE2EA"/>
             </a:solidFill>
           </a:ln>
           <a:effectLst/>
@@ -4829,43 +5632,53 @@
           </a:fontRef>
         </p:style>
         <p:txBody>
-          <a:bodyPr rtlCol="0" anchor="ctr" wrap="square" lIns="164592" rIns="164592" tIns="109728" bIns="109728"/>
+          <a:bodyPr rtlCol="0" anchor="ctr" wrap="square" lIns="182880" rIns="182880" tIns="128016" bIns="128016"/>
           <a:lstStyle/>
           <a:p>
             <a:pPr algn="ctr">
               <a:spcAft>
-                <a:spcPts val="800"/>
-              </a:spcAft>
-            </a:pPr>
-            <a:r>
-              <a:t/>
-            </a:r>
+                <a:spcPts val="400"/>
+              </a:spcAft>
+            </a:pPr>
+            <a:r>
+              <a:rPr sz="1100" b="1">
+                <a:solidFill>
+                  <a:srgbClr val="0B8F6E"/>
+                </a:solidFill>
+                <a:latin typeface="Microsoft JhengHei"/>
+              </a:rPr>
+              <a:t>STEP 2</a:t>
+            </a:r>
+          </a:p>
+          <a:p>
+            <a:pPr algn="ctr">
+              <a:spcAft>
+                <a:spcPts val="600"/>
+              </a:spcAft>
+            </a:pPr>
             <a:r>
               <a:rPr sz="1700" b="1">
                 <a:solidFill>
-                  <a:srgbClr val="6EE7B7"/>
-                </a:solidFill>
-                <a:latin typeface="Microsoft JhengHei"/>
-              </a:rPr>
-              <a:t>2. AI 反問釐清</a:t>
+                  <a:srgbClr val="1B2330"/>
+                </a:solidFill>
+                <a:latin typeface="Microsoft JhengHei"/>
+              </a:rPr>
+              <a:t>AI 反問釐清</a:t>
             </a:r>
           </a:p>
           <a:p>
             <a:pPr algn="ctr">
               <a:lnSpc>
-                <a:spcPct val="125000"/>
+                <a:spcPct val="120000"/>
               </a:lnSpc>
               <a:spcAft>
                 <a:spcPts val="0"/>
               </a:spcAft>
             </a:pPr>
             <a:r>
-              <a:t/>
-            </a:r>
-            <a:r>
-              <a:rPr sz="1300" b="0">
-                <a:solidFill>
-                  <a:srgbClr val="9AA3B5"/>
+              <a:rPr sz="1200" b="0">
+                <a:solidFill>
+                  <a:srgbClr val="5B6678"/>
                 </a:solidFill>
                 <a:latin typeface="Microsoft JhengHei"/>
               </a:rPr>
@@ -4875,19 +5688,16 @@
           <a:p>
             <a:pPr algn="ctr">
               <a:lnSpc>
-                <a:spcPct val="125000"/>
+                <a:spcPct val="120000"/>
               </a:lnSpc>
               <a:spcAft>
                 <a:spcPts val="0"/>
               </a:spcAft>
             </a:pPr>
             <a:r>
-              <a:t/>
-            </a:r>
-            <a:r>
-              <a:rPr sz="1300" b="0">
-                <a:solidFill>
-                  <a:srgbClr val="9AA3B5"/>
+              <a:rPr sz="1200" b="0">
+                <a:solidFill>
+                  <a:srgbClr val="5B6678"/>
                 </a:solidFill>
                 <a:latin typeface="Microsoft JhengHei"/>
               </a:rPr>
@@ -4898,13 +5708,13 @@
       </p:sp>
       <p:sp>
         <p:nvSpPr>
-          <p:cNvPr id="6" name="TextBox 5"/>
+          <p:cNvPr id="7" name="TextBox 6"/>
           <p:cNvSpPr txBox="1"/>
           <p:nvPr/>
         </p:nvSpPr>
         <p:spPr>
           <a:xfrm>
-            <a:off x="6099048" y="2468880"/>
+            <a:off x="6099048" y="2423160"/>
             <a:ext cx="301752" cy="548640"/>
           </a:xfrm>
           <a:prstGeom prst="rect">
@@ -4924,12 +5734,9 @@
               </a:spcAft>
             </a:pPr>
             <a:r>
-              <a:t/>
-            </a:r>
-            <a:r>
               <a:rPr sz="2200" b="1">
                 <a:solidFill>
-                  <a:srgbClr val="6B7385"/>
+                  <a:srgbClr val="0B8F6E"/>
                 </a:solidFill>
                 <a:latin typeface="Microsoft JhengHei"/>
               </a:rPr>
@@ -4940,24 +5747,26 @@
       </p:sp>
       <p:sp>
         <p:nvSpPr>
-          <p:cNvPr id="7" name="Rounded Rectangle 6"/>
+          <p:cNvPr id="8" name="Rounded Rectangle 7"/>
           <p:cNvSpPr/>
           <p:nvPr/>
         </p:nvSpPr>
         <p:spPr>
           <a:xfrm>
             <a:off x="6400800" y="1737360"/>
-            <a:ext cx="2514600" cy="2011680"/>
+            <a:ext cx="2514600" cy="1965960"/>
           </a:xfrm>
           <a:prstGeom prst="roundRect">
-            <a:avLst/>
+            <a:avLst>
+              <a:gd name="adj" fmla="val 6000"/>
+            </a:avLst>
           </a:prstGeom>
           <a:solidFill>
-            <a:srgbClr val="1A1F2B"/>
+            <a:srgbClr val="FFFFFF"/>
           </a:solidFill>
           <a:ln w="12700">
             <a:solidFill>
-              <a:srgbClr val="2A3245"/>
+              <a:srgbClr val="DDE2EA"/>
             </a:solidFill>
           </a:ln>
           <a:effectLst/>
@@ -4977,43 +5786,53 @@
           </a:fontRef>
         </p:style>
         <p:txBody>
-          <a:bodyPr rtlCol="0" anchor="ctr" wrap="square" lIns="164592" rIns="164592" tIns="109728" bIns="109728"/>
+          <a:bodyPr rtlCol="0" anchor="ctr" wrap="square" lIns="182880" rIns="182880" tIns="128016" bIns="128016"/>
           <a:lstStyle/>
           <a:p>
             <a:pPr algn="ctr">
               <a:spcAft>
-                <a:spcPts val="800"/>
-              </a:spcAft>
-            </a:pPr>
-            <a:r>
-              <a:t/>
-            </a:r>
+                <a:spcPts val="400"/>
+              </a:spcAft>
+            </a:pPr>
+            <a:r>
+              <a:rPr sz="1100" b="1">
+                <a:solidFill>
+                  <a:srgbClr val="0B8F6E"/>
+                </a:solidFill>
+                <a:latin typeface="Microsoft JhengHei"/>
+              </a:rPr>
+              <a:t>STEP 3</a:t>
+            </a:r>
+          </a:p>
+          <a:p>
+            <a:pPr algn="ctr">
+              <a:spcAft>
+                <a:spcPts val="600"/>
+              </a:spcAft>
+            </a:pPr>
             <a:r>
               <a:rPr sz="1700" b="1">
                 <a:solidFill>
-                  <a:srgbClr val="6EE7B7"/>
-                </a:solidFill>
-                <a:latin typeface="Microsoft JhengHei"/>
-              </a:rPr>
-              <a:t>3. AI 寫好發 PR</a:t>
+                  <a:srgbClr val="1B2330"/>
+                </a:solidFill>
+                <a:latin typeface="Microsoft JhengHei"/>
+              </a:rPr>
+              <a:t>AI 寫好發 PR</a:t>
             </a:r>
           </a:p>
           <a:p>
             <a:pPr algn="ctr">
               <a:lnSpc>
-                <a:spcPct val="125000"/>
+                <a:spcPct val="120000"/>
               </a:lnSpc>
               <a:spcAft>
                 <a:spcPts val="0"/>
               </a:spcAft>
             </a:pPr>
             <a:r>
-              <a:t/>
-            </a:r>
-            <a:r>
-              <a:rPr sz="1300" b="0">
-                <a:solidFill>
-                  <a:srgbClr val="9AA3B5"/>
+              <a:rPr sz="1200" b="0">
+                <a:solidFill>
+                  <a:srgbClr val="5B6678"/>
                 </a:solidFill>
                 <a:latin typeface="Microsoft JhengHei"/>
               </a:rPr>
@@ -5023,36 +5842,33 @@
           <a:p>
             <a:pPr algn="ctr">
               <a:lnSpc>
-                <a:spcPct val="125000"/>
+                <a:spcPct val="120000"/>
               </a:lnSpc>
               <a:spcAft>
                 <a:spcPts val="0"/>
               </a:spcAft>
             </a:pPr>
             <a:r>
-              <a:t/>
-            </a:r>
-            <a:r>
-              <a:rPr sz="1300" b="0">
-                <a:solidFill>
-                  <a:srgbClr val="9AA3B5"/>
-                </a:solidFill>
-                <a:latin typeface="Microsoft JhengHei"/>
-              </a:rPr>
-              <a:t>一包送上來</a:t>
-            </a:r>
-          </a:p>
-        </p:txBody>
-      </p:sp>
-      <p:sp>
-        <p:nvSpPr>
-          <p:cNvPr id="8" name="TextBox 7"/>
+              <a:rPr sz="1200" b="0">
+                <a:solidFill>
+                  <a:srgbClr val="5B6678"/>
+                </a:solidFill>
+                <a:latin typeface="Microsoft JhengHei"/>
+              </a:rPr>
+              <a:t>一包送上</a:t>
+            </a:r>
+          </a:p>
+        </p:txBody>
+      </p:sp>
+      <p:sp>
+        <p:nvSpPr>
+          <p:cNvPr id="9" name="TextBox 8"/>
           <p:cNvSpPr txBox="1"/>
           <p:nvPr/>
         </p:nvSpPr>
         <p:spPr>
           <a:xfrm>
-            <a:off x="8933688" y="2468880"/>
+            <a:off x="8933688" y="2423160"/>
             <a:ext cx="301752" cy="548640"/>
           </a:xfrm>
           <a:prstGeom prst="rect">
@@ -5072,12 +5888,9 @@
               </a:spcAft>
             </a:pPr>
             <a:r>
-              <a:t/>
-            </a:r>
-            <a:r>
               <a:rPr sz="2200" b="1">
                 <a:solidFill>
-                  <a:srgbClr val="6B7385"/>
+                  <a:srgbClr val="0B8F6E"/>
                 </a:solidFill>
                 <a:latin typeface="Microsoft JhengHei"/>
               </a:rPr>
@@ -5088,24 +5901,26 @@
       </p:sp>
       <p:sp>
         <p:nvSpPr>
-          <p:cNvPr id="9" name="Rounded Rectangle 8"/>
+          <p:cNvPr id="10" name="Rounded Rectangle 9"/>
           <p:cNvSpPr/>
           <p:nvPr/>
         </p:nvSpPr>
         <p:spPr>
           <a:xfrm>
             <a:off x="9235440" y="1737360"/>
-            <a:ext cx="2514600" cy="2011680"/>
+            <a:ext cx="2514600" cy="1965960"/>
           </a:xfrm>
           <a:prstGeom prst="roundRect">
-            <a:avLst/>
+            <a:avLst>
+              <a:gd name="adj" fmla="val 6000"/>
+            </a:avLst>
           </a:prstGeom>
           <a:solidFill>
-            <a:srgbClr val="1A1F2B"/>
+            <a:srgbClr val="FFFFFF"/>
           </a:solidFill>
           <a:ln w="12700">
             <a:solidFill>
-              <a:srgbClr val="2A3245"/>
+              <a:srgbClr val="DDE2EA"/>
             </a:solidFill>
           </a:ln>
           <a:effectLst/>
@@ -5125,43 +5940,53 @@
           </a:fontRef>
         </p:style>
         <p:txBody>
-          <a:bodyPr rtlCol="0" anchor="ctr" wrap="square" lIns="164592" rIns="164592" tIns="109728" bIns="109728"/>
+          <a:bodyPr rtlCol="0" anchor="ctr" wrap="square" lIns="182880" rIns="182880" tIns="128016" bIns="128016"/>
           <a:lstStyle/>
           <a:p>
             <a:pPr algn="ctr">
               <a:spcAft>
-                <a:spcPts val="800"/>
-              </a:spcAft>
-            </a:pPr>
-            <a:r>
-              <a:t/>
-            </a:r>
+                <a:spcPts val="400"/>
+              </a:spcAft>
+            </a:pPr>
+            <a:r>
+              <a:rPr sz="1100" b="1">
+                <a:solidFill>
+                  <a:srgbClr val="0B8F6E"/>
+                </a:solidFill>
+                <a:latin typeface="Microsoft JhengHei"/>
+              </a:rPr>
+              <a:t>STEP 4</a:t>
+            </a:r>
+          </a:p>
+          <a:p>
+            <a:pPr algn="ctr">
+              <a:spcAft>
+                <a:spcPts val="600"/>
+              </a:spcAft>
+            </a:pPr>
             <a:r>
               <a:rPr sz="1700" b="1">
                 <a:solidFill>
-                  <a:srgbClr val="6EE7B7"/>
-                </a:solidFill>
-                <a:latin typeface="Microsoft JhengHei"/>
-              </a:rPr>
-              <a:t>4. 我驗收</a:t>
+                  <a:srgbClr val="1B2330"/>
+                </a:solidFill>
+                <a:latin typeface="Microsoft JhengHei"/>
+              </a:rPr>
+              <a:t>我驗收</a:t>
             </a:r>
           </a:p>
           <a:p>
             <a:pPr algn="ctr">
               <a:lnSpc>
-                <a:spcPct val="125000"/>
+                <a:spcPct val="120000"/>
               </a:lnSpc>
               <a:spcAft>
                 <a:spcPts val="0"/>
               </a:spcAft>
             </a:pPr>
             <a:r>
-              <a:t/>
-            </a:r>
-            <a:r>
-              <a:rPr sz="1300" b="0">
-                <a:solidFill>
-                  <a:srgbClr val="9AA3B5"/>
+              <a:rPr sz="1200" b="0">
+                <a:solidFill>
+                  <a:srgbClr val="5B6678"/>
                 </a:solidFill>
                 <a:latin typeface="Microsoft JhengHei"/>
               </a:rPr>
@@ -5171,19 +5996,16 @@
           <a:p>
             <a:pPr algn="ctr">
               <a:lnSpc>
-                <a:spcPct val="125000"/>
+                <a:spcPct val="120000"/>
               </a:lnSpc>
               <a:spcAft>
                 <a:spcPts val="0"/>
               </a:spcAft>
             </a:pPr>
             <a:r>
-              <a:t/>
-            </a:r>
-            <a:r>
-              <a:rPr sz="1300" b="0">
-                <a:solidFill>
-                  <a:srgbClr val="9AA3B5"/>
+              <a:rPr sz="1200" b="0">
+                <a:solidFill>
+                  <a:srgbClr val="5B6678"/>
                 </a:solidFill>
                 <a:latin typeface="Microsoft JhengHei"/>
               </a:rPr>
@@ -5194,14 +6016,78 @@
       </p:sp>
       <p:sp>
         <p:nvSpPr>
-          <p:cNvPr id="10" name="TextBox 9"/>
+          <p:cNvPr id="11" name="Rounded Rectangle 10"/>
+          <p:cNvSpPr/>
+          <p:nvPr/>
+        </p:nvSpPr>
+        <p:spPr>
+          <a:xfrm>
+            <a:off x="731520" y="4023360"/>
+            <a:ext cx="10698480" cy="868680"/>
+          </a:xfrm>
+          <a:prstGeom prst="roundRect">
+            <a:avLst>
+              <a:gd name="adj" fmla="val 6000"/>
+            </a:avLst>
+          </a:prstGeom>
+          <a:solidFill>
+            <a:srgbClr val="E3F4EE"/>
+          </a:solidFill>
+          <a:ln w="12700">
+            <a:solidFill>
+              <a:srgbClr val="C7E8DC"/>
+            </a:solidFill>
+          </a:ln>
+          <a:effectLst/>
+        </p:spPr>
+        <p:style>
+          <a:lnRef idx="1">
+            <a:schemeClr val="accent1"/>
+          </a:lnRef>
+          <a:fillRef idx="3">
+            <a:schemeClr val="accent1"/>
+          </a:fillRef>
+          <a:effectRef idx="2">
+            <a:schemeClr val="accent1"/>
+          </a:effectRef>
+          <a:fontRef idx="minor">
+            <a:schemeClr val="lt1"/>
+          </a:fontRef>
+        </p:style>
+        <p:txBody>
+          <a:bodyPr rtlCol="0" anchor="ctr" wrap="square" lIns="182880" rIns="182880" tIns="128016" bIns="128016"/>
+          <a:lstStyle/>
+          <a:p>
+            <a:pPr algn="ctr">
+              <a:lnSpc>
+                <a:spcPct val="130000"/>
+              </a:lnSpc>
+              <a:spcAft>
+                <a:spcPts val="600"/>
+              </a:spcAft>
+            </a:pPr>
+            <a:r>
+              <a:rPr sz="1500" b="1">
+                <a:solidFill>
+                  <a:srgbClr val="0A6B53"/>
+                </a:solidFill>
+                <a:latin typeface="Microsoft JhengHei"/>
+              </a:rPr>
+              <a:t>不 OK 就用白話回報，AI 修完再驗 — 驗收結果直接回流成下一輪需求，閉環就這樣一圈一圈轉</a:t>
+            </a:r>
+          </a:p>
+        </p:txBody>
+      </p:sp>
+      <p:sp>
+        <p:nvSpPr>
+          <p:cNvPr id="12" name="TextBox 11"/>
           <p:cNvSpPr txBox="1"/>
           <p:nvPr/>
         </p:nvSpPr>
         <p:spPr>
           <a:xfrm>
-            <a:off x="731520" y="4114800"/>
-            <a:ext cx="10698480" cy="640080"/>
+            <a:off x="731520" y="5166360"/>
+            <a:ext cx="10698480" cy="914400"/>
           </a:xfrm>
           <a:prstGeom prst="rect">
             <a:avLst/>
@@ -5214,64 +6100,22 @@
           </a:bodyPr>
           <a:lstStyle/>
           <a:p>
-            <a:pPr algn="ctr">
+            <a:pPr algn="l">
+              <a:lnSpc>
+                <a:spcPct val="130000"/>
+              </a:lnSpc>
               <a:spcAft>
                 <a:spcPts val="600"/>
               </a:spcAft>
             </a:pPr>
             <a:r>
-              <a:t/>
-            </a:r>
-            <a:r>
-              <a:rPr sz="1700" b="0">
-                <a:solidFill>
-                  <a:srgbClr val="FBBF24"/>
-                </a:solidFill>
-                <a:latin typeface="Microsoft JhengHei"/>
-              </a:rPr>
-              <a:t>↺ 不 OK？用白話回報，AI 修完再驗 — 一個功能通常一段對話就收掉</a:t>
-            </a:r>
-          </a:p>
-        </p:txBody>
-      </p:sp>
-      <p:sp>
-        <p:nvSpPr>
-          <p:cNvPr id="11" name="TextBox 10"/>
-          <p:cNvSpPr txBox="1"/>
-          <p:nvPr/>
-        </p:nvSpPr>
-        <p:spPr>
-          <a:xfrm>
-            <a:off x="731520" y="4937760"/>
-            <a:ext cx="10698480" cy="822960"/>
-          </a:xfrm>
-          <a:prstGeom prst="rect">
-            <a:avLst/>
-          </a:prstGeom>
-          <a:noFill/>
-        </p:spPr>
-        <p:txBody>
-          <a:bodyPr wrap="square">
-            <a:spAutoFit/>
-          </a:bodyPr>
-          <a:lstStyle/>
-          <a:p>
-            <a:pPr algn="ctr">
-              <a:spcAft>
-                <a:spcPts val="600"/>
-              </a:spcAft>
-            </a:pPr>
-            <a:r>
-              <a:t/>
-            </a:r>
-            <a:r>
               <a:rPr sz="1600" b="0">
                 <a:solidFill>
-                  <a:srgbClr val="9AA3B5"/>
-                </a:solidFill>
-                <a:latin typeface="Microsoft JhengHei"/>
-              </a:rPr>
-              <a:t>438 個 PR = 這個循環跑了 438 次。每次循環小而快，錯了也容易退回。</a:t>
+                  <a:srgbClr val="5B6678"/>
+                </a:solidFill>
+                <a:latin typeface="Microsoft JhengHei"/>
+              </a:rPr>
+              <a:t>重點不是「AI 很會寫」，而是每一圈都小、都能驗收、錯了能退回。閉環讓品質可控。</a:t>
             </a:r>
           </a:p>
         </p:txBody>
@@ -5290,7 +6134,7 @@
     <p:bg>
       <p:bgPr>
         <a:solidFill>
-          <a:srgbClr val="0F1117"/>
+          <a:srgbClr val="F4F6F9"/>
         </a:solidFill>
         <a:effectLst/>
       </p:bgPr>
@@ -5310,7 +6154,46 @@
         </p:nvSpPr>
         <p:spPr>
           <a:xfrm>
-            <a:off x="731520" y="548640"/>
+            <a:off x="731520" y="274320"/>
+            <a:ext cx="5486400" cy="365760"/>
+          </a:xfrm>
+          <a:prstGeom prst="rect">
+            <a:avLst/>
+          </a:prstGeom>
+          <a:noFill/>
+        </p:spPr>
+        <p:txBody>
+          <a:bodyPr wrap="square">
+            <a:spAutoFit/>
+          </a:bodyPr>
+          <a:lstStyle/>
+          <a:p>
+            <a:pPr algn="l">
+              <a:spcAft>
+                <a:spcPts val="600"/>
+              </a:spcAft>
+            </a:pPr>
+            <a:r>
+              <a:rPr sz="1100" b="1">
+                <a:solidFill>
+                  <a:srgbClr val="0B8F6E"/>
+                </a:solidFill>
+                <a:latin typeface="Microsoft JhengHei"/>
+              </a:rPr>
+              <a:t>核心觀念 2</a:t>
+            </a:r>
+          </a:p>
+        </p:txBody>
+      </p:sp>
+      <p:sp>
+        <p:nvSpPr>
+          <p:cNvPr id="3" name="TextBox 2"/>
+          <p:cNvSpPr txBox="1"/>
+          <p:nvPr/>
+        </p:nvSpPr>
+        <p:spPr>
+          <a:xfrm>
+            <a:off x="731520" y="640080"/>
             <a:ext cx="10698480" cy="822960"/>
           </a:xfrm>
           <a:prstGeom prst="rect">
@@ -5332,34 +6215,34 @@
             <a:r>
               <a:rPr sz="3000" b="1">
                 <a:solidFill>
-                  <a:srgbClr val="E8EAF0"/>
-                </a:solidFill>
-                <a:latin typeface="Microsoft JhengHei"/>
-              </a:rPr>
-              <a:t>第一步不是寫程式，是</a:t>
+                  <a:srgbClr val="1B2330"/>
+                </a:solidFill>
+                <a:latin typeface="Microsoft JhengHei"/>
+              </a:rPr>
+              <a:t>讓閉環自己穩定轉起來的，是 </a:t>
             </a:r>
             <a:r>
               <a:rPr sz="3000" b="1">
                 <a:solidFill>
-                  <a:srgbClr val="6EE7B7"/>
-                </a:solidFill>
-                <a:latin typeface="Microsoft JhengHei"/>
-              </a:rPr>
-              <a:t>陪 AI 把需求聊透</a:t>
-            </a:r>
-          </a:p>
-        </p:txBody>
-      </p:sp>
-      <p:sp>
-        <p:nvSpPr>
-          <p:cNvPr id="3" name="TextBox 2"/>
+                  <a:srgbClr val="0B8F6E"/>
+                </a:solidFill>
+                <a:latin typeface="Microsoft JhengHei"/>
+              </a:rPr>
+              <a:t>harness</a:t>
+            </a:r>
+          </a:p>
+        </p:txBody>
+      </p:sp>
+      <p:sp>
+        <p:nvSpPr>
+          <p:cNvPr id="4" name="TextBox 3"/>
           <p:cNvSpPr txBox="1"/>
           <p:nvPr/>
         </p:nvSpPr>
         <p:spPr>
           <a:xfrm>
-            <a:off x="822960" y="1737360"/>
-            <a:ext cx="10515600" cy="3291840"/>
+            <a:off x="731520" y="1463040"/>
+            <a:ext cx="10698480" cy="868680"/>
           </a:xfrm>
           <a:prstGeom prst="rect">
             <a:avLst/>
@@ -5374,29 +6257,115 @@
           <a:p>
             <a:pPr algn="l">
               <a:lnSpc>
-                <a:spcPct val="125000"/>
+                <a:spcPct val="145000"/>
               </a:lnSpc>
               <a:spcAft>
-                <a:spcPts val="1800"/>
-              </a:spcAft>
-            </a:pPr>
-            <a:r>
-              <a:rPr sz="1900" b="1">
-                <a:solidFill>
-                  <a:srgbClr val="6EE7B7"/>
-                </a:solidFill>
-                <a:latin typeface="Microsoft JhengHei"/>
-              </a:rPr>
-              <a:t>›  </a:t>
-            </a:r>
-            <a:r>
-              <a:rPr sz="1900" b="0">
-                <a:solidFill>
-                  <a:srgbClr val="E8EAF0"/>
-                </a:solidFill>
-                <a:latin typeface="Microsoft JhengHei"/>
-              </a:rPr>
-              <a:t>開工前先花時間跟 AI 對談，產出各模組 PRD（產品需求文件）：商品、會員、庫存、採購、銷售、取貨…</a:t>
+                <a:spcPts val="600"/>
+              </a:spcAft>
+            </a:pPr>
+            <a:r>
+              <a:rPr sz="1500" b="0">
+                <a:solidFill>
+                  <a:srgbClr val="5B6678"/>
+                </a:solidFill>
+                <a:latin typeface="Microsoft JhengHei"/>
+              </a:rPr>
+              <a:t>閉環是「怎麼做」；harness 是那套讓 AI 能可靠、重複、自動把一圈跑完的</a:t>
+            </a:r>
+            <a:r>
+              <a:rPr sz="1500" b="1">
+                <a:solidFill>
+                  <a:srgbClr val="1B2330"/>
+                </a:solidFill>
+                <a:latin typeface="Microsoft JhengHei"/>
+              </a:rPr>
+              <a:t>支架與工具鏈</a:t>
+            </a:r>
+            <a:r>
+              <a:rPr sz="1500" b="0">
+                <a:solidFill>
+                  <a:srgbClr val="5B6678"/>
+                </a:solidFill>
+                <a:latin typeface="Microsoft JhengHei"/>
+              </a:rPr>
+              <a:t>。沒有 harness，AI 只是聊天；有了 harness，AI 才真的能交付。</a:t>
+            </a:r>
+          </a:p>
+        </p:txBody>
+      </p:sp>
+      <p:sp>
+        <p:nvSpPr>
+          <p:cNvPr id="5" name="Rounded Rectangle 4"/>
+          <p:cNvSpPr/>
+          <p:nvPr/>
+        </p:nvSpPr>
+        <p:spPr>
+          <a:xfrm>
+            <a:off x="731520" y="2468880"/>
+            <a:ext cx="3429000" cy="1371600"/>
+          </a:xfrm>
+          <a:prstGeom prst="roundRect">
+            <a:avLst>
+              <a:gd name="adj" fmla="val 6000"/>
+            </a:avLst>
+          </a:prstGeom>
+          <a:solidFill>
+            <a:srgbClr val="FFFFFF"/>
+          </a:solidFill>
+          <a:ln w="12700">
+            <a:solidFill>
+              <a:srgbClr val="DDE2EA"/>
+            </a:solidFill>
+          </a:ln>
+          <a:effectLst/>
+        </p:spPr>
+        <p:style>
+          <a:lnRef idx="1">
+            <a:schemeClr val="accent1"/>
+          </a:lnRef>
+          <a:fillRef idx="3">
+            <a:schemeClr val="accent1"/>
+          </a:fillRef>
+          <a:effectRef idx="2">
+            <a:schemeClr val="accent1"/>
+          </a:effectRef>
+          <a:fontRef idx="minor">
+            <a:schemeClr val="lt1"/>
+          </a:fontRef>
+        </p:style>
+        <p:txBody>
+          <a:bodyPr rtlCol="0" anchor="ctr" wrap="square" lIns="182880" rIns="182880" tIns="128016" bIns="128016"/>
+          <a:lstStyle/>
+          <a:p>
+            <a:pPr algn="l">
+              <a:spcAft>
+                <a:spcPts val="300"/>
+              </a:spcAft>
+            </a:pPr>
+            <a:r>
+              <a:rPr sz="1000" b="1">
+                <a:solidFill>
+                  <a:srgbClr val="0B8F6E"/>
+                </a:solidFill>
+                <a:latin typeface="Microsoft JhengHei"/>
+              </a:rPr>
+              <a:t>工具能力</a:t>
+            </a:r>
+          </a:p>
+          <a:p>
+            <a:pPr algn="l">
+              <a:spcAft>
+                <a:spcPts val="400"/>
+              </a:spcAft>
+            </a:pPr>
+            <a:r>
+              <a:rPr sz="1500" b="1">
+                <a:solidFill>
+                  <a:srgbClr val="1B2330"/>
+                </a:solidFill>
+                <a:latin typeface="Microsoft JhengHei"/>
+              </a:rPr>
+              <a:t>Claude Code 本體</a:t>
             </a:r>
           </a:p>
           <a:p>
@@ -5405,26 +6374,94 @@
                 <a:spcPct val="125000"/>
               </a:lnSpc>
               <a:spcAft>
-                <a:spcPts val="1800"/>
-              </a:spcAft>
-            </a:pPr>
-            <a:r>
-              <a:rPr sz="1900" b="1">
-                <a:solidFill>
-                  <a:srgbClr val="6EE7B7"/>
-                </a:solidFill>
-                <a:latin typeface="Microsoft JhengHei"/>
-              </a:rPr>
-              <a:t>›  </a:t>
-            </a:r>
-            <a:r>
-              <a:rPr sz="1900" b="0">
-                <a:solidFill>
-                  <a:srgbClr val="E8EAF0"/>
-                </a:solidFill>
-                <a:latin typeface="Microsoft JhengHei"/>
-              </a:rPr>
-              <a:t>AI 根據 PRD 先設計好資料庫架構，再開始寫第一行程式</a:t>
+                <a:spcPts val="0"/>
+              </a:spcAft>
+            </a:pPr>
+            <a:r>
+              <a:rPr sz="1150" b="0">
+                <a:solidFill>
+                  <a:srgbClr val="5B6678"/>
+                </a:solidFill>
+                <a:latin typeface="Microsoft JhengHei"/>
+              </a:rPr>
+              <a:t>能讀寫檔案、跑指令、操作 git、直接開 PR — 不是只會回字，而是會動手。</a:t>
+            </a:r>
+          </a:p>
+        </p:txBody>
+      </p:sp>
+      <p:sp>
+        <p:nvSpPr>
+          <p:cNvPr id="6" name="Rounded Rectangle 5"/>
+          <p:cNvSpPr/>
+          <p:nvPr/>
+        </p:nvSpPr>
+        <p:spPr>
+          <a:xfrm>
+            <a:off x="4389120" y="2468880"/>
+            <a:ext cx="3429000" cy="1371600"/>
+          </a:xfrm>
+          <a:prstGeom prst="roundRect">
+            <a:avLst>
+              <a:gd name="adj" fmla="val 6000"/>
+            </a:avLst>
+          </a:prstGeom>
+          <a:solidFill>
+            <a:srgbClr val="FFFFFF"/>
+          </a:solidFill>
+          <a:ln w="12700">
+            <a:solidFill>
+              <a:srgbClr val="DDE2EA"/>
+            </a:solidFill>
+          </a:ln>
+          <a:effectLst/>
+        </p:spPr>
+        <p:style>
+          <a:lnRef idx="1">
+            <a:schemeClr val="accent1"/>
+          </a:lnRef>
+          <a:fillRef idx="3">
+            <a:schemeClr val="accent1"/>
+          </a:fillRef>
+          <a:effectRef idx="2">
+            <a:schemeClr val="accent1"/>
+          </a:effectRef>
+          <a:fontRef idx="minor">
+            <a:schemeClr val="lt1"/>
+          </a:fontRef>
+        </p:style>
+        <p:txBody>
+          <a:bodyPr rtlCol="0" anchor="ctr" wrap="square" lIns="182880" rIns="182880" tIns="128016" bIns="128016"/>
+          <a:lstStyle/>
+          <a:p>
+            <a:pPr algn="l">
+              <a:spcAft>
+                <a:spcPts val="300"/>
+              </a:spcAft>
+            </a:pPr>
+            <a:r>
+              <a:rPr sz="1000" b="1">
+                <a:solidFill>
+                  <a:srgbClr val="0B8F6E"/>
+                </a:solidFill>
+                <a:latin typeface="Microsoft JhengHei"/>
+              </a:rPr>
+              <a:t>長期記憶</a:t>
+            </a:r>
+          </a:p>
+          <a:p>
+            <a:pPr algn="l">
+              <a:spcAft>
+                <a:spcPts val="400"/>
+              </a:spcAft>
+            </a:pPr>
+            <a:r>
+              <a:rPr sz="1500" b="1">
+                <a:solidFill>
+                  <a:srgbClr val="1B2330"/>
+                </a:solidFill>
+                <a:latin typeface="Microsoft JhengHei"/>
+              </a:rPr>
+              <a:t>CLAUDE.md 守則檔</a:t>
             </a:r>
           </a:p>
           <a:p>
@@ -5433,68 +6470,401 @@
                 <a:spcPct val="125000"/>
               </a:lnSpc>
               <a:spcAft>
-                <a:spcPts val="1800"/>
-              </a:spcAft>
-            </a:pPr>
-            <a:r>
-              <a:rPr sz="1900" b="1">
-                <a:solidFill>
-                  <a:srgbClr val="6EE7B7"/>
-                </a:solidFill>
-                <a:latin typeface="Microsoft JhengHei"/>
-              </a:rPr>
-              <a:t>›  </a:t>
-            </a:r>
-            <a:r>
-              <a:rPr sz="1900" b="0">
-                <a:solidFill>
-                  <a:srgbClr val="E8EAF0"/>
-                </a:solidFill>
-                <a:latin typeface="Microsoft JhengHei"/>
-              </a:rPr>
-              <a:t>需求文件是用「我的語言」寫的 — 我看得懂、改得動，AI 照著做</a:t>
-            </a:r>
-          </a:p>
-        </p:txBody>
-      </p:sp>
-      <p:sp>
-        <p:nvSpPr>
-          <p:cNvPr id="4" name="TextBox 3"/>
-          <p:cNvSpPr txBox="1"/>
+                <a:spcPts val="0"/>
+              </a:spcAft>
+            </a:pPr>
+            <a:r>
+              <a:rPr sz="1150" b="0">
+                <a:solidFill>
+                  <a:srgbClr val="5B6678"/>
+                </a:solidFill>
+                <a:latin typeface="Microsoft JhengHei"/>
+              </a:rPr>
+              <a:t>每次開工先讀。踩過的雷寫進去（部署管道、改函式前先查歷史），之後不再犯。</a:t>
+            </a:r>
+          </a:p>
+        </p:txBody>
+      </p:sp>
+      <p:sp>
+        <p:nvSpPr>
+          <p:cNvPr id="7" name="Rounded Rectangle 6"/>
+          <p:cNvSpPr/>
           <p:nvPr/>
         </p:nvSpPr>
         <p:spPr>
           <a:xfrm>
-            <a:off x="822960" y="5120640"/>
-            <a:ext cx="10515600" cy="822960"/>
+            <a:off x="8046720" y="2468880"/>
+            <a:ext cx="3429000" cy="1371600"/>
           </a:xfrm>
-          <a:prstGeom prst="rect">
-            <a:avLst/>
+          <a:prstGeom prst="roundRect">
+            <a:avLst>
+              <a:gd name="adj" fmla="val 6000"/>
+            </a:avLst>
           </a:prstGeom>
-          <a:noFill/>
+          <a:solidFill>
+            <a:srgbClr val="FFFFFF"/>
+          </a:solidFill>
+          <a:ln w="12700">
+            <a:solidFill>
+              <a:srgbClr val="DDE2EA"/>
+            </a:solidFill>
+          </a:ln>
+          <a:effectLst/>
         </p:spPr>
-        <p:txBody>
-          <a:bodyPr wrap="square">
-            <a:spAutoFit/>
-          </a:bodyPr>
-          <a:lstStyle/>
-          <a:p>
-            <a:pPr algn="l">
-              <a:spcAft>
-                <a:spcPts val="600"/>
-              </a:spcAft>
-            </a:pPr>
-            <a:r>
-              <a:t/>
-            </a:r>
-            <a:r>
-              <a:rPr sz="1600" b="0">
-                <a:solidFill>
-                  <a:srgbClr val="9AA3B5"/>
-                </a:solidFill>
-                <a:latin typeface="Microsoft JhengHei"/>
-              </a:rPr>
-              <a:t>心得：跟 AI 合作，前期把「要做什麼」講清楚，比急著要它寫 code 重要十倍。</a:t>
+        <p:style>
+          <a:lnRef idx="1">
+            <a:schemeClr val="accent1"/>
+          </a:lnRef>
+          <a:fillRef idx="3">
+            <a:schemeClr val="accent1"/>
+          </a:fillRef>
+          <a:effectRef idx="2">
+            <a:schemeClr val="accent1"/>
+          </a:effectRef>
+          <a:fontRef idx="minor">
+            <a:schemeClr val="lt1"/>
+          </a:fontRef>
+        </p:style>
+        <p:txBody>
+          <a:bodyPr rtlCol="0" anchor="ctr" wrap="square" lIns="182880" rIns="182880" tIns="128016" bIns="128016"/>
+          <a:lstStyle/>
+          <a:p>
+            <a:pPr algn="l">
+              <a:spcAft>
+                <a:spcPts val="300"/>
+              </a:spcAft>
+            </a:pPr>
+            <a:r>
+              <a:rPr sz="1000" b="1">
+                <a:solidFill>
+                  <a:srgbClr val="0B8F6E"/>
+                </a:solidFill>
+                <a:latin typeface="Microsoft JhengHei"/>
+              </a:rPr>
+              <a:t>接力棒</a:t>
+            </a:r>
+          </a:p>
+          <a:p>
+            <a:pPr algn="l">
+              <a:spcAft>
+                <a:spcPts val="400"/>
+              </a:spcAft>
+            </a:pPr>
+            <a:r>
+              <a:rPr sz="1500" b="1">
+                <a:solidFill>
+                  <a:srgbClr val="1B2330"/>
+                </a:solidFill>
+                <a:latin typeface="Microsoft JhengHei"/>
+              </a:rPr>
+              <a:t>HANDOFF 交接文件</a:t>
+            </a:r>
+          </a:p>
+          <a:p>
+            <a:pPr algn="l">
+              <a:lnSpc>
+                <a:spcPct val="125000"/>
+              </a:lnSpc>
+              <a:spcAft>
+                <a:spcPts val="0"/>
+              </a:spcAft>
+            </a:pPr>
+            <a:r>
+              <a:rPr sz="1150" b="0">
+                <a:solidFill>
+                  <a:srgbClr val="5B6678"/>
+                </a:solidFill>
+                <a:latin typeface="Microsoft JhengHei"/>
+              </a:rPr>
+              <a:t>每段工作結束寫下進度與待辦，下一段對話無縫接手，跨對話不掉鏈。</a:t>
+            </a:r>
+          </a:p>
+        </p:txBody>
+      </p:sp>
+      <p:sp>
+        <p:nvSpPr>
+          <p:cNvPr id="8" name="Rounded Rectangle 7"/>
+          <p:cNvSpPr/>
+          <p:nvPr/>
+        </p:nvSpPr>
+        <p:spPr>
+          <a:xfrm>
+            <a:off x="731520" y="4041648"/>
+            <a:ext cx="3429000" cy="1371600"/>
+          </a:xfrm>
+          <a:prstGeom prst="roundRect">
+            <a:avLst>
+              <a:gd name="adj" fmla="val 6000"/>
+            </a:avLst>
+          </a:prstGeom>
+          <a:solidFill>
+            <a:srgbClr val="FFFFFF"/>
+          </a:solidFill>
+          <a:ln w="12700">
+            <a:solidFill>
+              <a:srgbClr val="DDE2EA"/>
+            </a:solidFill>
+          </a:ln>
+          <a:effectLst/>
+        </p:spPr>
+        <p:style>
+          <a:lnRef idx="1">
+            <a:schemeClr val="accent1"/>
+          </a:lnRef>
+          <a:fillRef idx="3">
+            <a:schemeClr val="accent1"/>
+          </a:fillRef>
+          <a:effectRef idx="2">
+            <a:schemeClr val="accent1"/>
+          </a:effectRef>
+          <a:fontRef idx="minor">
+            <a:schemeClr val="lt1"/>
+          </a:fontRef>
+        </p:style>
+        <p:txBody>
+          <a:bodyPr rtlCol="0" anchor="ctr" wrap="square" lIns="182880" rIns="182880" tIns="128016" bIns="128016"/>
+          <a:lstStyle/>
+          <a:p>
+            <a:pPr algn="l">
+              <a:spcAft>
+                <a:spcPts val="300"/>
+              </a:spcAft>
+            </a:pPr>
+            <a:r>
+              <a:rPr sz="1000" b="1">
+                <a:solidFill>
+                  <a:srgbClr val="0B8F6E"/>
+                </a:solidFill>
+                <a:latin typeface="Microsoft JhengHei"/>
+              </a:rPr>
+              <a:t>驗收依據</a:t>
+            </a:r>
+          </a:p>
+          <a:p>
+            <a:pPr algn="l">
+              <a:spcAft>
+                <a:spcPts val="400"/>
+              </a:spcAft>
+            </a:pPr>
+            <a:r>
+              <a:rPr sz="1500" b="1">
+                <a:solidFill>
+                  <a:srgbClr val="1B2330"/>
+                </a:solidFill>
+                <a:latin typeface="Microsoft JhengHei"/>
+              </a:rPr>
+              <a:t>E2E 測試 + 一鍵重置</a:t>
+            </a:r>
+          </a:p>
+          <a:p>
+            <a:pPr algn="l">
+              <a:lnSpc>
+                <a:spcPct val="125000"/>
+              </a:lnSpc>
+              <a:spcAft>
+                <a:spcPts val="0"/>
+              </a:spcAft>
+            </a:pPr>
+            <a:r>
+              <a:rPr sz="1150" b="0">
+                <a:solidFill>
+                  <a:srgbClr val="5B6678"/>
+                </a:solidFill>
+                <a:latin typeface="Microsoft JhengHei"/>
+              </a:rPr>
+              <a:t>14 套測試情境 + 一鍵重建測試資料，讓「驗收」有標準、可重複。</a:t>
+            </a:r>
+          </a:p>
+        </p:txBody>
+      </p:sp>
+      <p:sp>
+        <p:nvSpPr>
+          <p:cNvPr id="9" name="Rounded Rectangle 8"/>
+          <p:cNvSpPr/>
+          <p:nvPr/>
+        </p:nvSpPr>
+        <p:spPr>
+          <a:xfrm>
+            <a:off x="4389120" y="4041648"/>
+            <a:ext cx="3429000" cy="1371600"/>
+          </a:xfrm>
+          <a:prstGeom prst="roundRect">
+            <a:avLst>
+              <a:gd name="adj" fmla="val 6000"/>
+            </a:avLst>
+          </a:prstGeom>
+          <a:solidFill>
+            <a:srgbClr val="FFFFFF"/>
+          </a:solidFill>
+          <a:ln w="12700">
+            <a:solidFill>
+              <a:srgbClr val="DDE2EA"/>
+            </a:solidFill>
+          </a:ln>
+          <a:effectLst/>
+        </p:spPr>
+        <p:style>
+          <a:lnRef idx="1">
+            <a:schemeClr val="accent1"/>
+          </a:lnRef>
+          <a:fillRef idx="3">
+            <a:schemeClr val="accent1"/>
+          </a:fillRef>
+          <a:effectRef idx="2">
+            <a:schemeClr val="accent1"/>
+          </a:effectRef>
+          <a:fontRef idx="minor">
+            <a:schemeClr val="lt1"/>
+          </a:fontRef>
+        </p:style>
+        <p:txBody>
+          <a:bodyPr rtlCol="0" anchor="ctr" wrap="square" lIns="182880" rIns="182880" tIns="128016" bIns="128016"/>
+          <a:lstStyle/>
+          <a:p>
+            <a:pPr algn="l">
+              <a:spcAft>
+                <a:spcPts val="300"/>
+              </a:spcAft>
+            </a:pPr>
+            <a:r>
+              <a:rPr sz="1000" b="1">
+                <a:solidFill>
+                  <a:srgbClr val="0B8F6E"/>
+                </a:solidFill>
+                <a:latin typeface="Microsoft JhengHei"/>
+              </a:rPr>
+              <a:t>安全部署</a:t>
+            </a:r>
+          </a:p>
+          <a:p>
+            <a:pPr algn="l">
+              <a:spcAft>
+                <a:spcPts val="400"/>
+              </a:spcAft>
+            </a:pPr>
+            <a:r>
+              <a:rPr sz="1500" b="1">
+                <a:solidFill>
+                  <a:srgbClr val="1B2330"/>
+                </a:solidFill>
+                <a:latin typeface="Microsoft JhengHei"/>
+              </a:rPr>
+              <a:t>Migration 部署管道</a:t>
+            </a:r>
+          </a:p>
+          <a:p>
+            <a:pPr algn="l">
+              <a:lnSpc>
+                <a:spcPct val="125000"/>
+              </a:lnSpc>
+              <a:spcAft>
+                <a:spcPts val="0"/>
+              </a:spcAft>
+            </a:pPr>
+            <a:r>
+              <a:rPr sz="1150" b="0">
+                <a:solidFill>
+                  <a:srgbClr val="5B6678"/>
+                </a:solidFill>
+                <a:latin typeface="Microsoft JhengHei"/>
+              </a:rPr>
+              <a:t>資料庫變更走固定、受控的方式，上線步驟一致、不靠手動硬幹。</a:t>
+            </a:r>
+          </a:p>
+        </p:txBody>
+      </p:sp>
+      <p:sp>
+        <p:nvSpPr>
+          <p:cNvPr id="10" name="Rounded Rectangle 9"/>
+          <p:cNvSpPr/>
+          <p:nvPr/>
+        </p:nvSpPr>
+        <p:spPr>
+          <a:xfrm>
+            <a:off x="8046720" y="4041648"/>
+            <a:ext cx="3429000" cy="1371600"/>
+          </a:xfrm>
+          <a:prstGeom prst="roundRect">
+            <a:avLst>
+              <a:gd name="adj" fmla="val 6000"/>
+            </a:avLst>
+          </a:prstGeom>
+          <a:solidFill>
+            <a:srgbClr val="FFFFFF"/>
+          </a:solidFill>
+          <a:ln w="12700">
+            <a:solidFill>
+              <a:srgbClr val="DDE2EA"/>
+            </a:solidFill>
+          </a:ln>
+          <a:effectLst/>
+        </p:spPr>
+        <p:style>
+          <a:lnRef idx="1">
+            <a:schemeClr val="accent1"/>
+          </a:lnRef>
+          <a:fillRef idx="3">
+            <a:schemeClr val="accent1"/>
+          </a:fillRef>
+          <a:effectRef idx="2">
+            <a:schemeClr val="accent1"/>
+          </a:effectRef>
+          <a:fontRef idx="minor">
+            <a:schemeClr val="lt1"/>
+          </a:fontRef>
+        </p:style>
+        <p:txBody>
+          <a:bodyPr rtlCol="0" anchor="ctr" wrap="square" lIns="182880" rIns="182880" tIns="128016" bIns="128016"/>
+          <a:lstStyle/>
+          <a:p>
+            <a:pPr algn="l">
+              <a:spcAft>
+                <a:spcPts val="300"/>
+              </a:spcAft>
+            </a:pPr>
+            <a:r>
+              <a:rPr sz="1000" b="1">
+                <a:solidFill>
+                  <a:srgbClr val="0B8F6E"/>
+                </a:solidFill>
+                <a:latin typeface="Microsoft JhengHei"/>
+              </a:rPr>
+              <a:t>交付單位</a:t>
+            </a:r>
+          </a:p>
+          <a:p>
+            <a:pPr algn="l">
+              <a:spcAft>
+                <a:spcPts val="400"/>
+              </a:spcAft>
+            </a:pPr>
+            <a:r>
+              <a:rPr sz="1500" b="1">
+                <a:solidFill>
+                  <a:srgbClr val="1B2330"/>
+                </a:solidFill>
+                <a:latin typeface="Microsoft JhengHei"/>
+              </a:rPr>
+              <a:t>每次都是一個 PR</a:t>
+            </a:r>
+          </a:p>
+          <a:p>
+            <a:pPr algn="l">
+              <a:lnSpc>
+                <a:spcPct val="125000"/>
+              </a:lnSpc>
+              <a:spcAft>
+                <a:spcPts val="0"/>
+              </a:spcAft>
+            </a:pPr>
+            <a:r>
+              <a:rPr sz="1150" b="0">
+                <a:solidFill>
+                  <a:srgbClr val="5B6678"/>
+                </a:solidFill>
+                <a:latin typeface="Microsoft JhengHei"/>
+              </a:rPr>
+              <a:t>每一圈閉環都收斂成一個可審查、可回退的 PR，變更全程留痕。</a:t>
             </a:r>
           </a:p>
         </p:txBody>
@@ -5513,7 +6883,7 @@
     <p:bg>
       <p:bgPr>
         <a:solidFill>
-          <a:srgbClr val="0F1117"/>
+          <a:srgbClr val="F4F6F9"/>
         </a:solidFill>
         <a:effectLst/>
       </p:bgPr>
@@ -5533,8 +6903,8 @@
         </p:nvSpPr>
         <p:spPr>
           <a:xfrm>
-            <a:off x="731520" y="457200"/>
-            <a:ext cx="10698480" cy="822960"/>
+            <a:off x="731520" y="502920"/>
+            <a:ext cx="10698480" cy="914400"/>
           </a:xfrm>
           <a:prstGeom prst="rect">
             <a:avLst/>
@@ -5555,20 +6925,20 @@
             <a:r>
               <a:rPr sz="3000" b="1">
                 <a:solidFill>
-                  <a:srgbClr val="E8EAF0"/>
-                </a:solidFill>
-                <a:latin typeface="Microsoft JhengHei"/>
-              </a:rPr>
-              <a:t>我跟 AI 的對話，</a:t>
+                  <a:srgbClr val="1B2330"/>
+                </a:solidFill>
+                <a:latin typeface="Microsoft JhengHei"/>
+              </a:rPr>
+              <a:t>閉環與 harness，</a:t>
             </a:r>
             <a:r>
               <a:rPr sz="3000" b="1">
                 <a:solidFill>
-                  <a:srgbClr val="6EE7B7"/>
-                </a:solidFill>
-                <a:latin typeface="Microsoft JhengHei"/>
-              </a:rPr>
-              <a:t>就像在跟工程師同事講話</a:t>
+                  <a:srgbClr val="0B8F6E"/>
+                </a:solidFill>
+                <a:latin typeface="Microsoft JhengHei"/>
+              </a:rPr>
+              <a:t>一句話分清楚</a:t>
             </a:r>
           </a:p>
         </p:txBody>
@@ -5581,18 +6951,20 @@
         </p:nvSpPr>
         <p:spPr>
           <a:xfrm>
-            <a:off x="731520" y="1371600"/>
-            <a:ext cx="10698480" cy="914400"/>
+            <a:off x="731520" y="1645920"/>
+            <a:ext cx="5212080" cy="3291840"/>
           </a:xfrm>
           <a:prstGeom prst="roundRect">
-            <a:avLst/>
+            <a:avLst>
+              <a:gd name="adj" fmla="val 6000"/>
+            </a:avLst>
           </a:prstGeom>
           <a:solidFill>
-            <a:srgbClr val="1A1F2B"/>
+            <a:srgbClr val="FFFFFF"/>
           </a:solidFill>
           <a:ln w="12700">
             <a:solidFill>
-              <a:srgbClr val="2A3245"/>
+              <a:srgbClr val="DDE2EA"/>
             </a:solidFill>
           </a:ln>
           <a:effectLst/>
@@ -5612,44 +6984,57 @@
           </a:fontRef>
         </p:style>
         <p:txBody>
-          <a:bodyPr rtlCol="0" anchor="ctr" wrap="square" lIns="164592" rIns="164592" tIns="109728" bIns="109728"/>
-          <a:lstStyle/>
-          <a:p>
-            <a:pPr algn="l">
-              <a:spcAft>
-                <a:spcPts val="200"/>
-              </a:spcAft>
-            </a:pPr>
-            <a:r>
-              <a:t/>
-            </a:r>
-            <a:r>
-              <a:rPr sz="1600" b="1">
-                <a:solidFill>
-                  <a:srgbClr val="E8EAF0"/>
-                </a:solidFill>
-                <a:latin typeface="Microsoft JhengHei"/>
-              </a:rPr>
-              <a:t>「取貨單幫我改成 80mm 熱感紙的小白單版型」</a:t>
-            </a:r>
-          </a:p>
-          <a:p>
-            <a:pPr algn="l">
-              <a:spcAft>
-                <a:spcPts val="0"/>
-              </a:spcAft>
-            </a:pPr>
-            <a:r>
-              <a:t/>
-            </a:r>
-            <a:r>
-              <a:rPr sz="1300" b="0">
-                <a:solidFill>
-                  <a:srgbClr val="6B7385"/>
-                </a:solidFill>
-                <a:latin typeface="Microsoft JhengHei"/>
-              </a:rPr>
-              <a:t>→ AI 改好收據版型，發 PR #430</a:t>
+          <a:bodyPr rtlCol="0" anchor="ctr" wrap="square" lIns="182880" rIns="182880" tIns="128016" bIns="128016"/>
+          <a:lstStyle/>
+          <a:p>
+            <a:pPr algn="l">
+              <a:spcAft>
+                <a:spcPts val="800"/>
+              </a:spcAft>
+            </a:pPr>
+            <a:r>
+              <a:rPr sz="1300" b="1">
+                <a:solidFill>
+                  <a:srgbClr val="0B8F6E"/>
+                </a:solidFill>
+                <a:latin typeface="Microsoft JhengHei"/>
+              </a:rPr>
+              <a:t>閉環 / CLOSED LOOP</a:t>
+            </a:r>
+          </a:p>
+          <a:p>
+            <a:pPr algn="l">
+              <a:spcAft>
+                <a:spcPts val="1000"/>
+              </a:spcAft>
+            </a:pPr>
+            <a:r>
+              <a:rPr sz="2200" b="1">
+                <a:solidFill>
+                  <a:srgbClr val="1B2330"/>
+                </a:solidFill>
+                <a:latin typeface="Microsoft JhengHei"/>
+              </a:rPr>
+              <a:t>是「行為」</a:t>
+            </a:r>
+          </a:p>
+          <a:p>
+            <a:pPr algn="l">
+              <a:lnSpc>
+                <a:spcPct val="155000"/>
+              </a:lnSpc>
+              <a:spcAft>
+                <a:spcPts val="600"/>
+              </a:spcAft>
+            </a:pPr>
+            <a:r>
+              <a:rPr sz="1500" b="0">
+                <a:solidFill>
+                  <a:srgbClr val="5B6678"/>
+                </a:solidFill>
+                <a:latin typeface="Microsoft JhengHei"/>
+              </a:rPr>
+              <a:t>講需求、釐清、發 PR、驗收、回報 — 一圈一圈、每圈都收斂的工作節奏。它決定了品質怎麼被控制住。</a:t>
             </a:r>
           </a:p>
         </p:txBody>
@@ -5662,18 +7047,20 @@
         </p:nvSpPr>
         <p:spPr>
           <a:xfrm>
-            <a:off x="731520" y="2423160"/>
-            <a:ext cx="10698480" cy="914400"/>
+            <a:off x="6263640" y="1645920"/>
+            <a:ext cx="5212080" cy="3291840"/>
           </a:xfrm>
           <a:prstGeom prst="roundRect">
-            <a:avLst/>
+            <a:avLst>
+              <a:gd name="adj" fmla="val 6000"/>
+            </a:avLst>
           </a:prstGeom>
           <a:solidFill>
-            <a:srgbClr val="1A1F2B"/>
+            <a:srgbClr val="FFFFFF"/>
           </a:solidFill>
           <a:ln w="12700">
             <a:solidFill>
-              <a:srgbClr val="2A3245"/>
+              <a:srgbClr val="DDE2EA"/>
             </a:solidFill>
           </a:ln>
           <a:effectLst/>
@@ -5693,220 +7080,71 @@
           </a:fontRef>
         </p:style>
         <p:txBody>
-          <a:bodyPr rtlCol="0" anchor="ctr" wrap="square" lIns="164592" rIns="164592" tIns="109728" bIns="109728"/>
-          <a:lstStyle/>
-          <a:p>
-            <a:pPr algn="l">
-              <a:spcAft>
-                <a:spcPts val="200"/>
-              </a:spcAft>
-            </a:pPr>
-            <a:r>
-              <a:t/>
-            </a:r>
-            <a:r>
-              <a:rPr sz="1600" b="1">
-                <a:solidFill>
-                  <a:srgbClr val="E8EAF0"/>
-                </a:solidFill>
-                <a:latin typeface="Microsoft JhengHei"/>
-              </a:rPr>
-              <a:t>「列表的『載入中…』太陽春，全部改成轉圈圈」</a:t>
-            </a:r>
-          </a:p>
-          <a:p>
-            <a:pPr algn="l">
-              <a:spcAft>
-                <a:spcPts val="0"/>
-              </a:spcAft>
-            </a:pPr>
-            <a:r>
-              <a:t/>
-            </a:r>
-            <a:r>
-              <a:rPr sz="1300" b="0">
-                <a:solidFill>
-                  <a:srgbClr val="6B7385"/>
-                </a:solidFill>
-                <a:latin typeface="Microsoft JhengHei"/>
-              </a:rPr>
-              <a:t>→ AI 一次改了 8 個列表頁的 loading 狀態，PR #427</a:t>
-            </a:r>
-          </a:p>
-        </p:txBody>
-      </p:sp>
-      <p:sp>
-        <p:nvSpPr>
-          <p:cNvPr id="5" name="Rounded Rectangle 4"/>
-          <p:cNvSpPr/>
+          <a:bodyPr rtlCol="0" anchor="ctr" wrap="square" lIns="182880" rIns="182880" tIns="128016" bIns="128016"/>
+          <a:lstStyle/>
+          <a:p>
+            <a:pPr algn="l">
+              <a:spcAft>
+                <a:spcPts val="800"/>
+              </a:spcAft>
+            </a:pPr>
+            <a:r>
+              <a:rPr sz="1300" b="1">
+                <a:solidFill>
+                  <a:srgbClr val="B4690E"/>
+                </a:solidFill>
+                <a:latin typeface="Microsoft JhengHei"/>
+              </a:rPr>
+              <a:t>HARNESS / 支架</a:t>
+            </a:r>
+          </a:p>
+          <a:p>
+            <a:pPr algn="l">
+              <a:spcAft>
+                <a:spcPts val="1000"/>
+              </a:spcAft>
+            </a:pPr>
+            <a:r>
+              <a:rPr sz="2200" b="1">
+                <a:solidFill>
+                  <a:srgbClr val="1B2330"/>
+                </a:solidFill>
+                <a:latin typeface="Microsoft JhengHei"/>
+              </a:rPr>
+              <a:t>是「機器」</a:t>
+            </a:r>
+          </a:p>
+          <a:p>
+            <a:pPr algn="l">
+              <a:lnSpc>
+                <a:spcPct val="155000"/>
+              </a:lnSpc>
+              <a:spcAft>
+                <a:spcPts val="600"/>
+              </a:spcAft>
+            </a:pPr>
+            <a:r>
+              <a:rPr sz="1500" b="0">
+                <a:solidFill>
+                  <a:srgbClr val="5B6678"/>
+                </a:solidFill>
+                <a:latin typeface="Microsoft JhengHei"/>
+              </a:rPr>
+              <a:t>工具、守則、交接、測試、部署管道 — 讓那一圈能可靠、自動、重複跑完的底層裝置。它決定了閉環跑得動、跑得久。</a:t>
+            </a:r>
+          </a:p>
+        </p:txBody>
+      </p:sp>
+      <p:sp>
+        <p:nvSpPr>
+          <p:cNvPr id="5" name="TextBox 4"/>
+          <p:cNvSpPr txBox="1"/>
           <p:nvPr/>
         </p:nvSpPr>
         <p:spPr>
           <a:xfrm>
-            <a:off x="731520" y="3474720"/>
+            <a:off x="731520" y="5212080"/>
             <a:ext cx="10698480" cy="914400"/>
-          </a:xfrm>
-          <a:prstGeom prst="roundRect">
-            <a:avLst/>
-          </a:prstGeom>
-          <a:solidFill>
-            <a:srgbClr val="1A1F2B"/>
-          </a:solidFill>
-          <a:ln w="12700">
-            <a:solidFill>
-              <a:srgbClr val="2A3245"/>
-            </a:solidFill>
-          </a:ln>
-          <a:effectLst/>
-        </p:spPr>
-        <p:style>
-          <a:lnRef idx="1">
-            <a:schemeClr val="accent1"/>
-          </a:lnRef>
-          <a:fillRef idx="3">
-            <a:schemeClr val="accent1"/>
-          </a:fillRef>
-          <a:effectRef idx="2">
-            <a:schemeClr val="accent1"/>
-          </a:effectRef>
-          <a:fontRef idx="minor">
-            <a:schemeClr val="lt1"/>
-          </a:fontRef>
-        </p:style>
-        <p:txBody>
-          <a:bodyPr rtlCol="0" anchor="ctr" wrap="square" lIns="164592" rIns="164592" tIns="109728" bIns="109728"/>
-          <a:lstStyle/>
-          <a:p>
-            <a:pPr algn="l">
-              <a:spcAft>
-                <a:spcPts val="200"/>
-              </a:spcAft>
-            </a:pPr>
-            <a:r>
-              <a:t/>
-            </a:r>
-            <a:r>
-              <a:rPr sz="1600" b="1">
-                <a:solidFill>
-                  <a:srgbClr val="E8EAF0"/>
-                </a:solidFill>
-                <a:latin typeface="Microsoft JhengHei"/>
-              </a:rPr>
-              <a:t>「開團列表的『加單』按鈕太小，加粗加大」</a:t>
-            </a:r>
-          </a:p>
-          <a:p>
-            <a:pPr algn="l">
-              <a:spcAft>
-                <a:spcPts val="0"/>
-              </a:spcAft>
-            </a:pPr>
-            <a:r>
-              <a:t/>
-            </a:r>
-            <a:r>
-              <a:rPr sz="1300" b="0">
-                <a:solidFill>
-                  <a:srgbClr val="6B7385"/>
-                </a:solidFill>
-                <a:latin typeface="Microsoft JhengHei"/>
-              </a:rPr>
-              <a:t>→ AI 調整樣式，PR #404</a:t>
-            </a:r>
-          </a:p>
-        </p:txBody>
-      </p:sp>
-      <p:sp>
-        <p:nvSpPr>
-          <p:cNvPr id="6" name="Rounded Rectangle 5"/>
-          <p:cNvSpPr/>
-          <p:nvPr/>
-        </p:nvSpPr>
-        <p:spPr>
-          <a:xfrm>
-            <a:off x="731520" y="4526280"/>
-            <a:ext cx="10698480" cy="914400"/>
-          </a:xfrm>
-          <a:prstGeom prst="roundRect">
-            <a:avLst/>
-          </a:prstGeom>
-          <a:solidFill>
-            <a:srgbClr val="1A1F2B"/>
-          </a:solidFill>
-          <a:ln w="12700">
-            <a:solidFill>
-              <a:srgbClr val="2A3245"/>
-            </a:solidFill>
-          </a:ln>
-          <a:effectLst/>
-        </p:spPr>
-        <p:style>
-          <a:lnRef idx="1">
-            <a:schemeClr val="accent1"/>
-          </a:lnRef>
-          <a:fillRef idx="3">
-            <a:schemeClr val="accent1"/>
-          </a:fillRef>
-          <a:effectRef idx="2">
-            <a:schemeClr val="accent1"/>
-          </a:effectRef>
-          <a:fontRef idx="minor">
-            <a:schemeClr val="lt1"/>
-          </a:fontRef>
-        </p:style>
-        <p:txBody>
-          <a:bodyPr rtlCol="0" anchor="ctr" wrap="square" lIns="164592" rIns="164592" tIns="109728" bIns="109728"/>
-          <a:lstStyle/>
-          <a:p>
-            <a:pPr algn="l">
-              <a:spcAft>
-                <a:spcPts val="200"/>
-              </a:spcAft>
-            </a:pPr>
-            <a:r>
-              <a:t/>
-            </a:r>
-            <a:r>
-              <a:rPr sz="1600" b="1">
-                <a:solidFill>
-                  <a:srgbClr val="E8EAF0"/>
-                </a:solidFill>
-                <a:latin typeface="Microsoft JhengHei"/>
-              </a:rPr>
-              <a:t>「貨還沒到齊的訂單，已到的品項要可以先取」</a:t>
-            </a:r>
-          </a:p>
-          <a:p>
-            <a:pPr algn="l">
-              <a:spcAft>
-                <a:spcPts val="0"/>
-              </a:spcAft>
-            </a:pPr>
-            <a:r>
-              <a:t/>
-            </a:r>
-            <a:r>
-              <a:rPr sz="1300" b="0">
-                <a:solidFill>
-                  <a:srgbClr val="6B7385"/>
-                </a:solidFill>
-                <a:latin typeface="Microsoft JhengHei"/>
-              </a:rPr>
-              <a:t>→ AI 把取貨邏輯從「整單」改成「品項層級」，含 DB 變更，PR #423</a:t>
-            </a:r>
-          </a:p>
-        </p:txBody>
-      </p:sp>
-      <p:sp>
-        <p:nvSpPr>
-          <p:cNvPr id="7" name="TextBox 6"/>
-          <p:cNvSpPr txBox="1"/>
-          <p:nvPr/>
-        </p:nvSpPr>
-        <p:spPr>
-          <a:xfrm>
-            <a:off x="731520" y="5715000"/>
-            <a:ext cx="10698480" cy="822960"/>
           </a:xfrm>
           <a:prstGeom prst="rect">
             <a:avLst/>
@@ -5920,21 +7158,21 @@
           <a:lstStyle/>
           <a:p>
             <a:pPr algn="l">
+              <a:lnSpc>
+                <a:spcPct val="135000"/>
+              </a:lnSpc>
               <a:spcAft>
                 <a:spcPts val="600"/>
               </a:spcAft>
             </a:pPr>
             <a:r>
-              <a:t/>
-            </a:r>
-            <a:r>
-              <a:rPr sz="1500" b="0">
-                <a:solidFill>
-                  <a:srgbClr val="9AA3B5"/>
-                </a:solidFill>
-                <a:latin typeface="Microsoft JhengHei"/>
-              </a:rPr>
-              <a:t>從調一個按鈕大小，到改整套取貨邏輯，講的方式是一樣的：說清楚「我要什麼」就好。</a:t>
+              <a:rPr sz="1600" b="0">
+                <a:solidFill>
+                  <a:srgbClr val="5B6678"/>
+                </a:solidFill>
+                <a:latin typeface="Microsoft JhengHei"/>
+              </a:rPr>
+              <a:t>先有 harness 撐住，閉環才轉得起來；閉環轉得越多，又回頭把 harness 養得越好。兩者互相加強。</a:t>
             </a:r>
           </a:p>
         </p:txBody>
@@ -5953,7 +7191,7 @@
     <p:bg>
       <p:bgPr>
         <a:solidFill>
-          <a:srgbClr val="0F1117"/>
+          <a:srgbClr val="F4F6F9"/>
         </a:solidFill>
         <a:effectLst/>
       </p:bgPr>
@@ -5973,8 +7211,8 @@
         </p:nvSpPr>
         <p:spPr>
           <a:xfrm>
-            <a:off x="731520" y="548640"/>
-            <a:ext cx="10698480" cy="822960"/>
+            <a:off x="731520" y="502920"/>
+            <a:ext cx="10698480" cy="914400"/>
           </a:xfrm>
           <a:prstGeom prst="rect">
             <a:avLst/>
@@ -5995,20 +7233,20 @@
             <a:r>
               <a:rPr sz="3000" b="1">
                 <a:solidFill>
-                  <a:srgbClr val="E8EAF0"/>
-                </a:solidFill>
-                <a:latin typeface="Microsoft JhengHei"/>
-              </a:rPr>
-              <a:t>關鍵技巧：讓 AI </a:t>
+                  <a:srgbClr val="1B2330"/>
+                </a:solidFill>
+                <a:latin typeface="Microsoft JhengHei"/>
+              </a:rPr>
+              <a:t>第一步不是寫程式，是</a:t>
             </a:r>
             <a:r>
               <a:rPr sz="3000" b="1">
                 <a:solidFill>
-                  <a:srgbClr val="6EE7B7"/>
-                </a:solidFill>
-                <a:latin typeface="Microsoft JhengHei"/>
-              </a:rPr>
-              <a:t>記住踩過的雷</a:t>
+                  <a:srgbClr val="0B8F6E"/>
+                </a:solidFill>
+                <a:latin typeface="Microsoft JhengHei"/>
+              </a:rPr>
+              <a:t>陪 AI 把需求聊透</a:t>
             </a:r>
           </a:p>
         </p:txBody>
@@ -6021,8 +7259,8 @@
         </p:nvSpPr>
         <p:spPr>
           <a:xfrm>
-            <a:off x="822960" y="1645920"/>
-            <a:ext cx="10515600" cy="3566160"/>
+            <a:off x="822960" y="1737360"/>
+            <a:ext cx="10515600" cy="3291840"/>
           </a:xfrm>
           <a:prstGeom prst="rect">
             <a:avLst/>
@@ -6037,85 +7275,85 @@
           <a:p>
             <a:pPr algn="l">
               <a:lnSpc>
-                <a:spcPct val="125000"/>
+                <a:spcPct val="130000"/>
               </a:lnSpc>
               <a:spcAft>
-                <a:spcPts val="1800"/>
+                <a:spcPts val="1600"/>
               </a:spcAft>
             </a:pPr>
             <a:r>
               <a:rPr sz="1900" b="1">
                 <a:solidFill>
-                  <a:srgbClr val="6EE7B7"/>
-                </a:solidFill>
-                <a:latin typeface="Microsoft JhengHei"/>
-              </a:rPr>
-              <a:t>›  </a:t>
+                  <a:srgbClr val="0B8F6E"/>
+                </a:solidFill>
+                <a:latin typeface="Microsoft JhengHei"/>
+              </a:rPr>
+              <a:t>•  </a:t>
             </a:r>
             <a:r>
               <a:rPr sz="1900" b="0">
                 <a:solidFill>
-                  <a:srgbClr val="E8EAF0"/>
-                </a:solidFill>
-                <a:latin typeface="Microsoft JhengHei"/>
-              </a:rPr>
-              <a:t>CLAUDE.md 守則檔：AI 每次開工都會先讀。踩過一次的雷（例如部署資料庫的正確管道、改函式前要先查歷史版本）就寫進去，之後不再犯</a:t>
+                  <a:srgbClr val="36404F"/>
+                </a:solidFill>
+                <a:latin typeface="Microsoft JhengHei"/>
+              </a:rPr>
+              <a:t>開工前先跟 AI 對談，產出各模組 PRD（產品需求文件）：商品、會員、庫存、採購、銷售、取貨</a:t>
             </a:r>
           </a:p>
           <a:p>
             <a:pPr algn="l">
               <a:lnSpc>
-                <a:spcPct val="125000"/>
+                <a:spcPct val="130000"/>
               </a:lnSpc>
               <a:spcAft>
-                <a:spcPts val="1800"/>
+                <a:spcPts val="1600"/>
               </a:spcAft>
             </a:pPr>
             <a:r>
               <a:rPr sz="1900" b="1">
                 <a:solidFill>
-                  <a:srgbClr val="6EE7B7"/>
-                </a:solidFill>
-                <a:latin typeface="Microsoft JhengHei"/>
-              </a:rPr>
-              <a:t>›  </a:t>
+                  <a:srgbClr val="0B8F6E"/>
+                </a:solidFill>
+                <a:latin typeface="Microsoft JhengHei"/>
+              </a:rPr>
+              <a:t>•  </a:t>
             </a:r>
             <a:r>
               <a:rPr sz="1900" b="0">
                 <a:solidFill>
-                  <a:srgbClr val="E8EAF0"/>
-                </a:solidFill>
-                <a:latin typeface="Microsoft JhengHei"/>
-              </a:rPr>
-              <a:t>交接文件（HANDOFF）：每段工作結束請 AI 寫下進度與待辦，下一段對話無縫接手</a:t>
+                  <a:srgbClr val="36404F"/>
+                </a:solidFill>
+                <a:latin typeface="Microsoft JhengHei"/>
+              </a:rPr>
+              <a:t>AI 根據 PRD 先設計好資料庫架構，再寫第一行程式</a:t>
             </a:r>
           </a:p>
           <a:p>
             <a:pPr algn="l">
               <a:lnSpc>
-                <a:spcPct val="125000"/>
+                <a:spcPct val="130000"/>
               </a:lnSpc>
               <a:spcAft>
-                <a:spcPts val="1800"/>
+                <a:spcPts val="1600"/>
               </a:spcAft>
             </a:pPr>
             <a:r>
               <a:rPr sz="1900" b="1">
                 <a:solidFill>
-                  <a:srgbClr val="6EE7B7"/>
-                </a:solidFill>
-                <a:latin typeface="Microsoft JhengHei"/>
-              </a:rPr>
-              <a:t>›  </a:t>
+                  <a:srgbClr val="0B8F6E"/>
+                </a:solidFill>
+                <a:latin typeface="Microsoft JhengHei"/>
+              </a:rPr>
+              <a:t>•  </a:t>
             </a:r>
             <a:r>
               <a:rPr sz="1900" b="0">
                 <a:solidFill>
-                  <a:srgbClr val="E8EAF0"/>
-                </a:solidFill>
-                <a:latin typeface="Microsoft JhengHei"/>
-              </a:rPr>
-              <a:t>測試腳本：請 AI 建好 14 套 E2E 測試情境 + 一鍵重置測試資料的指令，驗收有依據</a:t>
+                  <a:srgbClr val="36404F"/>
+                </a:solidFill>
+                <a:latin typeface="Microsoft JhengHei"/>
+              </a:rPr>
+              <a:t>需求文件用「我的語言」寫 — 我看得懂、改得動，AI 照著做</a:t>
             </a:r>
           </a:p>
         </p:txBody>
@@ -6128,7 +7366,7 @@
         </p:nvSpPr>
         <p:spPr>
           <a:xfrm>
-            <a:off x="822960" y="5303520"/>
+            <a:off x="822960" y="5212080"/>
             <a:ext cx="10515600" cy="822960"/>
           </a:xfrm>
           <a:prstGeom prst="rect">
@@ -6148,16 +7386,13 @@
               </a:spcAft>
             </a:pPr>
             <a:r>
-              <a:t/>
-            </a:r>
-            <a:r>
               <a:rPr sz="1600" b="0">
                 <a:solidFill>
-                  <a:srgbClr val="9AA3B5"/>
-                </a:solidFill>
-                <a:latin typeface="Microsoft JhengHei"/>
-              </a:rPr>
-              <a:t>AI 沒有長期記憶，但「文件」有。把經驗寫成文件，就是在幫 AI 累積資歷。</a:t>
+                  <a:srgbClr val="5B6678"/>
+                </a:solidFill>
+                <a:latin typeface="Microsoft JhengHei"/>
+              </a:rPr>
+              <a:t>心得：前期把「要做什麼」講清楚，比急著要它寫 code 重要十倍。這也是閉環的第一步。</a:t>
             </a:r>
           </a:p>
         </p:txBody>
@@ -6176,7 +7411,7 @@
     <p:bg>
       <p:bgPr>
         <a:solidFill>
-          <a:srgbClr val="0F1117"/>
+          <a:srgbClr val="F4F6F9"/>
         </a:solidFill>
         <a:effectLst/>
       </p:bgPr>
@@ -6196,8 +7431,8 @@
         </p:nvSpPr>
         <p:spPr>
           <a:xfrm>
-            <a:off x="731520" y="548640"/>
-            <a:ext cx="10698480" cy="822960"/>
+            <a:off x="731520" y="502920"/>
+            <a:ext cx="10698480" cy="914400"/>
           </a:xfrm>
           <a:prstGeom prst="rect">
             <a:avLst/>
@@ -6218,20 +7453,20 @@
             <a:r>
               <a:rPr sz="3000" b="1">
                 <a:solidFill>
-                  <a:srgbClr val="E8EAF0"/>
-                </a:solidFill>
-                <a:latin typeface="Microsoft JhengHei"/>
-              </a:rPr>
-              <a:t>一路下來</a:t>
+                  <a:srgbClr val="1B2330"/>
+                </a:solidFill>
+                <a:latin typeface="Microsoft JhengHei"/>
+              </a:rPr>
+              <a:t>我跟 AI 的對話，</a:t>
             </a:r>
             <a:r>
               <a:rPr sz="3000" b="1">
                 <a:solidFill>
-                  <a:srgbClr val="6EE7B7"/>
-                </a:solidFill>
-                <a:latin typeface="Microsoft JhengHei"/>
-              </a:rPr>
-              <a:t>學到的事</a:t>
+                  <a:srgbClr val="0B8F6E"/>
+                </a:solidFill>
+                <a:latin typeface="Microsoft JhengHei"/>
+              </a:rPr>
+              <a:t>就像在跟工程師同事講話</a:t>
             </a:r>
           </a:p>
         </p:txBody>
@@ -6244,18 +7479,20 @@
         </p:nvSpPr>
         <p:spPr>
           <a:xfrm>
-            <a:off x="731520" y="1645920"/>
-            <a:ext cx="5212080" cy="4389120"/>
+            <a:off x="731520" y="1554480"/>
+            <a:ext cx="10698480" cy="1024128"/>
           </a:xfrm>
           <a:prstGeom prst="roundRect">
-            <a:avLst/>
+            <a:avLst>
+              <a:gd name="adj" fmla="val 6000"/>
+            </a:avLst>
           </a:prstGeom>
           <a:solidFill>
-            <a:srgbClr val="1A1F2B"/>
+            <a:srgbClr val="FFFFFF"/>
           </a:solidFill>
           <a:ln w="12700">
             <a:solidFill>
-              <a:srgbClr val="2A3245"/>
+              <a:srgbClr val="DDE2EA"/>
             </a:solidFill>
           </a:ln>
           <a:effectLst/>
@@ -6275,130 +7512,38 @@
           </a:fontRef>
         </p:style>
         <p:txBody>
-          <a:bodyPr rtlCol="0" anchor="ctr" wrap="square" lIns="164592" rIns="164592" tIns="109728" bIns="109728"/>
-          <a:lstStyle/>
-          <a:p>
-            <a:pPr algn="l">
-              <a:lnSpc>
-                <a:spcPct val="125000"/>
-              </a:lnSpc>
-              <a:spcAft>
-                <a:spcPts val="1200"/>
-              </a:spcAft>
-            </a:pPr>
-            <a:r>
-              <a:t/>
-            </a:r>
-            <a:r>
-              <a:rPr sz="2000" b="1">
-                <a:solidFill>
-                  <a:srgbClr val="FBBF24"/>
-                </a:solidFill>
-                <a:latin typeface="Microsoft JhengHei"/>
-              </a:rPr>
-              <a:t>有用的習慣</a:t>
-            </a:r>
-            <a:r>
-              <a:rPr sz="1600" b="1">
-                <a:solidFill>
-                  <a:srgbClr val="6EE7B7"/>
-                </a:solidFill>
-                <a:latin typeface="Microsoft JhengHei"/>
-              </a:rPr>
-              <a:t>›  </a:t>
-            </a:r>
-            <a:r>
-              <a:rPr sz="1600" b="0">
-                <a:solidFill>
-                  <a:srgbClr val="E8EAF0"/>
-                </a:solidFill>
-                <a:latin typeface="Microsoft JhengHei"/>
-              </a:rPr>
-              <a:t>一次只要一個功能，小步快跑</a:t>
-            </a:r>
-          </a:p>
-          <a:p>
-            <a:pPr algn="l">
-              <a:lnSpc>
-                <a:spcPct val="125000"/>
-              </a:lnSpc>
-              <a:spcAft>
-                <a:spcPts val="1200"/>
-              </a:spcAft>
-            </a:pPr>
-            <a:r>
-              <a:rPr sz="1600" b="1">
-                <a:solidFill>
-                  <a:srgbClr val="6EE7B7"/>
-                </a:solidFill>
-                <a:latin typeface="Microsoft JhengHei"/>
-              </a:rPr>
-              <a:t>›  </a:t>
-            </a:r>
-            <a:r>
-              <a:rPr sz="1600" b="0">
-                <a:solidFill>
-                  <a:srgbClr val="E8EAF0"/>
-                </a:solidFill>
-                <a:latin typeface="Microsoft JhengHei"/>
-              </a:rPr>
-              <a:t>需求講「為什麼」，不只講「做什麼」</a:t>
-            </a:r>
-          </a:p>
-          <a:p>
-            <a:pPr algn="l">
-              <a:lnSpc>
-                <a:spcPct val="125000"/>
-              </a:lnSpc>
-              <a:spcAft>
-                <a:spcPts val="1200"/>
-              </a:spcAft>
-            </a:pPr>
-            <a:r>
-              <a:rPr sz="1600" b="1">
-                <a:solidFill>
-                  <a:srgbClr val="6EE7B7"/>
-                </a:solidFill>
-                <a:latin typeface="Microsoft JhengHei"/>
-              </a:rPr>
-              <a:t>›  </a:t>
-            </a:r>
-            <a:r>
-              <a:rPr sz="1600" b="0">
-                <a:solidFill>
-                  <a:srgbClr val="E8EAF0"/>
-                </a:solidFill>
-                <a:latin typeface="Microsoft JhengHei"/>
-              </a:rPr>
-              <a:t>每個 PR 都親手操作驗收，不盲目合併</a:t>
-            </a:r>
-          </a:p>
-          <a:p>
-            <a:pPr algn="l">
-              <a:lnSpc>
-                <a:spcPct val="125000"/>
-              </a:lnSpc>
-              <a:spcAft>
-                <a:spcPts val="1200"/>
-              </a:spcAft>
-            </a:pPr>
-            <a:r>
-              <a:rPr sz="1600" b="1">
-                <a:solidFill>
-                  <a:srgbClr val="6EE7B7"/>
-                </a:solidFill>
-                <a:latin typeface="Microsoft JhengHei"/>
-              </a:rPr>
-              <a:t>›  </a:t>
-            </a:r>
-            <a:r>
-              <a:rPr sz="1600" b="0">
-                <a:solidFill>
-                  <a:srgbClr val="E8EAF0"/>
-                </a:solidFill>
-                <a:latin typeface="Microsoft JhengHei"/>
-              </a:rPr>
-              <a:t>出錯時描述「現象」，讓 AI 自己查原因</a:t>
+          <a:bodyPr rtlCol="0" anchor="ctr" wrap="square" lIns="182880" rIns="182880" tIns="128016" bIns="128016"/>
+          <a:lstStyle/>
+          <a:p>
+            <a:pPr algn="l">
+              <a:spcAft>
+                <a:spcPts val="300"/>
+              </a:spcAft>
+            </a:pPr>
+            <a:r>
+              <a:rPr sz="1700" b="1">
+                <a:solidFill>
+                  <a:srgbClr val="1B2330"/>
+                </a:solidFill>
+                <a:latin typeface="Microsoft JhengHei"/>
+              </a:rPr>
+              <a:t>「取貨單幫我改成 80mm 熱感紙的小白單版型」</a:t>
+            </a:r>
+          </a:p>
+          <a:p>
+            <a:pPr algn="l">
+              <a:spcAft>
+                <a:spcPts val="0"/>
+              </a:spcAft>
+            </a:pPr>
+            <a:r>
+              <a:rPr sz="1300" b="0">
+                <a:solidFill>
+                  <a:srgbClr val="7B8597"/>
+                </a:solidFill>
+                <a:latin typeface="Microsoft JhengHei"/>
+              </a:rPr>
+              <a:t>AI 改好收據版型，發 PR #430</a:t>
             </a:r>
           </a:p>
         </p:txBody>
@@ -6411,18 +7556,20 @@
         </p:nvSpPr>
         <p:spPr>
           <a:xfrm>
-            <a:off x="6263640" y="1645920"/>
-            <a:ext cx="5212080" cy="4389120"/>
+            <a:off x="731520" y="2743200"/>
+            <a:ext cx="10698480" cy="1024128"/>
           </a:xfrm>
           <a:prstGeom prst="roundRect">
-            <a:avLst/>
+            <a:avLst>
+              <a:gd name="adj" fmla="val 6000"/>
+            </a:avLst>
           </a:prstGeom>
           <a:solidFill>
-            <a:srgbClr val="1A1F2B"/>
+            <a:srgbClr val="FFFFFF"/>
           </a:solidFill>
           <a:ln w="12700">
             <a:solidFill>
-              <a:srgbClr val="2A3245"/>
+              <a:srgbClr val="DDE2EA"/>
             </a:solidFill>
           </a:ln>
           <a:effectLst/>
@@ -6442,102 +7589,157 @@
           </a:fontRef>
         </p:style>
         <p:txBody>
-          <a:bodyPr rtlCol="0" anchor="ctr" wrap="square" lIns="164592" rIns="164592" tIns="109728" bIns="109728"/>
+          <a:bodyPr rtlCol="0" anchor="ctr" wrap="square" lIns="182880" rIns="182880" tIns="128016" bIns="128016"/>
+          <a:lstStyle/>
+          <a:p>
+            <a:pPr algn="l">
+              <a:spcAft>
+                <a:spcPts val="300"/>
+              </a:spcAft>
+            </a:pPr>
+            <a:r>
+              <a:rPr sz="1700" b="1">
+                <a:solidFill>
+                  <a:srgbClr val="1B2330"/>
+                </a:solidFill>
+                <a:latin typeface="Microsoft JhengHei"/>
+              </a:rPr>
+              <a:t>「列表的『載入中』太陽春，全部改成轉圈圈」</a:t>
+            </a:r>
+          </a:p>
+          <a:p>
+            <a:pPr algn="l">
+              <a:spcAft>
+                <a:spcPts val="0"/>
+              </a:spcAft>
+            </a:pPr>
+            <a:r>
+              <a:rPr sz="1300" b="0">
+                <a:solidFill>
+                  <a:srgbClr val="7B8597"/>
+                </a:solidFill>
+                <a:latin typeface="Microsoft JhengHei"/>
+              </a:rPr>
+              <a:t>AI 一次改了 8 個列表頁的 loading 狀態，PR #427</a:t>
+            </a:r>
+          </a:p>
+        </p:txBody>
+      </p:sp>
+      <p:sp>
+        <p:nvSpPr>
+          <p:cNvPr id="5" name="Rounded Rectangle 4"/>
+          <p:cNvSpPr/>
+          <p:nvPr/>
+        </p:nvSpPr>
+        <p:spPr>
+          <a:xfrm>
+            <a:off x="731520" y="3931920"/>
+            <a:ext cx="10698480" cy="1024128"/>
+          </a:xfrm>
+          <a:prstGeom prst="roundRect">
+            <a:avLst>
+              <a:gd name="adj" fmla="val 6000"/>
+            </a:avLst>
+          </a:prstGeom>
+          <a:solidFill>
+            <a:srgbClr val="FFFFFF"/>
+          </a:solidFill>
+          <a:ln w="12700">
+            <a:solidFill>
+              <a:srgbClr val="DDE2EA"/>
+            </a:solidFill>
+          </a:ln>
+          <a:effectLst/>
+        </p:spPr>
+        <p:style>
+          <a:lnRef idx="1">
+            <a:schemeClr val="accent1"/>
+          </a:lnRef>
+          <a:fillRef idx="3">
+            <a:schemeClr val="accent1"/>
+          </a:fillRef>
+          <a:effectRef idx="2">
+            <a:schemeClr val="accent1"/>
+          </a:effectRef>
+          <a:fontRef idx="minor">
+            <a:schemeClr val="lt1"/>
+          </a:fontRef>
+        </p:style>
+        <p:txBody>
+          <a:bodyPr rtlCol="0" anchor="ctr" wrap="square" lIns="182880" rIns="182880" tIns="128016" bIns="128016"/>
+          <a:lstStyle/>
+          <a:p>
+            <a:pPr algn="l">
+              <a:spcAft>
+                <a:spcPts val="300"/>
+              </a:spcAft>
+            </a:pPr>
+            <a:r>
+              <a:rPr sz="1700" b="1">
+                <a:solidFill>
+                  <a:srgbClr val="1B2330"/>
+                </a:solidFill>
+                <a:latin typeface="Microsoft JhengHei"/>
+              </a:rPr>
+              <a:t>「貨還沒到齊的訂單，已到的品項要可以先取」</a:t>
+            </a:r>
+          </a:p>
+          <a:p>
+            <a:pPr algn="l">
+              <a:spcAft>
+                <a:spcPts val="0"/>
+              </a:spcAft>
+            </a:pPr>
+            <a:r>
+              <a:rPr sz="1300" b="0">
+                <a:solidFill>
+                  <a:srgbClr val="7B8597"/>
+                </a:solidFill>
+                <a:latin typeface="Microsoft JhengHei"/>
+              </a:rPr>
+              <a:t>AI 把取貨邏輯從「整單」改成「品項層級」，含 DB 變更，PR #423</a:t>
+            </a:r>
+          </a:p>
+        </p:txBody>
+      </p:sp>
+      <p:sp>
+        <p:nvSpPr>
+          <p:cNvPr id="6" name="TextBox 5"/>
+          <p:cNvSpPr txBox="1"/>
+          <p:nvPr/>
+        </p:nvSpPr>
+        <p:spPr>
+          <a:xfrm>
+            <a:off x="731520" y="5532120"/>
+            <a:ext cx="10698480" cy="914400"/>
+          </a:xfrm>
+          <a:prstGeom prst="rect">
+            <a:avLst/>
+          </a:prstGeom>
+          <a:noFill/>
+        </p:spPr>
+        <p:txBody>
+          <a:bodyPr wrap="square">
+            <a:spAutoFit/>
+          </a:bodyPr>
           <a:lstStyle/>
           <a:p>
             <a:pPr algn="l">
               <a:lnSpc>
-                <a:spcPct val="125000"/>
+                <a:spcPct val="130000"/>
               </a:lnSpc>
               <a:spcAft>
-                <a:spcPts val="1200"/>
-              </a:spcAft>
-            </a:pPr>
-            <a:r>
-              <a:t/>
-            </a:r>
-            <a:r>
-              <a:rPr sz="2000" b="1">
-                <a:solidFill>
-                  <a:srgbClr val="6EE7B7"/>
-                </a:solidFill>
-                <a:latin typeface="Microsoft JhengHei"/>
-              </a:rPr>
-              <a:t>要注意的坑</a:t>
-            </a:r>
-            <a:r>
-              <a:rPr sz="1600" b="1">
-                <a:solidFill>
-                  <a:srgbClr val="6EE7B7"/>
-                </a:solidFill>
-                <a:latin typeface="Microsoft JhengHei"/>
-              </a:rPr>
-              <a:t>›  </a:t>
-            </a:r>
-            <a:r>
-              <a:rPr sz="1600" b="0">
-                <a:solidFill>
-                  <a:srgbClr val="E8EAF0"/>
-                </a:solidFill>
-                <a:latin typeface="Microsoft JhengHei"/>
-              </a:rPr>
-              <a:t>需求講得模糊，AI 會自己腦補 — 要靠驗收抓出來</a:t>
-            </a:r>
-          </a:p>
-          <a:p>
-            <a:pPr algn="l">
-              <a:lnSpc>
-                <a:spcPct val="125000"/>
-              </a:lnSpc>
-              <a:spcAft>
-                <a:spcPts val="1200"/>
-              </a:spcAft>
-            </a:pPr>
-            <a:r>
-              <a:rPr sz="1600" b="1">
-                <a:solidFill>
-                  <a:srgbClr val="6EE7B7"/>
-                </a:solidFill>
-                <a:latin typeface="Microsoft JhengHei"/>
-              </a:rPr>
-              <a:t>›  </a:t>
-            </a:r>
-            <a:r>
-              <a:rPr sz="1600" b="0">
-                <a:solidFill>
-                  <a:srgbClr val="E8EAF0"/>
-                </a:solidFill>
-                <a:latin typeface="Microsoft JhengHei"/>
-              </a:rPr>
-              <a:t>同個地方改多次，要提醒 AI 別蓋掉之前的修正</a:t>
-            </a:r>
-          </a:p>
-          <a:p>
-            <a:pPr algn="l">
-              <a:lnSpc>
-                <a:spcPct val="125000"/>
-              </a:lnSpc>
-              <a:spcAft>
-                <a:spcPts val="1200"/>
-              </a:spcAft>
-            </a:pPr>
-            <a:r>
-              <a:rPr sz="1600" b="1">
-                <a:solidFill>
-                  <a:srgbClr val="6EE7B7"/>
-                </a:solidFill>
-                <a:latin typeface="Microsoft JhengHei"/>
-              </a:rPr>
-              <a:t>›  </a:t>
-            </a:r>
-            <a:r>
-              <a:rPr sz="1600" b="0">
-                <a:solidFill>
-                  <a:srgbClr val="E8EAF0"/>
-                </a:solidFill>
-                <a:latin typeface="Microsoft JhengHei"/>
-              </a:rPr>
-              <a:t>AI 說「做完了」≠ 真的好了，驗收不能省</a:t>
+                <a:spcPts val="600"/>
+              </a:spcAft>
+            </a:pPr>
+            <a:r>
+              <a:rPr sz="1500" b="0">
+                <a:solidFill>
+                  <a:srgbClr val="5B6678"/>
+                </a:solidFill>
+                <a:latin typeface="Microsoft JhengHei"/>
+              </a:rPr>
+              <a:t>從調一個按鈕，到改整套取貨邏輯，講法都一樣：說清楚「我要什麼」，剩下交給閉環。</a:t>
             </a:r>
           </a:p>
         </p:txBody>
@@ -6556,7 +7758,7 @@
     <p:bg>
       <p:bgPr>
         <a:solidFill>
-          <a:srgbClr val="0F1117"/>
+          <a:srgbClr val="F4F6F9"/>
         </a:solidFill>
         <a:effectLst/>
       </p:bgPr>
@@ -6576,7 +7778,46 @@
         </p:nvSpPr>
         <p:spPr>
           <a:xfrm>
-            <a:off x="731520" y="548640"/>
+            <a:off x="731520" y="274320"/>
+            <a:ext cx="5486400" cy="365760"/>
+          </a:xfrm>
+          <a:prstGeom prst="rect">
+            <a:avLst/>
+          </a:prstGeom>
+          <a:noFill/>
+        </p:spPr>
+        <p:txBody>
+          <a:bodyPr wrap="square">
+            <a:spAutoFit/>
+          </a:bodyPr>
+          <a:lstStyle/>
+          <a:p>
+            <a:pPr algn="l">
+              <a:spcAft>
+                <a:spcPts val="600"/>
+              </a:spcAft>
+            </a:pPr>
+            <a:r>
+              <a:rPr sz="1100" b="1">
+                <a:solidFill>
+                  <a:srgbClr val="0B8F6E"/>
+                </a:solidFill>
+                <a:latin typeface="Microsoft JhengHei"/>
+              </a:rPr>
+              <a:t>現場演示</a:t>
+            </a:r>
+          </a:p>
+        </p:txBody>
+      </p:sp>
+      <p:sp>
+        <p:nvSpPr>
+          <p:cNvPr id="3" name="TextBox 2"/>
+          <p:cNvSpPr txBox="1"/>
+          <p:nvPr/>
+        </p:nvSpPr>
+        <p:spPr>
+          <a:xfrm>
+            <a:off x="731520" y="640080"/>
             <a:ext cx="10698480" cy="822960"/>
           </a:xfrm>
           <a:prstGeom prst="rect">
@@ -6598,45 +7839,48 @@
             <a:r>
               <a:rPr sz="3000" b="1">
                 <a:solidFill>
-                  <a:srgbClr val="E8EAF0"/>
-                </a:solidFill>
-                <a:latin typeface="Microsoft JhengHei"/>
-              </a:rPr>
-              <a:t>如果你也想試：</a:t>
+                  <a:srgbClr val="1B2330"/>
+                </a:solidFill>
+                <a:latin typeface="Microsoft JhengHei"/>
+              </a:rPr>
+              <a:t>實際看一次：</a:t>
             </a:r>
             <a:r>
               <a:rPr sz="3000" b="1">
                 <a:solidFill>
-                  <a:srgbClr val="6EE7B7"/>
-                </a:solidFill>
-                <a:latin typeface="Microsoft JhengHei"/>
-              </a:rPr>
-              <a:t>三個建議</a:t>
-            </a:r>
-          </a:p>
-        </p:txBody>
-      </p:sp>
-      <p:sp>
-        <p:nvSpPr>
-          <p:cNvPr id="3" name="Rounded Rectangle 2"/>
+                  <a:srgbClr val="0B8F6E"/>
+                </a:solidFill>
+                <a:latin typeface="Microsoft JhengHei"/>
+              </a:rPr>
+              <a:t>我跟 AI 是怎麼互動的</a:t>
+            </a:r>
+          </a:p>
+        </p:txBody>
+      </p:sp>
+      <p:sp>
+        <p:nvSpPr>
+          <p:cNvPr id="4" name="Rounded Rectangle 3"/>
           <p:cNvSpPr/>
           <p:nvPr/>
         </p:nvSpPr>
         <p:spPr>
           <a:xfrm>
-            <a:off x="731520" y="1554480"/>
-            <a:ext cx="10698480" cy="1143000"/>
+            <a:off x="2194560" y="1691640"/>
+            <a:ext cx="7772400" cy="4206240"/>
           </a:xfrm>
           <a:prstGeom prst="roundRect">
-            <a:avLst/>
+            <a:avLst>
+              <a:gd name="adj" fmla="val 4000"/>
+            </a:avLst>
           </a:prstGeom>
           <a:solidFill>
-            <a:srgbClr val="1A1F2B"/>
+            <a:srgbClr val="FFFFFF"/>
           </a:solidFill>
-          <a:ln w="12700">
+          <a:ln w="22225">
             <a:solidFill>
-              <a:srgbClr val="2A3245"/>
+              <a:srgbClr val="C2CAD6"/>
             </a:solidFill>
+            <a:prstDash val="sysDash"/>
           </a:ln>
           <a:effectLst/>
         </p:spPr>
@@ -6655,248 +7899,58 @@
           </a:fontRef>
         </p:style>
         <p:txBody>
-          <a:bodyPr rtlCol="0" anchor="ctr" wrap="square" lIns="164592" rIns="164592" tIns="109728" bIns="109728"/>
-          <a:lstStyle/>
-          <a:p>
-            <a:pPr algn="l">
-              <a:spcAft>
-                <a:spcPts val="400"/>
-              </a:spcAft>
-            </a:pPr>
-            <a:r>
-              <a:t/>
-            </a:r>
-            <a:r>
-              <a:rPr sz="1900" b="1">
-                <a:solidFill>
-                  <a:srgbClr val="E8EAF0"/>
-                </a:solidFill>
-                <a:latin typeface="Microsoft JhengHei"/>
-              </a:rPr>
-              <a:t>1. 把自己當 PM，不是工程師</a:t>
-            </a:r>
-          </a:p>
-          <a:p>
-            <a:pPr algn="l">
-              <a:spcAft>
-                <a:spcPts val="0"/>
-              </a:spcAft>
-            </a:pPr>
-            <a:r>
-              <a:t/>
-            </a:r>
-            <a:r>
-              <a:rPr sz="1500" b="0">
-                <a:solidFill>
-                  <a:srgbClr val="9AA3B5"/>
-                </a:solidFill>
-                <a:latin typeface="Microsoft JhengHei"/>
-              </a:rPr>
-              <a:t>你的價值是懂業務、會驗收，程式碼交給 AI</a:t>
-            </a:r>
-          </a:p>
-        </p:txBody>
-      </p:sp>
-      <p:sp>
-        <p:nvSpPr>
-          <p:cNvPr id="4" name="Rounded Rectangle 3"/>
-          <p:cNvSpPr/>
-          <p:nvPr/>
-        </p:nvSpPr>
-        <p:spPr>
-          <a:xfrm>
-            <a:off x="731520" y="2880360"/>
-            <a:ext cx="10698480" cy="1143000"/>
-          </a:xfrm>
-          <a:prstGeom prst="roundRect">
-            <a:avLst/>
-          </a:prstGeom>
-          <a:solidFill>
-            <a:srgbClr val="1A1F2B"/>
-          </a:solidFill>
-          <a:ln w="12700">
-            <a:solidFill>
-              <a:srgbClr val="2A3245"/>
-            </a:solidFill>
-          </a:ln>
-          <a:effectLst/>
-        </p:spPr>
-        <p:style>
-          <a:lnRef idx="1">
-            <a:schemeClr val="accent1"/>
-          </a:lnRef>
-          <a:fillRef idx="3">
-            <a:schemeClr val="accent1"/>
-          </a:fillRef>
-          <a:effectRef idx="2">
-            <a:schemeClr val="accent1"/>
-          </a:effectRef>
-          <a:fontRef idx="minor">
-            <a:schemeClr val="lt1"/>
-          </a:fontRef>
-        </p:style>
-        <p:txBody>
-          <a:bodyPr rtlCol="0" anchor="ctr" wrap="square" lIns="164592" rIns="164592" tIns="109728" bIns="109728"/>
-          <a:lstStyle/>
-          <a:p>
-            <a:pPr algn="l">
-              <a:spcAft>
-                <a:spcPts val="400"/>
-              </a:spcAft>
-            </a:pPr>
-            <a:r>
-              <a:t/>
-            </a:r>
-            <a:r>
-              <a:rPr sz="1900" b="1">
-                <a:solidFill>
-                  <a:srgbClr val="E8EAF0"/>
-                </a:solidFill>
-                <a:latin typeface="Microsoft JhengHei"/>
-              </a:rPr>
-              <a:t>2. 從一個小流程開始</a:t>
-            </a:r>
-          </a:p>
-          <a:p>
-            <a:pPr algn="l">
-              <a:spcAft>
-                <a:spcPts val="0"/>
-              </a:spcAft>
-            </a:pPr>
-            <a:r>
-              <a:t/>
-            </a:r>
-            <a:r>
-              <a:rPr sz="1500" b="0">
-                <a:solidFill>
-                  <a:srgbClr val="9AA3B5"/>
-                </a:solidFill>
-                <a:latin typeface="Microsoft JhengHei"/>
-              </a:rPr>
-              <a:t>先做一張表單、一個報表，跑順「需求 → PR → 驗收」的循環再放大</a:t>
-            </a:r>
-          </a:p>
-        </p:txBody>
-      </p:sp>
-      <p:sp>
-        <p:nvSpPr>
-          <p:cNvPr id="5" name="Rounded Rectangle 4"/>
-          <p:cNvSpPr/>
-          <p:nvPr/>
-        </p:nvSpPr>
-        <p:spPr>
-          <a:xfrm>
-            <a:off x="731520" y="4206240"/>
-            <a:ext cx="10698480" cy="1143000"/>
-          </a:xfrm>
-          <a:prstGeom prst="roundRect">
-            <a:avLst/>
-          </a:prstGeom>
-          <a:solidFill>
-            <a:srgbClr val="1A1F2B"/>
-          </a:solidFill>
-          <a:ln w="12700">
-            <a:solidFill>
-              <a:srgbClr val="2A3245"/>
-            </a:solidFill>
-          </a:ln>
-          <a:effectLst/>
-        </p:spPr>
-        <p:style>
-          <a:lnRef idx="1">
-            <a:schemeClr val="accent1"/>
-          </a:lnRef>
-          <a:fillRef idx="3">
-            <a:schemeClr val="accent1"/>
-          </a:fillRef>
-          <a:effectRef idx="2">
-            <a:schemeClr val="accent1"/>
-          </a:effectRef>
-          <a:fontRef idx="minor">
-            <a:schemeClr val="lt1"/>
-          </a:fontRef>
-        </p:style>
-        <p:txBody>
-          <a:bodyPr rtlCol="0" anchor="ctr" wrap="square" lIns="164592" rIns="164592" tIns="109728" bIns="109728"/>
-          <a:lstStyle/>
-          <a:p>
-            <a:pPr algn="l">
-              <a:spcAft>
-                <a:spcPts val="400"/>
-              </a:spcAft>
-            </a:pPr>
-            <a:r>
-              <a:t/>
-            </a:r>
-            <a:r>
-              <a:rPr sz="1900" b="1">
-                <a:solidFill>
-                  <a:srgbClr val="E8EAF0"/>
-                </a:solidFill>
-                <a:latin typeface="Microsoft JhengHei"/>
-              </a:rPr>
-              <a:t>3. 經驗寫成文件餵回去</a:t>
-            </a:r>
-          </a:p>
-          <a:p>
-            <a:pPr algn="l">
-              <a:spcAft>
-                <a:spcPts val="0"/>
-              </a:spcAft>
-            </a:pPr>
-            <a:r>
-              <a:t/>
-            </a:r>
-            <a:r>
-              <a:rPr sz="1500" b="0">
-                <a:solidFill>
-                  <a:srgbClr val="9AA3B5"/>
-                </a:solidFill>
-                <a:latin typeface="Microsoft JhengHei"/>
-              </a:rPr>
-              <a:t>守則檔 + 交接文件，是讓 AI 從「臨時工」變「老員工」的關鍵</a:t>
-            </a:r>
-          </a:p>
-        </p:txBody>
-      </p:sp>
-      <p:sp>
-        <p:nvSpPr>
-          <p:cNvPr id="6" name="TextBox 5"/>
-          <p:cNvSpPr txBox="1"/>
-          <p:nvPr/>
-        </p:nvSpPr>
-        <p:spPr>
-          <a:xfrm>
-            <a:off x="731520" y="5715000"/>
-            <a:ext cx="10698480" cy="822960"/>
-          </a:xfrm>
-          <a:prstGeom prst="rect">
-            <a:avLst/>
-          </a:prstGeom>
-          <a:noFill/>
-        </p:spPr>
-        <p:txBody>
-          <a:bodyPr wrap="square">
-            <a:spAutoFit/>
-          </a:bodyPr>
-          <a:lstStyle/>
-          <a:p>
-            <a:pPr algn="l">
+          <a:bodyPr rtlCol="0" anchor="ctr" wrap="square" lIns="365760" rIns="365760"/>
+          <a:lstStyle/>
+          <a:p>
+            <a:pPr algn="ctr">
+              <a:spcAft>
+                <a:spcPts val="1200"/>
+              </a:spcAft>
+            </a:pPr>
+            <a:r>
+              <a:rPr sz="1200" b="1">
+                <a:solidFill>
+                  <a:srgbClr val="B4690E"/>
+                </a:solidFill>
+                <a:latin typeface="Microsoft JhengHei"/>
+              </a:rPr>
+              <a:t>影片待補 PLACEHOLDER</a:t>
+            </a:r>
+          </a:p>
+          <a:p>
+            <a:pPr algn="ctr">
+              <a:spcAft>
+                <a:spcPts val="1200"/>
+              </a:spcAft>
+            </a:pPr>
+            <a:r>
+              <a:rPr sz="2200" b="1">
+                <a:solidFill>
+                  <a:srgbClr val="5B6678"/>
+                </a:solidFill>
+                <a:latin typeface="Microsoft JhengHei"/>
+              </a:rPr>
+              <a:t>［ 互動演示影片放這裡 ］</a:t>
+            </a:r>
+          </a:p>
+          <a:p>
+            <a:pPr algn="ctr">
+              <a:lnSpc>
+                <a:spcPct val="140000"/>
+              </a:lnSpc>
               <a:spcAft>
                 <a:spcPts val="600"/>
               </a:spcAft>
             </a:pPr>
             <a:r>
-              <a:t/>
-            </a:r>
-            <a:r>
-              <a:rPr sz="1600" b="0">
-                <a:solidFill>
-                  <a:srgbClr val="9AA3B5"/>
-                </a:solidFill>
-                <a:latin typeface="Microsoft JhengHei"/>
-              </a:rPr>
-              <a:t>門檻不是會不會寫程式，是能不能把需求講清楚、願不願意認真驗收。</a:t>
+              <a:rPr sz="1400" b="0">
+                <a:solidFill>
+                  <a:srgbClr val="7B8597"/>
+                </a:solidFill>
+                <a:latin typeface="Microsoft JhengHei"/>
+              </a:rPr>
+              <a:t>一段真實對話：我用白話講需求，AI 釐清、寫程式、發 PR，我驗收 —
+把前面講的「閉環」實際跑一次給大家看。</a:t>
             </a:r>
           </a:p>
         </p:txBody>

--- a/docs/簡報-AI零程式碼開發ERP分享.pptx
+++ b/docs/簡報-AI零程式碼開發ERP分享.pptx
@@ -5388,8 +5388,8 @@
         </p:nvSpPr>
         <p:spPr>
           <a:xfrm>
-            <a:off x="731520" y="640080"/>
-            <a:ext cx="10698480" cy="822960"/>
+            <a:off x="731520" y="384048"/>
+            <a:ext cx="10698480" cy="777240"/>
           </a:xfrm>
           <a:prstGeom prst="rect">
             <a:avLst/>
@@ -5408,16 +5408,16 @@
               </a:spcAft>
             </a:pPr>
             <a:r>
-              <a:rPr sz="3000" b="1">
+              <a:rPr sz="2800" b="1">
                 <a:solidFill>
                   <a:srgbClr val="1B2330"/>
                 </a:solidFill>
                 <a:latin typeface="Microsoft JhengHei"/>
               </a:rPr>
-              <a:t>整套系統，是同一個</a:t>
-            </a:r>
-            <a:r>
-              <a:rPr sz="3000" b="1">
+              <a:t>整套系統，就是這個</a:t>
+            </a:r>
+            <a:r>
+              <a:rPr sz="2800" b="1">
                 <a:solidFill>
                   <a:srgbClr val="0B8F6E"/>
                 </a:solidFill>
@@ -5426,39 +5426,526 @@
               <a:t>閉環</a:t>
             </a:r>
             <a:r>
-              <a:rPr sz="3000" b="1">
+              <a:rPr sz="2800" b="1">
                 <a:solidFill>
                   <a:srgbClr val="1B2330"/>
                 </a:solidFill>
                 <a:latin typeface="Microsoft JhengHei"/>
               </a:rPr>
-              <a:t>跑了 438 次</a:t>
-            </a:r>
-          </a:p>
-        </p:txBody>
-      </p:sp>
-      <p:sp>
-        <p:nvSpPr>
-          <p:cNvPr id="4" name="Rounded Rectangle 3"/>
+              <a:t>週而復始</a:t>
+            </a:r>
+          </a:p>
+        </p:txBody>
+      </p:sp>
+      <p:sp>
+        <p:nvSpPr>
+          <p:cNvPr id="4" name="Oval 3"/>
           <p:cNvSpPr/>
           <p:nvPr/>
         </p:nvSpPr>
         <p:spPr>
           <a:xfrm>
-            <a:off x="731520" y="1737360"/>
-            <a:ext cx="2514600" cy="1965960"/>
+            <a:off x="4038904" y="1965960"/>
+            <a:ext cx="4114800" cy="4114800"/>
+          </a:xfrm>
+          <a:prstGeom prst="ellipse">
+            <a:avLst/>
+          </a:prstGeom>
+          <a:noFill/>
+          <a:ln w="114300">
+            <a:solidFill>
+              <a:srgbClr val="EEF1F6"/>
+            </a:solidFill>
+          </a:ln>
+          <a:effectLst/>
+        </p:spPr>
+        <p:style>
+          <a:lnRef idx="1">
+            <a:schemeClr val="accent1"/>
+          </a:lnRef>
+          <a:fillRef idx="3">
+            <a:schemeClr val="accent1"/>
+          </a:fillRef>
+          <a:effectRef idx="2">
+            <a:schemeClr val="accent1"/>
+          </a:effectRef>
+          <a:fontRef idx="minor">
+            <a:schemeClr val="lt1"/>
+          </a:fontRef>
+        </p:style>
+        <p:txBody>
+          <a:bodyPr rtlCol="0" anchor="ctr"/>
+          <a:lstStyle/>
+          <a:p>
+            <a:pPr algn="ctr"/>
+          </a:p>
+        </p:txBody>
+      </p:sp>
+      <p:sp>
+        <p:nvSpPr>
+          <p:cNvPr id="5" name="Isosceles Triangle 4"/>
+          <p:cNvSpPr/>
+          <p:nvPr/>
+        </p:nvSpPr>
+        <p:spPr>
+          <a:xfrm rot="6750000">
+            <a:off x="6728189" y="1985410"/>
+            <a:ext cx="310896" cy="274320"/>
+          </a:xfrm>
+          <a:prstGeom prst="triangle">
+            <a:avLst/>
+          </a:prstGeom>
+          <a:solidFill>
+            <a:srgbClr val="0B8F6E"/>
+          </a:solidFill>
+          <a:ln>
+            <a:noFill/>
+          </a:ln>
+          <a:effectLst/>
+        </p:spPr>
+        <p:style>
+          <a:lnRef idx="1">
+            <a:schemeClr val="accent1"/>
+          </a:lnRef>
+          <a:fillRef idx="3">
+            <a:schemeClr val="accent1"/>
+          </a:fillRef>
+          <a:effectRef idx="2">
+            <a:schemeClr val="accent1"/>
+          </a:effectRef>
+          <a:fontRef idx="minor">
+            <a:schemeClr val="lt1"/>
+          </a:fontRef>
+        </p:style>
+        <p:txBody>
+          <a:bodyPr rtlCol="0" anchor="ctr"/>
+          <a:lstStyle/>
+          <a:p>
+            <a:pPr algn="ctr"/>
+          </a:p>
+        </p:txBody>
+      </p:sp>
+      <p:sp>
+        <p:nvSpPr>
+          <p:cNvPr id="6" name="Isosceles Triangle 5"/>
+          <p:cNvSpPr/>
+          <p:nvPr/>
+        </p:nvSpPr>
+        <p:spPr>
+          <a:xfrm rot="9450000">
+            <a:off x="7841646" y="3098867"/>
+            <a:ext cx="310896" cy="274320"/>
+          </a:xfrm>
+          <a:prstGeom prst="triangle">
+            <a:avLst/>
+          </a:prstGeom>
+          <a:solidFill>
+            <a:srgbClr val="0B8F6E"/>
+          </a:solidFill>
+          <a:ln>
+            <a:noFill/>
+          </a:ln>
+          <a:effectLst/>
+        </p:spPr>
+        <p:style>
+          <a:lnRef idx="1">
+            <a:schemeClr val="accent1"/>
+          </a:lnRef>
+          <a:fillRef idx="3">
+            <a:schemeClr val="accent1"/>
+          </a:fillRef>
+          <a:effectRef idx="2">
+            <a:schemeClr val="accent1"/>
+          </a:effectRef>
+          <a:fontRef idx="minor">
+            <a:schemeClr val="lt1"/>
+          </a:fontRef>
+        </p:style>
+        <p:txBody>
+          <a:bodyPr rtlCol="0" anchor="ctr"/>
+          <a:lstStyle/>
+          <a:p>
+            <a:pPr algn="ctr"/>
+          </a:p>
+        </p:txBody>
+      </p:sp>
+      <p:sp>
+        <p:nvSpPr>
+          <p:cNvPr id="7" name="Isosceles Triangle 6"/>
+          <p:cNvSpPr/>
+          <p:nvPr/>
+        </p:nvSpPr>
+        <p:spPr>
+          <a:xfrm rot="12150000">
+            <a:off x="7841646" y="4673532"/>
+            <a:ext cx="310896" cy="274320"/>
+          </a:xfrm>
+          <a:prstGeom prst="triangle">
+            <a:avLst/>
+          </a:prstGeom>
+          <a:solidFill>
+            <a:srgbClr val="0B8F6E"/>
+          </a:solidFill>
+          <a:ln>
+            <a:noFill/>
+          </a:ln>
+          <a:effectLst/>
+        </p:spPr>
+        <p:style>
+          <a:lnRef idx="1">
+            <a:schemeClr val="accent1"/>
+          </a:lnRef>
+          <a:fillRef idx="3">
+            <a:schemeClr val="accent1"/>
+          </a:fillRef>
+          <a:effectRef idx="2">
+            <a:schemeClr val="accent1"/>
+          </a:effectRef>
+          <a:fontRef idx="minor">
+            <a:schemeClr val="lt1"/>
+          </a:fontRef>
+        </p:style>
+        <p:txBody>
+          <a:bodyPr rtlCol="0" anchor="ctr"/>
+          <a:lstStyle/>
+          <a:p>
+            <a:pPr algn="ctr"/>
+          </a:p>
+        </p:txBody>
+      </p:sp>
+      <p:sp>
+        <p:nvSpPr>
+          <p:cNvPr id="8" name="Isosceles Triangle 7"/>
+          <p:cNvSpPr/>
+          <p:nvPr/>
+        </p:nvSpPr>
+        <p:spPr>
+          <a:xfrm rot="14850000">
+            <a:off x="6728189" y="5786989"/>
+            <a:ext cx="310896" cy="274320"/>
+          </a:xfrm>
+          <a:prstGeom prst="triangle">
+            <a:avLst/>
+          </a:prstGeom>
+          <a:solidFill>
+            <a:srgbClr val="0B8F6E"/>
+          </a:solidFill>
+          <a:ln>
+            <a:noFill/>
+          </a:ln>
+          <a:effectLst/>
+        </p:spPr>
+        <p:style>
+          <a:lnRef idx="1">
+            <a:schemeClr val="accent1"/>
+          </a:lnRef>
+          <a:fillRef idx="3">
+            <a:schemeClr val="accent1"/>
+          </a:fillRef>
+          <a:effectRef idx="2">
+            <a:schemeClr val="accent1"/>
+          </a:effectRef>
+          <a:fontRef idx="minor">
+            <a:schemeClr val="lt1"/>
+          </a:fontRef>
+        </p:style>
+        <p:txBody>
+          <a:bodyPr rtlCol="0" anchor="ctr"/>
+          <a:lstStyle/>
+          <a:p>
+            <a:pPr algn="ctr"/>
+          </a:p>
+        </p:txBody>
+      </p:sp>
+      <p:sp>
+        <p:nvSpPr>
+          <p:cNvPr id="9" name="Isosceles Triangle 8"/>
+          <p:cNvSpPr/>
+          <p:nvPr/>
+        </p:nvSpPr>
+        <p:spPr>
+          <a:xfrm rot="17550000">
+            <a:off x="5153523" y="5786989"/>
+            <a:ext cx="310896" cy="274320"/>
+          </a:xfrm>
+          <a:prstGeom prst="triangle">
+            <a:avLst/>
+          </a:prstGeom>
+          <a:solidFill>
+            <a:srgbClr val="0B8F6E"/>
+          </a:solidFill>
+          <a:ln>
+            <a:noFill/>
+          </a:ln>
+          <a:effectLst/>
+        </p:spPr>
+        <p:style>
+          <a:lnRef idx="1">
+            <a:schemeClr val="accent1"/>
+          </a:lnRef>
+          <a:fillRef idx="3">
+            <a:schemeClr val="accent1"/>
+          </a:fillRef>
+          <a:effectRef idx="2">
+            <a:schemeClr val="accent1"/>
+          </a:effectRef>
+          <a:fontRef idx="minor">
+            <a:schemeClr val="lt1"/>
+          </a:fontRef>
+        </p:style>
+        <p:txBody>
+          <a:bodyPr rtlCol="0" anchor="ctr"/>
+          <a:lstStyle/>
+          <a:p>
+            <a:pPr algn="ctr"/>
+          </a:p>
+        </p:txBody>
+      </p:sp>
+      <p:sp>
+        <p:nvSpPr>
+          <p:cNvPr id="10" name="Isosceles Triangle 9"/>
+          <p:cNvSpPr/>
+          <p:nvPr/>
+        </p:nvSpPr>
+        <p:spPr>
+          <a:xfrm rot="20250000">
+            <a:off x="4040067" y="4673532"/>
+            <a:ext cx="310896" cy="274320"/>
+          </a:xfrm>
+          <a:prstGeom prst="triangle">
+            <a:avLst/>
+          </a:prstGeom>
+          <a:solidFill>
+            <a:srgbClr val="0B8F6E"/>
+          </a:solidFill>
+          <a:ln>
+            <a:noFill/>
+          </a:ln>
+          <a:effectLst/>
+        </p:spPr>
+        <p:style>
+          <a:lnRef idx="1">
+            <a:schemeClr val="accent1"/>
+          </a:lnRef>
+          <a:fillRef idx="3">
+            <a:schemeClr val="accent1"/>
+          </a:fillRef>
+          <a:effectRef idx="2">
+            <a:schemeClr val="accent1"/>
+          </a:effectRef>
+          <a:fontRef idx="minor">
+            <a:schemeClr val="lt1"/>
+          </a:fontRef>
+        </p:style>
+        <p:txBody>
+          <a:bodyPr rtlCol="0" anchor="ctr"/>
+          <a:lstStyle/>
+          <a:p>
+            <a:pPr algn="ctr"/>
+          </a:p>
+        </p:txBody>
+      </p:sp>
+      <p:sp>
+        <p:nvSpPr>
+          <p:cNvPr id="11" name="Isosceles Triangle 10"/>
+          <p:cNvSpPr/>
+          <p:nvPr/>
+        </p:nvSpPr>
+        <p:spPr>
+          <a:xfrm rot="1350000">
+            <a:off x="4040067" y="3098867"/>
+            <a:ext cx="310896" cy="274320"/>
+          </a:xfrm>
+          <a:prstGeom prst="triangle">
+            <a:avLst/>
+          </a:prstGeom>
+          <a:solidFill>
+            <a:srgbClr val="0B8F6E"/>
+          </a:solidFill>
+          <a:ln>
+            <a:noFill/>
+          </a:ln>
+          <a:effectLst/>
+        </p:spPr>
+        <p:style>
+          <a:lnRef idx="1">
+            <a:schemeClr val="accent1"/>
+          </a:lnRef>
+          <a:fillRef idx="3">
+            <a:schemeClr val="accent1"/>
+          </a:fillRef>
+          <a:effectRef idx="2">
+            <a:schemeClr val="accent1"/>
+          </a:effectRef>
+          <a:fontRef idx="minor">
+            <a:schemeClr val="lt1"/>
+          </a:fontRef>
+        </p:style>
+        <p:txBody>
+          <a:bodyPr rtlCol="0" anchor="ctr"/>
+          <a:lstStyle/>
+          <a:p>
+            <a:pPr algn="ctr"/>
+          </a:p>
+        </p:txBody>
+      </p:sp>
+      <p:sp>
+        <p:nvSpPr>
+          <p:cNvPr id="12" name="Isosceles Triangle 11"/>
+          <p:cNvSpPr/>
+          <p:nvPr/>
+        </p:nvSpPr>
+        <p:spPr>
+          <a:xfrm rot="4050000">
+            <a:off x="5153523" y="1985410"/>
+            <a:ext cx="310896" cy="274320"/>
+          </a:xfrm>
+          <a:prstGeom prst="triangle">
+            <a:avLst/>
+          </a:prstGeom>
+          <a:solidFill>
+            <a:srgbClr val="B4690E"/>
+          </a:solidFill>
+          <a:ln>
+            <a:noFill/>
+          </a:ln>
+          <a:effectLst/>
+        </p:spPr>
+        <p:style>
+          <a:lnRef idx="1">
+            <a:schemeClr val="accent1"/>
+          </a:lnRef>
+          <a:fillRef idx="3">
+            <a:schemeClr val="accent1"/>
+          </a:fillRef>
+          <a:effectRef idx="2">
+            <a:schemeClr val="accent1"/>
+          </a:effectRef>
+          <a:fontRef idx="minor">
+            <a:schemeClr val="lt1"/>
+          </a:fontRef>
+        </p:style>
+        <p:txBody>
+          <a:bodyPr rtlCol="0" anchor="ctr"/>
+          <a:lstStyle/>
+          <a:p>
+            <a:pPr algn="ctr"/>
+          </a:p>
+        </p:txBody>
+      </p:sp>
+      <p:sp>
+        <p:nvSpPr>
+          <p:cNvPr id="13" name="Oval 12"/>
+          <p:cNvSpPr/>
+          <p:nvPr/>
+        </p:nvSpPr>
+        <p:spPr>
+          <a:xfrm>
+            <a:off x="5273344" y="3200400"/>
+            <a:ext cx="1645920" cy="1645920"/>
+          </a:xfrm>
+          <a:prstGeom prst="ellipse">
+            <a:avLst/>
+          </a:prstGeom>
+          <a:solidFill>
+            <a:srgbClr val="E3F4EE"/>
+          </a:solidFill>
+          <a:ln w="19050">
+            <a:solidFill>
+              <a:srgbClr val="0B8F6E"/>
+            </a:solidFill>
+          </a:ln>
+          <a:effectLst/>
+        </p:spPr>
+        <p:style>
+          <a:lnRef idx="1">
+            <a:schemeClr val="accent1"/>
+          </a:lnRef>
+          <a:fillRef idx="3">
+            <a:schemeClr val="accent1"/>
+          </a:fillRef>
+          <a:effectRef idx="2">
+            <a:schemeClr val="accent1"/>
+          </a:effectRef>
+          <a:fontRef idx="minor">
+            <a:schemeClr val="lt1"/>
+          </a:fontRef>
+        </p:style>
+        <p:txBody>
+          <a:bodyPr rtlCol="0" anchor="ctr"/>
+          <a:lstStyle/>
+          <a:p>
+            <a:pPr algn="ctr">
+              <a:spcAft>
+                <a:spcPts val="200"/>
+              </a:spcAft>
+            </a:pPr>
+            <a:r>
+              <a:rPr sz="2200" b="1">
+                <a:solidFill>
+                  <a:srgbClr val="0B8F6E"/>
+                </a:solidFill>
+                <a:latin typeface="Microsoft JhengHei"/>
+              </a:rPr>
+              <a:t>閉環</a:t>
+            </a:r>
+          </a:p>
+          <a:p>
+            <a:pPr algn="ctr">
+              <a:spcAft>
+                <a:spcPts val="200"/>
+              </a:spcAft>
+            </a:pPr>
+            <a:r>
+              <a:rPr sz="900" b="1">
+                <a:solidFill>
+                  <a:srgbClr val="7B8597"/>
+                </a:solidFill>
+                <a:latin typeface="Microsoft JhengHei"/>
+              </a:rPr>
+              <a:t>CLOSED LOOP</a:t>
+            </a:r>
+          </a:p>
+          <a:p>
+            <a:pPr algn="ctr">
+              <a:spcAft>
+                <a:spcPts val="600"/>
+              </a:spcAft>
+            </a:pPr>
+            <a:r>
+              <a:rPr sz="1100" b="0">
+                <a:solidFill>
+                  <a:srgbClr val="5B6678"/>
+                </a:solidFill>
+                <a:latin typeface="Microsoft JhengHei"/>
+              </a:rPr>
+              <a:t>迭代 438 次</a:t>
+            </a:r>
+          </a:p>
+        </p:txBody>
+      </p:sp>
+      <p:sp>
+        <p:nvSpPr>
+          <p:cNvPr id="14" name="Rounded Rectangle 13"/>
+          <p:cNvSpPr/>
+          <p:nvPr/>
+        </p:nvSpPr>
+        <p:spPr>
+          <a:xfrm>
+            <a:off x="5309920" y="1545336"/>
+            <a:ext cx="1572768" cy="841248"/>
           </a:xfrm>
           <a:prstGeom prst="roundRect">
             <a:avLst>
-              <a:gd name="adj" fmla="val 6000"/>
+              <a:gd name="adj" fmla="val 30000"/>
             </a:avLst>
           </a:prstGeom>
           <a:solidFill>
             <a:srgbClr val="FFFFFF"/>
           </a:solidFill>
-          <a:ln w="12700">
+          <a:ln w="19050">
             <a:solidFill>
-              <a:srgbClr val="DDE2EA"/>
+              <a:srgbClr val="0B8F6E"/>
             </a:solidFill>
           </a:ln>
           <a:effectLst/>
@@ -5478,141 +5965,64 @@
           </a:fontRef>
         </p:style>
         <p:txBody>
-          <a:bodyPr rtlCol="0" anchor="ctr" wrap="square" lIns="182880" rIns="182880" tIns="128016" bIns="128016"/>
+          <a:bodyPr rtlCol="0" anchor="ctr" wrap="square"/>
           <a:lstStyle/>
           <a:p>
             <a:pPr algn="ctr">
               <a:spcAft>
-                <a:spcPts val="400"/>
-              </a:spcAft>
-            </a:pPr>
-            <a:r>
-              <a:rPr sz="1100" b="1">
+                <a:spcPts val="100"/>
+              </a:spcAft>
+            </a:pPr>
+            <a:r>
+              <a:rPr sz="1000" b="1">
                 <a:solidFill>
                   <a:srgbClr val="0B8F6E"/>
                 </a:solidFill>
                 <a:latin typeface="Microsoft JhengHei"/>
               </a:rPr>
-              <a:t>STEP 1</a:t>
+              <a:t>1</a:t>
             </a:r>
           </a:p>
           <a:p>
             <a:pPr algn="ctr">
               <a:spcAft>
-                <a:spcPts val="600"/>
-              </a:spcAft>
-            </a:pPr>
-            <a:r>
-              <a:rPr sz="1700" b="1">
+                <a:spcPts val="0"/>
+              </a:spcAft>
+            </a:pPr>
+            <a:r>
+              <a:rPr sz="1400" b="1">
                 <a:solidFill>
                   <a:srgbClr val="1B2330"/>
                 </a:solidFill>
                 <a:latin typeface="Microsoft JhengHei"/>
               </a:rPr>
-              <a:t>我講需求</a:t>
-            </a:r>
-          </a:p>
-          <a:p>
-            <a:pPr algn="ctr">
-              <a:lnSpc>
-                <a:spcPct val="120000"/>
-              </a:lnSpc>
-              <a:spcAft>
-                <a:spcPts val="0"/>
-              </a:spcAft>
-            </a:pPr>
-            <a:r>
-              <a:rPr sz="1200" b="0">
-                <a:solidFill>
-                  <a:srgbClr val="5B6678"/>
-                </a:solidFill>
-                <a:latin typeface="Microsoft JhengHei"/>
-              </a:rPr>
-              <a:t>用白話說想要什麼、</a:t>
-            </a:r>
-          </a:p>
-          <a:p>
-            <a:pPr algn="ctr">
-              <a:lnSpc>
-                <a:spcPct val="120000"/>
-              </a:lnSpc>
-              <a:spcAft>
-                <a:spcPts val="0"/>
-              </a:spcAft>
-            </a:pPr>
-            <a:r>
-              <a:rPr sz="1200" b="0">
-                <a:solidFill>
-                  <a:srgbClr val="5B6678"/>
-                </a:solidFill>
-                <a:latin typeface="Microsoft JhengHei"/>
-              </a:rPr>
-              <a:t>現在哪裡不順</a:t>
-            </a:r>
-          </a:p>
-        </p:txBody>
-      </p:sp>
-      <p:sp>
-        <p:nvSpPr>
-          <p:cNvPr id="5" name="TextBox 4"/>
-          <p:cNvSpPr txBox="1"/>
-          <p:nvPr/>
-        </p:nvSpPr>
-        <p:spPr>
-          <a:xfrm>
-            <a:off x="3264408" y="2423160"/>
-            <a:ext cx="301752" cy="548640"/>
-          </a:xfrm>
-          <a:prstGeom prst="rect">
-            <a:avLst/>
-          </a:prstGeom>
-          <a:noFill/>
-        </p:spPr>
-        <p:txBody>
-          <a:bodyPr wrap="square">
-            <a:spAutoFit/>
-          </a:bodyPr>
-          <a:lstStyle/>
-          <a:p>
-            <a:pPr algn="ctr">
-              <a:spcAft>
-                <a:spcPts val="600"/>
-              </a:spcAft>
-            </a:pPr>
-            <a:r>
-              <a:rPr sz="2200" b="1">
-                <a:solidFill>
-                  <a:srgbClr val="0B8F6E"/>
-                </a:solidFill>
-                <a:latin typeface="Microsoft JhengHei"/>
-              </a:rPr>
-              <a:t>→</a:t>
-            </a:r>
-          </a:p>
-        </p:txBody>
-      </p:sp>
-      <p:sp>
-        <p:nvSpPr>
-          <p:cNvPr id="6" name="Rounded Rectangle 5"/>
+              <a:t>需求</a:t>
+            </a:r>
+          </a:p>
+        </p:txBody>
+      </p:sp>
+      <p:sp>
+        <p:nvSpPr>
+          <p:cNvPr id="15" name="Rounded Rectangle 14"/>
           <p:cNvSpPr/>
           <p:nvPr/>
         </p:nvSpPr>
         <p:spPr>
           <a:xfrm>
-            <a:off x="3566160" y="1737360"/>
-            <a:ext cx="2514600" cy="1965960"/>
+            <a:off x="6764722" y="2147934"/>
+            <a:ext cx="1572768" cy="841248"/>
           </a:xfrm>
           <a:prstGeom prst="roundRect">
             <a:avLst>
-              <a:gd name="adj" fmla="val 6000"/>
+              <a:gd name="adj" fmla="val 30000"/>
             </a:avLst>
           </a:prstGeom>
           <a:solidFill>
             <a:srgbClr val="FFFFFF"/>
           </a:solidFill>
-          <a:ln w="12700">
+          <a:ln w="19050">
             <a:solidFill>
-              <a:srgbClr val="DDE2EA"/>
+              <a:srgbClr val="0B8F6E"/>
             </a:solidFill>
           </a:ln>
           <a:effectLst/>
@@ -5632,141 +6042,64 @@
           </a:fontRef>
         </p:style>
         <p:txBody>
-          <a:bodyPr rtlCol="0" anchor="ctr" wrap="square" lIns="182880" rIns="182880" tIns="128016" bIns="128016"/>
+          <a:bodyPr rtlCol="0" anchor="ctr" wrap="square"/>
           <a:lstStyle/>
           <a:p>
             <a:pPr algn="ctr">
               <a:spcAft>
-                <a:spcPts val="400"/>
-              </a:spcAft>
-            </a:pPr>
-            <a:r>
-              <a:rPr sz="1100" b="1">
+                <a:spcPts val="100"/>
+              </a:spcAft>
+            </a:pPr>
+            <a:r>
+              <a:rPr sz="1000" b="1">
                 <a:solidFill>
                   <a:srgbClr val="0B8F6E"/>
                 </a:solidFill>
                 <a:latin typeface="Microsoft JhengHei"/>
               </a:rPr>
-              <a:t>STEP 2</a:t>
+              <a:t>2</a:t>
             </a:r>
           </a:p>
           <a:p>
             <a:pPr algn="ctr">
               <a:spcAft>
-                <a:spcPts val="600"/>
-              </a:spcAft>
-            </a:pPr>
-            <a:r>
-              <a:rPr sz="1700" b="1">
+                <a:spcPts val="0"/>
+              </a:spcAft>
+            </a:pPr>
+            <a:r>
+              <a:rPr sz="1400" b="1">
                 <a:solidFill>
                   <a:srgbClr val="1B2330"/>
                 </a:solidFill>
                 <a:latin typeface="Microsoft JhengHei"/>
               </a:rPr>
-              <a:t>AI 反問釐清</a:t>
-            </a:r>
-          </a:p>
-          <a:p>
-            <a:pPr algn="ctr">
-              <a:lnSpc>
-                <a:spcPct val="120000"/>
-              </a:lnSpc>
-              <a:spcAft>
-                <a:spcPts val="0"/>
-              </a:spcAft>
-            </a:pPr>
-            <a:r>
-              <a:rPr sz="1200" b="0">
-                <a:solidFill>
-                  <a:srgbClr val="5B6678"/>
-                </a:solidFill>
-                <a:latin typeface="Microsoft JhengHei"/>
-              </a:rPr>
-              <a:t>邊界條件、例外狀況</a:t>
-            </a:r>
-          </a:p>
-          <a:p>
-            <a:pPr algn="ctr">
-              <a:lnSpc>
-                <a:spcPct val="120000"/>
-              </a:lnSpc>
-              <a:spcAft>
-                <a:spcPts val="0"/>
-              </a:spcAft>
-            </a:pPr>
-            <a:r>
-              <a:rPr sz="1200" b="0">
-                <a:solidFill>
-                  <a:srgbClr val="5B6678"/>
-                </a:solidFill>
-                <a:latin typeface="Microsoft JhengHei"/>
-              </a:rPr>
-              <a:t>先講清楚</a:t>
-            </a:r>
-          </a:p>
-        </p:txBody>
-      </p:sp>
-      <p:sp>
-        <p:nvSpPr>
-          <p:cNvPr id="7" name="TextBox 6"/>
-          <p:cNvSpPr txBox="1"/>
-          <p:nvPr/>
-        </p:nvSpPr>
-        <p:spPr>
-          <a:xfrm>
-            <a:off x="6099048" y="2423160"/>
-            <a:ext cx="301752" cy="548640"/>
-          </a:xfrm>
-          <a:prstGeom prst="rect">
-            <a:avLst/>
-          </a:prstGeom>
-          <a:noFill/>
-        </p:spPr>
-        <p:txBody>
-          <a:bodyPr wrap="square">
-            <a:spAutoFit/>
-          </a:bodyPr>
-          <a:lstStyle/>
-          <a:p>
-            <a:pPr algn="ctr">
-              <a:spcAft>
-                <a:spcPts val="600"/>
-              </a:spcAft>
-            </a:pPr>
-            <a:r>
-              <a:rPr sz="2200" b="1">
-                <a:solidFill>
-                  <a:srgbClr val="0B8F6E"/>
-                </a:solidFill>
-                <a:latin typeface="Microsoft JhengHei"/>
-              </a:rPr>
-              <a:t>→</a:t>
-            </a:r>
-          </a:p>
-        </p:txBody>
-      </p:sp>
-      <p:sp>
-        <p:nvSpPr>
-          <p:cNvPr id="8" name="Rounded Rectangle 7"/>
+              <a:t>寫文件</a:t>
+            </a:r>
+          </a:p>
+        </p:txBody>
+      </p:sp>
+      <p:sp>
+        <p:nvSpPr>
+          <p:cNvPr id="16" name="Rounded Rectangle 15"/>
           <p:cNvSpPr/>
           <p:nvPr/>
         </p:nvSpPr>
         <p:spPr>
           <a:xfrm>
-            <a:off x="6400800" y="1737360"/>
-            <a:ext cx="2514600" cy="1965960"/>
+            <a:off x="7367320" y="3602736"/>
+            <a:ext cx="1572768" cy="841248"/>
           </a:xfrm>
           <a:prstGeom prst="roundRect">
             <a:avLst>
-              <a:gd name="adj" fmla="val 6000"/>
+              <a:gd name="adj" fmla="val 30000"/>
             </a:avLst>
           </a:prstGeom>
           <a:solidFill>
             <a:srgbClr val="FFFFFF"/>
           </a:solidFill>
-          <a:ln w="12700">
+          <a:ln w="19050">
             <a:solidFill>
-              <a:srgbClr val="DDE2EA"/>
+              <a:srgbClr val="0B8F6E"/>
             </a:solidFill>
           </a:ln>
           <a:effectLst/>
@@ -5786,141 +6119,64 @@
           </a:fontRef>
         </p:style>
         <p:txBody>
-          <a:bodyPr rtlCol="0" anchor="ctr" wrap="square" lIns="182880" rIns="182880" tIns="128016" bIns="128016"/>
+          <a:bodyPr rtlCol="0" anchor="ctr" wrap="square"/>
           <a:lstStyle/>
           <a:p>
             <a:pPr algn="ctr">
               <a:spcAft>
-                <a:spcPts val="400"/>
-              </a:spcAft>
-            </a:pPr>
-            <a:r>
-              <a:rPr sz="1100" b="1">
+                <a:spcPts val="100"/>
+              </a:spcAft>
+            </a:pPr>
+            <a:r>
+              <a:rPr sz="1000" b="1">
                 <a:solidFill>
                   <a:srgbClr val="0B8F6E"/>
                 </a:solidFill>
                 <a:latin typeface="Microsoft JhengHei"/>
               </a:rPr>
-              <a:t>STEP 3</a:t>
+              <a:t>3</a:t>
             </a:r>
           </a:p>
           <a:p>
             <a:pPr algn="ctr">
               <a:spcAft>
-                <a:spcPts val="600"/>
-              </a:spcAft>
-            </a:pPr>
-            <a:r>
-              <a:rPr sz="1700" b="1">
+                <a:spcPts val="0"/>
+              </a:spcAft>
+            </a:pPr>
+            <a:r>
+              <a:rPr sz="1400" b="1">
                 <a:solidFill>
                   <a:srgbClr val="1B2330"/>
                 </a:solidFill>
                 <a:latin typeface="Microsoft JhengHei"/>
               </a:rPr>
-              <a:t>AI 寫好發 PR</a:t>
-            </a:r>
-          </a:p>
-          <a:p>
-            <a:pPr algn="ctr">
-              <a:lnSpc>
-                <a:spcPct val="120000"/>
-              </a:lnSpc>
-              <a:spcAft>
-                <a:spcPts val="0"/>
-              </a:spcAft>
-            </a:pPr>
-            <a:r>
-              <a:rPr sz="1200" b="0">
-                <a:solidFill>
-                  <a:srgbClr val="5B6678"/>
-                </a:solidFill>
-                <a:latin typeface="Microsoft JhengHei"/>
-              </a:rPr>
-              <a:t>程式碼 + DB 變更 + 說明，</a:t>
-            </a:r>
-          </a:p>
-          <a:p>
-            <a:pPr algn="ctr">
-              <a:lnSpc>
-                <a:spcPct val="120000"/>
-              </a:lnSpc>
-              <a:spcAft>
-                <a:spcPts val="0"/>
-              </a:spcAft>
-            </a:pPr>
-            <a:r>
-              <a:rPr sz="1200" b="0">
-                <a:solidFill>
-                  <a:srgbClr val="5B6678"/>
-                </a:solidFill>
-                <a:latin typeface="Microsoft JhengHei"/>
-              </a:rPr>
-              <a:t>一包送上</a:t>
-            </a:r>
-          </a:p>
-        </p:txBody>
-      </p:sp>
-      <p:sp>
-        <p:nvSpPr>
-          <p:cNvPr id="9" name="TextBox 8"/>
-          <p:cNvSpPr txBox="1"/>
-          <p:nvPr/>
-        </p:nvSpPr>
-        <p:spPr>
-          <a:xfrm>
-            <a:off x="8933688" y="2423160"/>
-            <a:ext cx="301752" cy="548640"/>
-          </a:xfrm>
-          <a:prstGeom prst="rect">
-            <a:avLst/>
-          </a:prstGeom>
-          <a:noFill/>
-        </p:spPr>
-        <p:txBody>
-          <a:bodyPr wrap="square">
-            <a:spAutoFit/>
-          </a:bodyPr>
-          <a:lstStyle/>
-          <a:p>
-            <a:pPr algn="ctr">
-              <a:spcAft>
-                <a:spcPts val="600"/>
-              </a:spcAft>
-            </a:pPr>
-            <a:r>
-              <a:rPr sz="2200" b="1">
-                <a:solidFill>
-                  <a:srgbClr val="0B8F6E"/>
-                </a:solidFill>
-                <a:latin typeface="Microsoft JhengHei"/>
-              </a:rPr>
-              <a:t>→</a:t>
-            </a:r>
-          </a:p>
-        </p:txBody>
-      </p:sp>
-      <p:sp>
-        <p:nvSpPr>
-          <p:cNvPr id="10" name="Rounded Rectangle 9"/>
+              <a:t>開 Task</a:t>
+            </a:r>
+          </a:p>
+        </p:txBody>
+      </p:sp>
+      <p:sp>
+        <p:nvSpPr>
+          <p:cNvPr id="17" name="Rounded Rectangle 16"/>
           <p:cNvSpPr/>
           <p:nvPr/>
         </p:nvSpPr>
         <p:spPr>
           <a:xfrm>
-            <a:off x="9235440" y="1737360"/>
-            <a:ext cx="2514600" cy="1965960"/>
+            <a:off x="6764722" y="5057537"/>
+            <a:ext cx="1572768" cy="841248"/>
           </a:xfrm>
           <a:prstGeom prst="roundRect">
             <a:avLst>
-              <a:gd name="adj" fmla="val 6000"/>
+              <a:gd name="adj" fmla="val 30000"/>
             </a:avLst>
           </a:prstGeom>
           <a:solidFill>
             <a:srgbClr val="FFFFFF"/>
           </a:solidFill>
-          <a:ln w="12700">
+          <a:ln w="19050">
             <a:solidFill>
-              <a:srgbClr val="DDE2EA"/>
+              <a:srgbClr val="0B8F6E"/>
             </a:solidFill>
           </a:ln>
           <a:effectLst/>
@@ -5940,102 +6196,64 @@
           </a:fontRef>
         </p:style>
         <p:txBody>
-          <a:bodyPr rtlCol="0" anchor="ctr" wrap="square" lIns="182880" rIns="182880" tIns="128016" bIns="128016"/>
+          <a:bodyPr rtlCol="0" anchor="ctr" wrap="square"/>
           <a:lstStyle/>
           <a:p>
             <a:pPr algn="ctr">
               <a:spcAft>
-                <a:spcPts val="400"/>
-              </a:spcAft>
-            </a:pPr>
-            <a:r>
-              <a:rPr sz="1100" b="1">
+                <a:spcPts val="100"/>
+              </a:spcAft>
+            </a:pPr>
+            <a:r>
+              <a:rPr sz="1000" b="1">
                 <a:solidFill>
                   <a:srgbClr val="0B8F6E"/>
                 </a:solidFill>
                 <a:latin typeface="Microsoft JhengHei"/>
               </a:rPr>
-              <a:t>STEP 4</a:t>
+              <a:t>4</a:t>
             </a:r>
           </a:p>
           <a:p>
             <a:pPr algn="ctr">
               <a:spcAft>
-                <a:spcPts val="600"/>
-              </a:spcAft>
-            </a:pPr>
-            <a:r>
-              <a:rPr sz="1700" b="1">
+                <a:spcPts val="0"/>
+              </a:spcAft>
+            </a:pPr>
+            <a:r>
+              <a:rPr sz="1400" b="1">
                 <a:solidFill>
                   <a:srgbClr val="1B2330"/>
                 </a:solidFill>
                 <a:latin typeface="Microsoft JhengHei"/>
               </a:rPr>
-              <a:t>我驗收</a:t>
-            </a:r>
-          </a:p>
-          <a:p>
-            <a:pPr algn="ctr">
-              <a:lnSpc>
-                <a:spcPct val="120000"/>
-              </a:lnSpc>
-              <a:spcAft>
-                <a:spcPts val="0"/>
-              </a:spcAft>
-            </a:pPr>
-            <a:r>
-              <a:rPr sz="1200" b="0">
-                <a:solidFill>
-                  <a:srgbClr val="5B6678"/>
-                </a:solidFill>
-                <a:latin typeface="Microsoft JhengHei"/>
-              </a:rPr>
-              <a:t>實際操作系統，</a:t>
-            </a:r>
-          </a:p>
-          <a:p>
-            <a:pPr algn="ctr">
-              <a:lnSpc>
-                <a:spcPct val="120000"/>
-              </a:lnSpc>
-              <a:spcAft>
-                <a:spcPts val="0"/>
-              </a:spcAft>
-            </a:pPr>
-            <a:r>
-              <a:rPr sz="1200" b="0">
-                <a:solidFill>
-                  <a:srgbClr val="5B6678"/>
-                </a:solidFill>
-                <a:latin typeface="Microsoft JhengHei"/>
-              </a:rPr>
-              <a:t>OK 就合併上線</a:t>
-            </a:r>
-          </a:p>
-        </p:txBody>
-      </p:sp>
-      <p:sp>
-        <p:nvSpPr>
-          <p:cNvPr id="11" name="Rounded Rectangle 10"/>
+              <a:t>寫測試項目</a:t>
+            </a:r>
+          </a:p>
+        </p:txBody>
+      </p:sp>
+      <p:sp>
+        <p:nvSpPr>
+          <p:cNvPr id="18" name="Rounded Rectangle 17"/>
           <p:cNvSpPr/>
           <p:nvPr/>
         </p:nvSpPr>
         <p:spPr>
           <a:xfrm>
-            <a:off x="731520" y="4023360"/>
-            <a:ext cx="10698480" cy="868680"/>
+            <a:off x="5309920" y="5660136"/>
+            <a:ext cx="1572768" cy="841248"/>
           </a:xfrm>
           <a:prstGeom prst="roundRect">
             <a:avLst>
-              <a:gd name="adj" fmla="val 6000"/>
+              <a:gd name="adj" fmla="val 30000"/>
             </a:avLst>
           </a:prstGeom>
           <a:solidFill>
-            <a:srgbClr val="E3F4EE"/>
+            <a:srgbClr val="FFFFFF"/>
           </a:solidFill>
-          <a:ln w="12700">
+          <a:ln w="19050">
             <a:solidFill>
-              <a:srgbClr val="C7E8DC"/>
+              <a:srgbClr val="0B8F6E"/>
             </a:solidFill>
           </a:ln>
           <a:effectLst/>
@@ -6055,39 +6273,283 @@
           </a:fontRef>
         </p:style>
         <p:txBody>
-          <a:bodyPr rtlCol="0" anchor="ctr" wrap="square" lIns="182880" rIns="182880" tIns="128016" bIns="128016"/>
+          <a:bodyPr rtlCol="0" anchor="ctr" wrap="square"/>
           <a:lstStyle/>
           <a:p>
             <a:pPr algn="ctr">
-              <a:lnSpc>
-                <a:spcPct val="130000"/>
-              </a:lnSpc>
-              <a:spcAft>
-                <a:spcPts val="600"/>
-              </a:spcAft>
-            </a:pPr>
-            <a:r>
-              <a:rPr sz="1500" b="1">
-                <a:solidFill>
-                  <a:srgbClr val="0A6B53"/>
-                </a:solidFill>
-                <a:latin typeface="Microsoft JhengHei"/>
-              </a:rPr>
-              <a:t>不 OK 就用白話回報，AI 修完再驗 — 驗收結果直接回流成下一輪需求，閉環就這樣一圈一圈轉</a:t>
-            </a:r>
-          </a:p>
-        </p:txBody>
-      </p:sp>
-      <p:sp>
-        <p:nvSpPr>
-          <p:cNvPr id="12" name="TextBox 11"/>
+              <a:spcAft>
+                <a:spcPts val="100"/>
+              </a:spcAft>
+            </a:pPr>
+            <a:r>
+              <a:rPr sz="1000" b="1">
+                <a:solidFill>
+                  <a:srgbClr val="0B8F6E"/>
+                </a:solidFill>
+                <a:latin typeface="Microsoft JhengHei"/>
+              </a:rPr>
+              <a:t>5</a:t>
+            </a:r>
+          </a:p>
+          <a:p>
+            <a:pPr algn="ctr">
+              <a:spcAft>
+                <a:spcPts val="0"/>
+              </a:spcAft>
+            </a:pPr>
+            <a:r>
+              <a:rPr sz="1400" b="1">
+                <a:solidFill>
+                  <a:srgbClr val="1B2330"/>
+                </a:solidFill>
+                <a:latin typeface="Microsoft JhengHei"/>
+              </a:rPr>
+              <a:t>開發</a:t>
+            </a:r>
+          </a:p>
+        </p:txBody>
+      </p:sp>
+      <p:sp>
+        <p:nvSpPr>
+          <p:cNvPr id="19" name="Rounded Rectangle 18"/>
+          <p:cNvSpPr/>
+          <p:nvPr/>
+        </p:nvSpPr>
+        <p:spPr>
+          <a:xfrm>
+            <a:off x="3855119" y="5057537"/>
+            <a:ext cx="1572768" cy="841248"/>
+          </a:xfrm>
+          <a:prstGeom prst="roundRect">
+            <a:avLst>
+              <a:gd name="adj" fmla="val 30000"/>
+            </a:avLst>
+          </a:prstGeom>
+          <a:solidFill>
+            <a:srgbClr val="FFFFFF"/>
+          </a:solidFill>
+          <a:ln w="19050">
+            <a:solidFill>
+              <a:srgbClr val="0B8F6E"/>
+            </a:solidFill>
+          </a:ln>
+          <a:effectLst/>
+        </p:spPr>
+        <p:style>
+          <a:lnRef idx="1">
+            <a:schemeClr val="accent1"/>
+          </a:lnRef>
+          <a:fillRef idx="3">
+            <a:schemeClr val="accent1"/>
+          </a:fillRef>
+          <a:effectRef idx="2">
+            <a:schemeClr val="accent1"/>
+          </a:effectRef>
+          <a:fontRef idx="minor">
+            <a:schemeClr val="lt1"/>
+          </a:fontRef>
+        </p:style>
+        <p:txBody>
+          <a:bodyPr rtlCol="0" anchor="ctr" wrap="square"/>
+          <a:lstStyle/>
+          <a:p>
+            <a:pPr algn="ctr">
+              <a:spcAft>
+                <a:spcPts val="100"/>
+              </a:spcAft>
+            </a:pPr>
+            <a:r>
+              <a:rPr sz="1000" b="1">
+                <a:solidFill>
+                  <a:srgbClr val="0B8F6E"/>
+                </a:solidFill>
+                <a:latin typeface="Microsoft JhengHei"/>
+              </a:rPr>
+              <a:t>6</a:t>
+            </a:r>
+          </a:p>
+          <a:p>
+            <a:pPr algn="ctr">
+              <a:spcAft>
+                <a:spcPts val="0"/>
+              </a:spcAft>
+            </a:pPr>
+            <a:r>
+              <a:rPr sz="1400" b="1">
+                <a:solidFill>
+                  <a:srgbClr val="1B2330"/>
+                </a:solidFill>
+                <a:latin typeface="Microsoft JhengHei"/>
+              </a:rPr>
+              <a:t>驗證</a:t>
+            </a:r>
+          </a:p>
+        </p:txBody>
+      </p:sp>
+      <p:sp>
+        <p:nvSpPr>
+          <p:cNvPr id="20" name="Rounded Rectangle 19"/>
+          <p:cNvSpPr/>
+          <p:nvPr/>
+        </p:nvSpPr>
+        <p:spPr>
+          <a:xfrm>
+            <a:off x="3252520" y="3602736"/>
+            <a:ext cx="1572768" cy="841248"/>
+          </a:xfrm>
+          <a:prstGeom prst="roundRect">
+            <a:avLst>
+              <a:gd name="adj" fmla="val 30000"/>
+            </a:avLst>
+          </a:prstGeom>
+          <a:solidFill>
+            <a:srgbClr val="FFFFFF"/>
+          </a:solidFill>
+          <a:ln w="19050">
+            <a:solidFill>
+              <a:srgbClr val="0B8F6E"/>
+            </a:solidFill>
+          </a:ln>
+          <a:effectLst/>
+        </p:spPr>
+        <p:style>
+          <a:lnRef idx="1">
+            <a:schemeClr val="accent1"/>
+          </a:lnRef>
+          <a:fillRef idx="3">
+            <a:schemeClr val="accent1"/>
+          </a:fillRef>
+          <a:effectRef idx="2">
+            <a:schemeClr val="accent1"/>
+          </a:effectRef>
+          <a:fontRef idx="minor">
+            <a:schemeClr val="lt1"/>
+          </a:fontRef>
+        </p:style>
+        <p:txBody>
+          <a:bodyPr rtlCol="0" anchor="ctr" wrap="square"/>
+          <a:lstStyle/>
+          <a:p>
+            <a:pPr algn="ctr">
+              <a:spcAft>
+                <a:spcPts val="100"/>
+              </a:spcAft>
+            </a:pPr>
+            <a:r>
+              <a:rPr sz="1000" b="1">
+                <a:solidFill>
+                  <a:srgbClr val="0B8F6E"/>
+                </a:solidFill>
+                <a:latin typeface="Microsoft JhengHei"/>
+              </a:rPr>
+              <a:t>7</a:t>
+            </a:r>
+          </a:p>
+          <a:p>
+            <a:pPr algn="ctr">
+              <a:spcAft>
+                <a:spcPts val="0"/>
+              </a:spcAft>
+            </a:pPr>
+            <a:r>
+              <a:rPr sz="1400" b="1">
+                <a:solidFill>
+                  <a:srgbClr val="1B2330"/>
+                </a:solidFill>
+                <a:latin typeface="Microsoft JhengHei"/>
+              </a:rPr>
+              <a:t>部署</a:t>
+            </a:r>
+          </a:p>
+        </p:txBody>
+      </p:sp>
+      <p:sp>
+        <p:nvSpPr>
+          <p:cNvPr id="21" name="Rounded Rectangle 20"/>
+          <p:cNvSpPr/>
+          <p:nvPr/>
+        </p:nvSpPr>
+        <p:spPr>
+          <a:xfrm>
+            <a:off x="3855119" y="2147934"/>
+            <a:ext cx="1572768" cy="841248"/>
+          </a:xfrm>
+          <a:prstGeom prst="roundRect">
+            <a:avLst>
+              <a:gd name="adj" fmla="val 30000"/>
+            </a:avLst>
+          </a:prstGeom>
+          <a:solidFill>
+            <a:srgbClr val="FFFFFF"/>
+          </a:solidFill>
+          <a:ln w="19050">
+            <a:solidFill>
+              <a:srgbClr val="B4690E"/>
+            </a:solidFill>
+          </a:ln>
+          <a:effectLst/>
+        </p:spPr>
+        <p:style>
+          <a:lnRef idx="1">
+            <a:schemeClr val="accent1"/>
+          </a:lnRef>
+          <a:fillRef idx="3">
+            <a:schemeClr val="accent1"/>
+          </a:fillRef>
+          <a:effectRef idx="2">
+            <a:schemeClr val="accent1"/>
+          </a:effectRef>
+          <a:fontRef idx="minor">
+            <a:schemeClr val="lt1"/>
+          </a:fontRef>
+        </p:style>
+        <p:txBody>
+          <a:bodyPr rtlCol="0" anchor="ctr" wrap="square"/>
+          <a:lstStyle/>
+          <a:p>
+            <a:pPr algn="ctr">
+              <a:spcAft>
+                <a:spcPts val="100"/>
+              </a:spcAft>
+            </a:pPr>
+            <a:r>
+              <a:rPr sz="1000" b="1">
+                <a:solidFill>
+                  <a:srgbClr val="B4690E"/>
+                </a:solidFill>
+                <a:latin typeface="Microsoft JhengHei"/>
+              </a:rPr>
+              <a:t>8</a:t>
+            </a:r>
+          </a:p>
+          <a:p>
+            <a:pPr algn="ctr">
+              <a:spcAft>
+                <a:spcPts val="0"/>
+              </a:spcAft>
+            </a:pPr>
+            <a:r>
+              <a:rPr sz="1400" b="1">
+                <a:solidFill>
+                  <a:srgbClr val="1B2330"/>
+                </a:solidFill>
+                <a:latin typeface="Microsoft JhengHei"/>
+              </a:rPr>
+              <a:t>更新 Wiki</a:t>
+            </a:r>
+          </a:p>
+        </p:txBody>
+      </p:sp>
+      <p:sp>
+        <p:nvSpPr>
+          <p:cNvPr id="22" name="TextBox 21"/>
           <p:cNvSpPr txBox="1"/>
           <p:nvPr/>
         </p:nvSpPr>
         <p:spPr>
           <a:xfrm>
-            <a:off x="731520" y="5166360"/>
-            <a:ext cx="10698480" cy="914400"/>
+            <a:off x="731520" y="6355080"/>
+            <a:ext cx="10698480" cy="457200"/>
           </a:xfrm>
           <a:prstGeom prst="rect">
             <a:avLst/>
@@ -6100,22 +6562,19 @@
           </a:bodyPr>
           <a:lstStyle/>
           <a:p>
-            <a:pPr algn="l">
-              <a:lnSpc>
-                <a:spcPct val="130000"/>
-              </a:lnSpc>
+            <a:pPr algn="ctr">
               <a:spcAft>
                 <a:spcPts val="600"/>
               </a:spcAft>
             </a:pPr>
             <a:r>
-              <a:rPr sz="1600" b="0">
+              <a:rPr sz="1300" b="0">
                 <a:solidFill>
                   <a:srgbClr val="5B6678"/>
                 </a:solidFill>
                 <a:latin typeface="Microsoft JhengHei"/>
               </a:rPr>
-              <a:t>重點不是「AI 很會寫」，而是每一圈都小、都能驗收、錯了能退回。閉環讓品質可控。</a:t>
+              <a:t>每一圈都小、都能驗收、錯了能退回 — 閉環讓品質可控；驗收與 wiki 又回流成下一輪需求。</a:t>
             </a:r>
           </a:p>
         </p:txBody>

--- a/docs/簡報-AI零程式碼開發ERP分享.pptx
+++ b/docs/簡報-AI零程式碼開發ERP分享.pptx
@@ -5388,7 +5388,7 @@
         </p:nvSpPr>
         <p:spPr>
           <a:xfrm>
-            <a:off x="731520" y="384048"/>
+            <a:off x="731520" y="365760"/>
             <a:ext cx="10698480" cy="777240"/>
           </a:xfrm>
           <a:prstGeom prst="rect">
@@ -5439,61 +5439,19 @@
       </p:sp>
       <p:sp>
         <p:nvSpPr>
-          <p:cNvPr id="4" name="Oval 3"/>
+          <p:cNvPr id="4" name="Donut 3"/>
           <p:cNvSpPr/>
           <p:nvPr/>
         </p:nvSpPr>
         <p:spPr>
           <a:xfrm>
-            <a:off x="4038904" y="1965960"/>
-            <a:ext cx="4114800" cy="4114800"/>
-          </a:xfrm>
-          <a:prstGeom prst="ellipse">
-            <a:avLst/>
-          </a:prstGeom>
-          <a:noFill/>
-          <a:ln w="114300">
-            <a:solidFill>
-              <a:srgbClr val="EEF1F6"/>
-            </a:solidFill>
-          </a:ln>
-          <a:effectLst/>
-        </p:spPr>
-        <p:style>
-          <a:lnRef idx="1">
-            <a:schemeClr val="accent1"/>
-          </a:lnRef>
-          <a:fillRef idx="3">
-            <a:schemeClr val="accent1"/>
-          </a:fillRef>
-          <a:effectRef idx="2">
-            <a:schemeClr val="accent1"/>
-          </a:effectRef>
-          <a:fontRef idx="minor">
-            <a:schemeClr val="lt1"/>
-          </a:fontRef>
-        </p:style>
-        <p:txBody>
-          <a:bodyPr rtlCol="0" anchor="ctr"/>
-          <a:lstStyle/>
-          <a:p>
-            <a:pPr algn="ctr"/>
-          </a:p>
-        </p:txBody>
-      </p:sp>
-      <p:sp>
-        <p:nvSpPr>
-          <p:cNvPr id="5" name="Isosceles Triangle 4"/>
-          <p:cNvSpPr/>
-          <p:nvPr/>
-        </p:nvSpPr>
-        <p:spPr>
-          <a:xfrm rot="6750000">
-            <a:off x="6728189" y="1985410"/>
-            <a:ext cx="310896" cy="274320"/>
-          </a:xfrm>
-          <a:prstGeom prst="triangle">
-            <a:avLst/>
+            <a:off x="4212640" y="1792223"/>
+            <a:ext cx="3767328" cy="3767328"/>
+          </a:xfrm>
+          <a:prstGeom prst="donut">
+            <a:avLst>
+              <a:gd name="adj" fmla="val 13834"/>
+            </a:avLst>
           </a:prstGeom>
           <a:solidFill>
             <a:srgbClr val="0B8F6E"/>
@@ -5527,20 +5485,20 @@
       </p:sp>
       <p:sp>
         <p:nvSpPr>
-          <p:cNvPr id="6" name="Isosceles Triangle 5"/>
+          <p:cNvPr id="5" name="Isosceles Triangle 4"/>
           <p:cNvSpPr/>
           <p:nvPr/>
         </p:nvSpPr>
         <p:spPr>
-          <a:xfrm rot="9450000">
-            <a:off x="7841646" y="3098867"/>
-            <a:ext cx="310896" cy="274320"/>
+          <a:xfrm rot="6750000">
+            <a:off x="6580262" y="2052932"/>
+            <a:ext cx="274320" cy="246888"/>
           </a:xfrm>
           <a:prstGeom prst="triangle">
             <a:avLst/>
           </a:prstGeom>
           <a:solidFill>
-            <a:srgbClr val="0B8F6E"/>
+            <a:srgbClr val="FFFFFF"/>
           </a:solidFill>
           <a:ln>
             <a:noFill/>
@@ -5571,20 +5529,20 @@
       </p:sp>
       <p:sp>
         <p:nvSpPr>
-          <p:cNvPr id="7" name="Isosceles Triangle 6"/>
+          <p:cNvPr id="6" name="Isosceles Triangle 5"/>
           <p:cNvSpPr/>
           <p:nvPr/>
         </p:nvSpPr>
         <p:spPr>
-          <a:xfrm rot="12150000">
-            <a:off x="7841646" y="4673532"/>
-            <a:ext cx="310896" cy="274320"/>
+          <a:xfrm rot="9450000">
+            <a:off x="7458656" y="2931325"/>
+            <a:ext cx="274320" cy="246888"/>
           </a:xfrm>
           <a:prstGeom prst="triangle">
             <a:avLst/>
           </a:prstGeom>
           <a:solidFill>
-            <a:srgbClr val="0B8F6E"/>
+            <a:srgbClr val="FFFFFF"/>
           </a:solidFill>
           <a:ln>
             <a:noFill/>
@@ -5615,20 +5573,20 @@
       </p:sp>
       <p:sp>
         <p:nvSpPr>
-          <p:cNvPr id="8" name="Isosceles Triangle 7"/>
+          <p:cNvPr id="7" name="Isosceles Triangle 6"/>
           <p:cNvSpPr/>
           <p:nvPr/>
         </p:nvSpPr>
         <p:spPr>
-          <a:xfrm rot="14850000">
-            <a:off x="6728189" y="5786989"/>
-            <a:ext cx="310896" cy="274320"/>
+          <a:xfrm rot="12150000">
+            <a:off x="7458656" y="4173562"/>
+            <a:ext cx="274320" cy="246888"/>
           </a:xfrm>
           <a:prstGeom prst="triangle">
             <a:avLst/>
           </a:prstGeom>
           <a:solidFill>
-            <a:srgbClr val="0B8F6E"/>
+            <a:srgbClr val="FFFFFF"/>
           </a:solidFill>
           <a:ln>
             <a:noFill/>
@@ -5659,20 +5617,20 @@
       </p:sp>
       <p:sp>
         <p:nvSpPr>
-          <p:cNvPr id="9" name="Isosceles Triangle 8"/>
+          <p:cNvPr id="8" name="Isosceles Triangle 7"/>
           <p:cNvSpPr/>
           <p:nvPr/>
         </p:nvSpPr>
         <p:spPr>
-          <a:xfrm rot="17550000">
-            <a:off x="5153523" y="5786989"/>
-            <a:ext cx="310896" cy="274320"/>
+          <a:xfrm rot="14850000">
+            <a:off x="6580262" y="5051955"/>
+            <a:ext cx="274320" cy="246888"/>
           </a:xfrm>
           <a:prstGeom prst="triangle">
             <a:avLst/>
           </a:prstGeom>
           <a:solidFill>
-            <a:srgbClr val="0B8F6E"/>
+            <a:srgbClr val="FFFFFF"/>
           </a:solidFill>
           <a:ln>
             <a:noFill/>
@@ -5703,20 +5661,20 @@
       </p:sp>
       <p:sp>
         <p:nvSpPr>
-          <p:cNvPr id="10" name="Isosceles Triangle 9"/>
+          <p:cNvPr id="9" name="Isosceles Triangle 8"/>
           <p:cNvSpPr/>
           <p:nvPr/>
         </p:nvSpPr>
         <p:spPr>
-          <a:xfrm rot="20250000">
-            <a:off x="4040067" y="4673532"/>
-            <a:ext cx="310896" cy="274320"/>
+          <a:xfrm rot="17550000">
+            <a:off x="5338026" y="5051955"/>
+            <a:ext cx="274320" cy="246888"/>
           </a:xfrm>
           <a:prstGeom prst="triangle">
             <a:avLst/>
           </a:prstGeom>
           <a:solidFill>
-            <a:srgbClr val="0B8F6E"/>
+            <a:srgbClr val="FFFFFF"/>
           </a:solidFill>
           <a:ln>
             <a:noFill/>
@@ -5747,20 +5705,20 @@
       </p:sp>
       <p:sp>
         <p:nvSpPr>
-          <p:cNvPr id="11" name="Isosceles Triangle 10"/>
+          <p:cNvPr id="10" name="Isosceles Triangle 9"/>
           <p:cNvSpPr/>
           <p:nvPr/>
         </p:nvSpPr>
         <p:spPr>
-          <a:xfrm rot="1350000">
-            <a:off x="4040067" y="3098867"/>
-            <a:ext cx="310896" cy="274320"/>
+          <a:xfrm rot="20250000">
+            <a:off x="4459632" y="4173562"/>
+            <a:ext cx="274320" cy="246888"/>
           </a:xfrm>
           <a:prstGeom prst="triangle">
             <a:avLst/>
           </a:prstGeom>
           <a:solidFill>
-            <a:srgbClr val="0B8F6E"/>
+            <a:srgbClr val="FFFFFF"/>
           </a:solidFill>
           <a:ln>
             <a:noFill/>
@@ -5791,20 +5749,20 @@
       </p:sp>
       <p:sp>
         <p:nvSpPr>
-          <p:cNvPr id="12" name="Isosceles Triangle 11"/>
+          <p:cNvPr id="11" name="Isosceles Triangle 10"/>
           <p:cNvSpPr/>
           <p:nvPr/>
         </p:nvSpPr>
         <p:spPr>
-          <a:xfrm rot="4050000">
-            <a:off x="5153523" y="1985410"/>
-            <a:ext cx="310896" cy="274320"/>
+          <a:xfrm rot="1350000">
+            <a:off x="4459632" y="2931325"/>
+            <a:ext cx="274320" cy="246888"/>
           </a:xfrm>
           <a:prstGeom prst="triangle">
             <a:avLst/>
           </a:prstGeom>
           <a:solidFill>
-            <a:srgbClr val="B4690E"/>
+            <a:srgbClr val="FFFFFF"/>
           </a:solidFill>
           <a:ln>
             <a:noFill/>
@@ -5835,22 +5793,157 @@
       </p:sp>
       <p:sp>
         <p:nvSpPr>
+          <p:cNvPr id="12" name="Isosceles Triangle 11"/>
+          <p:cNvSpPr/>
+          <p:nvPr/>
+        </p:nvSpPr>
+        <p:spPr>
+          <a:xfrm rot="4050000">
+            <a:off x="5338026" y="2052932"/>
+            <a:ext cx="274320" cy="246888"/>
+          </a:xfrm>
+          <a:prstGeom prst="triangle">
+            <a:avLst/>
+          </a:prstGeom>
+          <a:solidFill>
+            <a:srgbClr val="F5A623"/>
+          </a:solidFill>
+          <a:ln>
+            <a:noFill/>
+          </a:ln>
+          <a:effectLst/>
+        </p:spPr>
+        <p:style>
+          <a:lnRef idx="1">
+            <a:schemeClr val="accent1"/>
+          </a:lnRef>
+          <a:fillRef idx="3">
+            <a:schemeClr val="accent1"/>
+          </a:fillRef>
+          <a:effectRef idx="2">
+            <a:schemeClr val="accent1"/>
+          </a:effectRef>
+          <a:fontRef idx="minor">
+            <a:schemeClr val="lt1"/>
+          </a:fontRef>
+        </p:style>
+        <p:txBody>
+          <a:bodyPr rtlCol="0" anchor="ctr"/>
+          <a:lstStyle/>
+          <a:p>
+            <a:pPr algn="ctr"/>
+          </a:p>
+        </p:txBody>
+      </p:sp>
+      <p:sp>
+        <p:nvSpPr>
           <p:cNvPr id="13" name="Oval 12"/>
           <p:cNvSpPr/>
           <p:nvPr/>
         </p:nvSpPr>
         <p:spPr>
           <a:xfrm>
-            <a:off x="5273344" y="3200400"/>
-            <a:ext cx="1645920" cy="1645920"/>
+            <a:off x="5017312" y="2596896"/>
+            <a:ext cx="2157984" cy="2157984"/>
           </a:xfrm>
           <a:prstGeom prst="ellipse">
             <a:avLst/>
           </a:prstGeom>
           <a:solidFill>
-            <a:srgbClr val="E3F4EE"/>
+            <a:srgbClr val="FFFFFF"/>
           </a:solidFill>
-          <a:ln w="19050">
+          <a:ln w="12700">
+            <a:solidFill>
+              <a:srgbClr val="EEF1F6"/>
+            </a:solidFill>
+          </a:ln>
+          <a:effectLst/>
+        </p:spPr>
+        <p:style>
+          <a:lnRef idx="1">
+            <a:schemeClr val="accent1"/>
+          </a:lnRef>
+          <a:fillRef idx="3">
+            <a:schemeClr val="accent1"/>
+          </a:fillRef>
+          <a:effectRef idx="2">
+            <a:schemeClr val="accent1"/>
+          </a:effectRef>
+          <a:fontRef idx="minor">
+            <a:schemeClr val="lt1"/>
+          </a:fontRef>
+        </p:style>
+        <p:txBody>
+          <a:bodyPr rtlCol="0" anchor="ctr" wrap="square"/>
+          <a:lstStyle/>
+          <a:p>
+            <a:pPr algn="ctr">
+              <a:spcAft>
+                <a:spcPts val="300"/>
+              </a:spcAft>
+            </a:pPr>
+            <a:r>
+              <a:rPr sz="2600" b="1">
+                <a:solidFill>
+                  <a:srgbClr val="0B8F6E"/>
+                </a:solidFill>
+                <a:latin typeface="Microsoft JhengHei"/>
+              </a:rPr>
+              <a:t>閉環</a:t>
+            </a:r>
+          </a:p>
+          <a:p>
+            <a:pPr algn="ctr">
+              <a:spcAft>
+                <a:spcPts val="300"/>
+              </a:spcAft>
+            </a:pPr>
+            <a:r>
+              <a:rPr sz="1000" b="1">
+                <a:solidFill>
+                  <a:srgbClr val="7B8597"/>
+                </a:solidFill>
+                <a:latin typeface="Microsoft JhengHei"/>
+              </a:rPr>
+              <a:t>CLOSED LOOP</a:t>
+            </a:r>
+          </a:p>
+          <a:p>
+            <a:pPr algn="ctr">
+              <a:spcAft>
+                <a:spcPts val="600"/>
+              </a:spcAft>
+            </a:pPr>
+            <a:r>
+              <a:rPr sz="1200" b="0">
+                <a:solidFill>
+                  <a:srgbClr val="5B6678"/>
+                </a:solidFill>
+                <a:latin typeface="Microsoft JhengHei"/>
+              </a:rPr>
+              <a:t>迭代 438 次</a:t>
+            </a:r>
+          </a:p>
+        </p:txBody>
+      </p:sp>
+      <p:sp>
+        <p:nvSpPr>
+          <p:cNvPr id="14" name="Oval 13"/>
+          <p:cNvSpPr/>
+          <p:nvPr/>
+        </p:nvSpPr>
+        <p:spPr>
+          <a:xfrm>
+            <a:off x="5885992" y="1842515"/>
+            <a:ext cx="420624" cy="420624"/>
+          </a:xfrm>
+          <a:prstGeom prst="ellipse">
+            <a:avLst/>
+          </a:prstGeom>
+          <a:solidFill>
+            <a:srgbClr val="FFFFFF"/>
+          </a:solidFill>
+          <a:ln w="25400">
             <a:solidFill>
               <a:srgbClr val="0B8F6E"/>
             </a:solidFill>
@@ -5872,78 +5965,44 @@
           </a:fontRef>
         </p:style>
         <p:txBody>
-          <a:bodyPr rtlCol="0" anchor="ctr"/>
+          <a:bodyPr rtlCol="0" anchor="ctr" wrap="none" lIns="0" rIns="0" tIns="0" bIns="0"/>
           <a:lstStyle/>
           <a:p>
             <a:pPr algn="ctr">
               <a:spcAft>
-                <a:spcPts val="200"/>
-              </a:spcAft>
-            </a:pPr>
-            <a:r>
-              <a:rPr sz="2200" b="1">
+                <a:spcPts val="0"/>
+              </a:spcAft>
+            </a:pPr>
+            <a:r>
+              <a:rPr sz="1300" b="1">
                 <a:solidFill>
                   <a:srgbClr val="0B8F6E"/>
                 </a:solidFill>
                 <a:latin typeface="Microsoft JhengHei"/>
               </a:rPr>
-              <a:t>閉環</a:t>
-            </a:r>
-          </a:p>
-          <a:p>
-            <a:pPr algn="ctr">
-              <a:spcAft>
-                <a:spcPts val="200"/>
-              </a:spcAft>
-            </a:pPr>
-            <a:r>
-              <a:rPr sz="900" b="1">
-                <a:solidFill>
-                  <a:srgbClr val="7B8597"/>
-                </a:solidFill>
-                <a:latin typeface="Microsoft JhengHei"/>
-              </a:rPr>
-              <a:t>CLOSED LOOP</a:t>
-            </a:r>
-          </a:p>
-          <a:p>
-            <a:pPr algn="ctr">
-              <a:spcAft>
-                <a:spcPts val="600"/>
-              </a:spcAft>
-            </a:pPr>
-            <a:r>
-              <a:rPr sz="1100" b="0">
-                <a:solidFill>
-                  <a:srgbClr val="5B6678"/>
-                </a:solidFill>
-                <a:latin typeface="Microsoft JhengHei"/>
-              </a:rPr>
-              <a:t>迭代 438 次</a:t>
-            </a:r>
-          </a:p>
-        </p:txBody>
-      </p:sp>
-      <p:sp>
-        <p:nvSpPr>
-          <p:cNvPr id="14" name="Rounded Rectangle 13"/>
+              <a:t>1</a:t>
+            </a:r>
+          </a:p>
+        </p:txBody>
+      </p:sp>
+      <p:sp>
+        <p:nvSpPr>
+          <p:cNvPr id="15" name="Oval 14"/>
           <p:cNvSpPr/>
           <p:nvPr/>
         </p:nvSpPr>
         <p:spPr>
           <a:xfrm>
-            <a:off x="5309920" y="1545336"/>
-            <a:ext cx="1572768" cy="841248"/>
-          </a:xfrm>
-          <a:prstGeom prst="roundRect">
-            <a:avLst>
-              <a:gd name="adj" fmla="val 30000"/>
-            </a:avLst>
+            <a:off x="7033669" y="2317899"/>
+            <a:ext cx="420624" cy="420624"/>
+          </a:xfrm>
+          <a:prstGeom prst="ellipse">
+            <a:avLst/>
           </a:prstGeom>
           <a:solidFill>
             <a:srgbClr val="FFFFFF"/>
           </a:solidFill>
-          <a:ln w="19050">
+          <a:ln w="25400">
             <a:solidFill>
               <a:srgbClr val="0B8F6E"/>
             </a:solidFill>
@@ -5965,62 +6024,44 @@
           </a:fontRef>
         </p:style>
         <p:txBody>
-          <a:bodyPr rtlCol="0" anchor="ctr" wrap="square"/>
+          <a:bodyPr rtlCol="0" anchor="ctr" wrap="none" lIns="0" rIns="0" tIns="0" bIns="0"/>
           <a:lstStyle/>
           <a:p>
             <a:pPr algn="ctr">
               <a:spcAft>
-                <a:spcPts val="100"/>
-              </a:spcAft>
-            </a:pPr>
-            <a:r>
-              <a:rPr sz="1000" b="1">
+                <a:spcPts val="0"/>
+              </a:spcAft>
+            </a:pPr>
+            <a:r>
+              <a:rPr sz="1300" b="1">
                 <a:solidFill>
                   <a:srgbClr val="0B8F6E"/>
                 </a:solidFill>
                 <a:latin typeface="Microsoft JhengHei"/>
               </a:rPr>
-              <a:t>1</a:t>
-            </a:r>
-          </a:p>
-          <a:p>
-            <a:pPr algn="ctr">
-              <a:spcAft>
-                <a:spcPts val="0"/>
-              </a:spcAft>
-            </a:pPr>
-            <a:r>
-              <a:rPr sz="1400" b="1">
-                <a:solidFill>
-                  <a:srgbClr val="1B2330"/>
-                </a:solidFill>
-                <a:latin typeface="Microsoft JhengHei"/>
-              </a:rPr>
-              <a:t>需求</a:t>
-            </a:r>
-          </a:p>
-        </p:txBody>
-      </p:sp>
-      <p:sp>
-        <p:nvSpPr>
-          <p:cNvPr id="15" name="Rounded Rectangle 14"/>
+              <a:t>2</a:t>
+            </a:r>
+          </a:p>
+        </p:txBody>
+      </p:sp>
+      <p:sp>
+        <p:nvSpPr>
+          <p:cNvPr id="16" name="Oval 15"/>
           <p:cNvSpPr/>
           <p:nvPr/>
         </p:nvSpPr>
         <p:spPr>
           <a:xfrm>
-            <a:off x="6764722" y="2147934"/>
-            <a:ext cx="1572768" cy="841248"/>
-          </a:xfrm>
-          <a:prstGeom prst="roundRect">
-            <a:avLst>
-              <a:gd name="adj" fmla="val 30000"/>
-            </a:avLst>
+            <a:off x="7509052" y="3465575"/>
+            <a:ext cx="420624" cy="420624"/>
+          </a:xfrm>
+          <a:prstGeom prst="ellipse">
+            <a:avLst/>
           </a:prstGeom>
           <a:solidFill>
             <a:srgbClr val="FFFFFF"/>
           </a:solidFill>
-          <a:ln w="19050">
+          <a:ln w="25400">
             <a:solidFill>
               <a:srgbClr val="0B8F6E"/>
             </a:solidFill>
@@ -6042,62 +6083,44 @@
           </a:fontRef>
         </p:style>
         <p:txBody>
-          <a:bodyPr rtlCol="0" anchor="ctr" wrap="square"/>
+          <a:bodyPr rtlCol="0" anchor="ctr" wrap="none" lIns="0" rIns="0" tIns="0" bIns="0"/>
           <a:lstStyle/>
           <a:p>
             <a:pPr algn="ctr">
               <a:spcAft>
-                <a:spcPts val="100"/>
-              </a:spcAft>
-            </a:pPr>
-            <a:r>
-              <a:rPr sz="1000" b="1">
+                <a:spcPts val="0"/>
+              </a:spcAft>
+            </a:pPr>
+            <a:r>
+              <a:rPr sz="1300" b="1">
                 <a:solidFill>
                   <a:srgbClr val="0B8F6E"/>
                 </a:solidFill>
                 <a:latin typeface="Microsoft JhengHei"/>
               </a:rPr>
-              <a:t>2</a:t>
-            </a:r>
-          </a:p>
-          <a:p>
-            <a:pPr algn="ctr">
-              <a:spcAft>
-                <a:spcPts val="0"/>
-              </a:spcAft>
-            </a:pPr>
-            <a:r>
-              <a:rPr sz="1400" b="1">
-                <a:solidFill>
-                  <a:srgbClr val="1B2330"/>
-                </a:solidFill>
-                <a:latin typeface="Microsoft JhengHei"/>
-              </a:rPr>
-              <a:t>寫文件</a:t>
-            </a:r>
-          </a:p>
-        </p:txBody>
-      </p:sp>
-      <p:sp>
-        <p:nvSpPr>
-          <p:cNvPr id="16" name="Rounded Rectangle 15"/>
+              <a:t>3</a:t>
+            </a:r>
+          </a:p>
+        </p:txBody>
+      </p:sp>
+      <p:sp>
+        <p:nvSpPr>
+          <p:cNvPr id="17" name="Oval 16"/>
           <p:cNvSpPr/>
           <p:nvPr/>
         </p:nvSpPr>
         <p:spPr>
           <a:xfrm>
-            <a:off x="7367320" y="3602736"/>
-            <a:ext cx="1572768" cy="841248"/>
-          </a:xfrm>
-          <a:prstGeom prst="roundRect">
-            <a:avLst>
-              <a:gd name="adj" fmla="val 30000"/>
-            </a:avLst>
+            <a:off x="7033669" y="4613252"/>
+            <a:ext cx="420624" cy="420624"/>
+          </a:xfrm>
+          <a:prstGeom prst="ellipse">
+            <a:avLst/>
           </a:prstGeom>
           <a:solidFill>
             <a:srgbClr val="FFFFFF"/>
           </a:solidFill>
-          <a:ln w="19050">
+          <a:ln w="25400">
             <a:solidFill>
               <a:srgbClr val="0B8F6E"/>
             </a:solidFill>
@@ -6119,62 +6142,44 @@
           </a:fontRef>
         </p:style>
         <p:txBody>
-          <a:bodyPr rtlCol="0" anchor="ctr" wrap="square"/>
+          <a:bodyPr rtlCol="0" anchor="ctr" wrap="none" lIns="0" rIns="0" tIns="0" bIns="0"/>
           <a:lstStyle/>
           <a:p>
             <a:pPr algn="ctr">
               <a:spcAft>
-                <a:spcPts val="100"/>
-              </a:spcAft>
-            </a:pPr>
-            <a:r>
-              <a:rPr sz="1000" b="1">
+                <a:spcPts val="0"/>
+              </a:spcAft>
+            </a:pPr>
+            <a:r>
+              <a:rPr sz="1300" b="1">
                 <a:solidFill>
                   <a:srgbClr val="0B8F6E"/>
                 </a:solidFill>
                 <a:latin typeface="Microsoft JhengHei"/>
               </a:rPr>
-              <a:t>3</a:t>
-            </a:r>
-          </a:p>
-          <a:p>
-            <a:pPr algn="ctr">
-              <a:spcAft>
-                <a:spcPts val="0"/>
-              </a:spcAft>
-            </a:pPr>
-            <a:r>
-              <a:rPr sz="1400" b="1">
-                <a:solidFill>
-                  <a:srgbClr val="1B2330"/>
-                </a:solidFill>
-                <a:latin typeface="Microsoft JhengHei"/>
-              </a:rPr>
-              <a:t>開 Task</a:t>
-            </a:r>
-          </a:p>
-        </p:txBody>
-      </p:sp>
-      <p:sp>
-        <p:nvSpPr>
-          <p:cNvPr id="17" name="Rounded Rectangle 16"/>
+              <a:t>4</a:t>
+            </a:r>
+          </a:p>
+        </p:txBody>
+      </p:sp>
+      <p:sp>
+        <p:nvSpPr>
+          <p:cNvPr id="18" name="Oval 17"/>
           <p:cNvSpPr/>
           <p:nvPr/>
         </p:nvSpPr>
         <p:spPr>
           <a:xfrm>
-            <a:off x="6764722" y="5057537"/>
-            <a:ext cx="1572768" cy="841248"/>
-          </a:xfrm>
-          <a:prstGeom prst="roundRect">
-            <a:avLst>
-              <a:gd name="adj" fmla="val 30000"/>
-            </a:avLst>
+            <a:off x="5885992" y="5088636"/>
+            <a:ext cx="420624" cy="420624"/>
+          </a:xfrm>
+          <a:prstGeom prst="ellipse">
+            <a:avLst/>
           </a:prstGeom>
           <a:solidFill>
             <a:srgbClr val="FFFFFF"/>
           </a:solidFill>
-          <a:ln w="19050">
+          <a:ln w="25400">
             <a:solidFill>
               <a:srgbClr val="0B8F6E"/>
             </a:solidFill>
@@ -6196,62 +6201,44 @@
           </a:fontRef>
         </p:style>
         <p:txBody>
-          <a:bodyPr rtlCol="0" anchor="ctr" wrap="square"/>
+          <a:bodyPr rtlCol="0" anchor="ctr" wrap="none" lIns="0" rIns="0" tIns="0" bIns="0"/>
           <a:lstStyle/>
           <a:p>
             <a:pPr algn="ctr">
               <a:spcAft>
-                <a:spcPts val="100"/>
-              </a:spcAft>
-            </a:pPr>
-            <a:r>
-              <a:rPr sz="1000" b="1">
+                <a:spcPts val="0"/>
+              </a:spcAft>
+            </a:pPr>
+            <a:r>
+              <a:rPr sz="1300" b="1">
                 <a:solidFill>
                   <a:srgbClr val="0B8F6E"/>
                 </a:solidFill>
                 <a:latin typeface="Microsoft JhengHei"/>
               </a:rPr>
-              <a:t>4</a:t>
-            </a:r>
-          </a:p>
-          <a:p>
-            <a:pPr algn="ctr">
-              <a:spcAft>
-                <a:spcPts val="0"/>
-              </a:spcAft>
-            </a:pPr>
-            <a:r>
-              <a:rPr sz="1400" b="1">
-                <a:solidFill>
-                  <a:srgbClr val="1B2330"/>
-                </a:solidFill>
-                <a:latin typeface="Microsoft JhengHei"/>
-              </a:rPr>
-              <a:t>寫測試項目</a:t>
-            </a:r>
-          </a:p>
-        </p:txBody>
-      </p:sp>
-      <p:sp>
-        <p:nvSpPr>
-          <p:cNvPr id="18" name="Rounded Rectangle 17"/>
+              <a:t>5</a:t>
+            </a:r>
+          </a:p>
+        </p:txBody>
+      </p:sp>
+      <p:sp>
+        <p:nvSpPr>
+          <p:cNvPr id="19" name="Oval 18"/>
           <p:cNvSpPr/>
           <p:nvPr/>
         </p:nvSpPr>
         <p:spPr>
           <a:xfrm>
-            <a:off x="5309920" y="5660136"/>
-            <a:ext cx="1572768" cy="841248"/>
-          </a:xfrm>
-          <a:prstGeom prst="roundRect">
-            <a:avLst>
-              <a:gd name="adj" fmla="val 30000"/>
-            </a:avLst>
+            <a:off x="4738316" y="4613252"/>
+            <a:ext cx="420624" cy="420624"/>
+          </a:xfrm>
+          <a:prstGeom prst="ellipse">
+            <a:avLst/>
           </a:prstGeom>
           <a:solidFill>
             <a:srgbClr val="FFFFFF"/>
           </a:solidFill>
-          <a:ln w="19050">
+          <a:ln w="25400">
             <a:solidFill>
               <a:srgbClr val="0B8F6E"/>
             </a:solidFill>
@@ -6273,62 +6260,44 @@
           </a:fontRef>
         </p:style>
         <p:txBody>
-          <a:bodyPr rtlCol="0" anchor="ctr" wrap="square"/>
+          <a:bodyPr rtlCol="0" anchor="ctr" wrap="none" lIns="0" rIns="0" tIns="0" bIns="0"/>
           <a:lstStyle/>
           <a:p>
             <a:pPr algn="ctr">
               <a:spcAft>
-                <a:spcPts val="100"/>
-              </a:spcAft>
-            </a:pPr>
-            <a:r>
-              <a:rPr sz="1000" b="1">
+                <a:spcPts val="0"/>
+              </a:spcAft>
+            </a:pPr>
+            <a:r>
+              <a:rPr sz="1300" b="1">
                 <a:solidFill>
                   <a:srgbClr val="0B8F6E"/>
                 </a:solidFill>
                 <a:latin typeface="Microsoft JhengHei"/>
               </a:rPr>
-              <a:t>5</a:t>
-            </a:r>
-          </a:p>
-          <a:p>
-            <a:pPr algn="ctr">
-              <a:spcAft>
-                <a:spcPts val="0"/>
-              </a:spcAft>
-            </a:pPr>
-            <a:r>
-              <a:rPr sz="1400" b="1">
-                <a:solidFill>
-                  <a:srgbClr val="1B2330"/>
-                </a:solidFill>
-                <a:latin typeface="Microsoft JhengHei"/>
-              </a:rPr>
-              <a:t>開發</a:t>
-            </a:r>
-          </a:p>
-        </p:txBody>
-      </p:sp>
-      <p:sp>
-        <p:nvSpPr>
-          <p:cNvPr id="19" name="Rounded Rectangle 18"/>
+              <a:t>6</a:t>
+            </a:r>
+          </a:p>
+        </p:txBody>
+      </p:sp>
+      <p:sp>
+        <p:nvSpPr>
+          <p:cNvPr id="20" name="Oval 19"/>
           <p:cNvSpPr/>
           <p:nvPr/>
         </p:nvSpPr>
         <p:spPr>
           <a:xfrm>
-            <a:off x="3855119" y="5057537"/>
-            <a:ext cx="1572768" cy="841248"/>
-          </a:xfrm>
-          <a:prstGeom prst="roundRect">
-            <a:avLst>
-              <a:gd name="adj" fmla="val 30000"/>
-            </a:avLst>
+            <a:off x="4262932" y="3465575"/>
+            <a:ext cx="420624" cy="420624"/>
+          </a:xfrm>
+          <a:prstGeom prst="ellipse">
+            <a:avLst/>
           </a:prstGeom>
           <a:solidFill>
             <a:srgbClr val="FFFFFF"/>
           </a:solidFill>
-          <a:ln w="19050">
+          <a:ln w="25400">
             <a:solidFill>
               <a:srgbClr val="0B8F6E"/>
             </a:solidFill>
@@ -6350,64 +6319,46 @@
           </a:fontRef>
         </p:style>
         <p:txBody>
-          <a:bodyPr rtlCol="0" anchor="ctr" wrap="square"/>
+          <a:bodyPr rtlCol="0" anchor="ctr" wrap="none" lIns="0" rIns="0" tIns="0" bIns="0"/>
           <a:lstStyle/>
           <a:p>
             <a:pPr algn="ctr">
               <a:spcAft>
-                <a:spcPts val="100"/>
-              </a:spcAft>
-            </a:pPr>
-            <a:r>
-              <a:rPr sz="1000" b="1">
+                <a:spcPts val="0"/>
+              </a:spcAft>
+            </a:pPr>
+            <a:r>
+              <a:rPr sz="1300" b="1">
                 <a:solidFill>
                   <a:srgbClr val="0B8F6E"/>
                 </a:solidFill>
                 <a:latin typeface="Microsoft JhengHei"/>
               </a:rPr>
-              <a:t>6</a:t>
-            </a:r>
-          </a:p>
-          <a:p>
-            <a:pPr algn="ctr">
-              <a:spcAft>
-                <a:spcPts val="0"/>
-              </a:spcAft>
-            </a:pPr>
-            <a:r>
-              <a:rPr sz="1400" b="1">
-                <a:solidFill>
-                  <a:srgbClr val="1B2330"/>
-                </a:solidFill>
-                <a:latin typeface="Microsoft JhengHei"/>
-              </a:rPr>
-              <a:t>驗證</a:t>
-            </a:r>
-          </a:p>
-        </p:txBody>
-      </p:sp>
-      <p:sp>
-        <p:nvSpPr>
-          <p:cNvPr id="20" name="Rounded Rectangle 19"/>
+              <a:t>7</a:t>
+            </a:r>
+          </a:p>
+        </p:txBody>
+      </p:sp>
+      <p:sp>
+        <p:nvSpPr>
+          <p:cNvPr id="21" name="Oval 20"/>
           <p:cNvSpPr/>
           <p:nvPr/>
         </p:nvSpPr>
         <p:spPr>
           <a:xfrm>
-            <a:off x="3252520" y="3602736"/>
-            <a:ext cx="1572768" cy="841248"/>
-          </a:xfrm>
-          <a:prstGeom prst="roundRect">
-            <a:avLst>
-              <a:gd name="adj" fmla="val 30000"/>
-            </a:avLst>
+            <a:off x="4738316" y="2317899"/>
+            <a:ext cx="420624" cy="420624"/>
+          </a:xfrm>
+          <a:prstGeom prst="ellipse">
+            <a:avLst/>
           </a:prstGeom>
           <a:solidFill>
             <a:srgbClr val="FFFFFF"/>
           </a:solidFill>
-          <a:ln w="19050">
+          <a:ln w="25400">
             <a:solidFill>
-              <a:srgbClr val="0B8F6E"/>
+              <a:srgbClr val="F5A623"/>
             </a:solidFill>
           </a:ln>
           <a:effectLst/>
@@ -6427,115 +6378,22 @@
           </a:fontRef>
         </p:style>
         <p:txBody>
-          <a:bodyPr rtlCol="0" anchor="ctr" wrap="square"/>
+          <a:bodyPr rtlCol="0" anchor="ctr" wrap="none" lIns="0" rIns="0" tIns="0" bIns="0"/>
           <a:lstStyle/>
           <a:p>
             <a:pPr algn="ctr">
               <a:spcAft>
-                <a:spcPts val="100"/>
-              </a:spcAft>
-            </a:pPr>
-            <a:r>
-              <a:rPr sz="1000" b="1">
-                <a:solidFill>
-                  <a:srgbClr val="0B8F6E"/>
-                </a:solidFill>
-                <a:latin typeface="Microsoft JhengHei"/>
-              </a:rPr>
-              <a:t>7</a:t>
-            </a:r>
-          </a:p>
-          <a:p>
-            <a:pPr algn="ctr">
-              <a:spcAft>
                 <a:spcPts val="0"/>
               </a:spcAft>
             </a:pPr>
             <a:r>
-              <a:rPr sz="1400" b="1">
-                <a:solidFill>
-                  <a:srgbClr val="1B2330"/>
-                </a:solidFill>
-                <a:latin typeface="Microsoft JhengHei"/>
-              </a:rPr>
-              <a:t>部署</a:t>
-            </a:r>
-          </a:p>
-        </p:txBody>
-      </p:sp>
-      <p:sp>
-        <p:nvSpPr>
-          <p:cNvPr id="21" name="Rounded Rectangle 20"/>
-          <p:cNvSpPr/>
-          <p:nvPr/>
-        </p:nvSpPr>
-        <p:spPr>
-          <a:xfrm>
-            <a:off x="3855119" y="2147934"/>
-            <a:ext cx="1572768" cy="841248"/>
-          </a:xfrm>
-          <a:prstGeom prst="roundRect">
-            <a:avLst>
-              <a:gd name="adj" fmla="val 30000"/>
-            </a:avLst>
-          </a:prstGeom>
-          <a:solidFill>
-            <a:srgbClr val="FFFFFF"/>
-          </a:solidFill>
-          <a:ln w="19050">
-            <a:solidFill>
-              <a:srgbClr val="B4690E"/>
-            </a:solidFill>
-          </a:ln>
-          <a:effectLst/>
-        </p:spPr>
-        <p:style>
-          <a:lnRef idx="1">
-            <a:schemeClr val="accent1"/>
-          </a:lnRef>
-          <a:fillRef idx="3">
-            <a:schemeClr val="accent1"/>
-          </a:fillRef>
-          <a:effectRef idx="2">
-            <a:schemeClr val="accent1"/>
-          </a:effectRef>
-          <a:fontRef idx="minor">
-            <a:schemeClr val="lt1"/>
-          </a:fontRef>
-        </p:style>
-        <p:txBody>
-          <a:bodyPr rtlCol="0" anchor="ctr" wrap="square"/>
-          <a:lstStyle/>
-          <a:p>
-            <a:pPr algn="ctr">
-              <a:spcAft>
-                <a:spcPts val="100"/>
-              </a:spcAft>
-            </a:pPr>
-            <a:r>
-              <a:rPr sz="1000" b="1">
-                <a:solidFill>
-                  <a:srgbClr val="B4690E"/>
+              <a:rPr sz="1300" b="1">
+                <a:solidFill>
+                  <a:srgbClr val="F5A623"/>
                 </a:solidFill>
                 <a:latin typeface="Microsoft JhengHei"/>
               </a:rPr>
               <a:t>8</a:t>
-            </a:r>
-          </a:p>
-          <a:p>
-            <a:pPr algn="ctr">
-              <a:spcAft>
-                <a:spcPts val="0"/>
-              </a:spcAft>
-            </a:pPr>
-            <a:r>
-              <a:rPr sz="1400" b="1">
-                <a:solidFill>
-                  <a:srgbClr val="1B2330"/>
-                </a:solidFill>
-                <a:latin typeface="Microsoft JhengHei"/>
-              </a:rPr>
-              <a:t>更新 Wiki</a:t>
             </a:r>
           </a:p>
         </p:txBody>
@@ -6548,8 +6406,8 @@
         </p:nvSpPr>
         <p:spPr>
           <a:xfrm>
-            <a:off x="731520" y="6355080"/>
-            <a:ext cx="10698480" cy="457200"/>
+            <a:off x="5090464" y="914399"/>
+            <a:ext cx="2011680" cy="402336"/>
           </a:xfrm>
           <a:prstGeom prst="rect">
             <a:avLst/>
@@ -6557,6 +6415,318 @@
           <a:noFill/>
         </p:spPr>
         <p:txBody>
+          <a:bodyPr wrap="none">
+            <a:spAutoFit/>
+          </a:bodyPr>
+          <a:lstStyle/>
+          <a:p>
+            <a:pPr algn="ctr">
+              <a:spcAft>
+                <a:spcPts val="0"/>
+              </a:spcAft>
+            </a:pPr>
+            <a:r>
+              <a:rPr sz="1800" b="1">
+                <a:solidFill>
+                  <a:srgbClr val="1B2330"/>
+                </a:solidFill>
+                <a:latin typeface="Microsoft JhengHei"/>
+              </a:rPr>
+              <a:t>需求</a:t>
+            </a:r>
+          </a:p>
+        </p:txBody>
+      </p:sp>
+      <p:sp>
+        <p:nvSpPr>
+          <p:cNvPr id="23" name="TextBox 22"/>
+          <p:cNvSpPr txBox="1"/>
+          <p:nvPr/>
+        </p:nvSpPr>
+        <p:spPr>
+          <a:xfrm>
+            <a:off x="7660105" y="1819479"/>
+            <a:ext cx="2011680" cy="402336"/>
+          </a:xfrm>
+          <a:prstGeom prst="rect">
+            <a:avLst/>
+          </a:prstGeom>
+          <a:noFill/>
+        </p:spPr>
+        <p:txBody>
+          <a:bodyPr wrap="none">
+            <a:spAutoFit/>
+          </a:bodyPr>
+          <a:lstStyle/>
+          <a:p>
+            <a:pPr algn="l">
+              <a:spcAft>
+                <a:spcPts val="0"/>
+              </a:spcAft>
+            </a:pPr>
+            <a:r>
+              <a:rPr sz="1800" b="1">
+                <a:solidFill>
+                  <a:srgbClr val="1B2330"/>
+                </a:solidFill>
+                <a:latin typeface="Microsoft JhengHei"/>
+              </a:rPr>
+              <a:t>寫文件</a:t>
+            </a:r>
+          </a:p>
+        </p:txBody>
+      </p:sp>
+      <p:sp>
+        <p:nvSpPr>
+          <p:cNvPr id="24" name="TextBox 23"/>
+          <p:cNvSpPr txBox="1"/>
+          <p:nvPr/>
+        </p:nvSpPr>
+        <p:spPr>
+          <a:xfrm>
+            <a:off x="8345728" y="3474719"/>
+            <a:ext cx="2011680" cy="402336"/>
+          </a:xfrm>
+          <a:prstGeom prst="rect">
+            <a:avLst/>
+          </a:prstGeom>
+          <a:noFill/>
+        </p:spPr>
+        <p:txBody>
+          <a:bodyPr wrap="none">
+            <a:spAutoFit/>
+          </a:bodyPr>
+          <a:lstStyle/>
+          <a:p>
+            <a:pPr algn="l">
+              <a:spcAft>
+                <a:spcPts val="0"/>
+              </a:spcAft>
+            </a:pPr>
+            <a:r>
+              <a:rPr sz="1800" b="1">
+                <a:solidFill>
+                  <a:srgbClr val="1B2330"/>
+                </a:solidFill>
+                <a:latin typeface="Microsoft JhengHei"/>
+              </a:rPr>
+              <a:t>開 Task</a:t>
+            </a:r>
+          </a:p>
+        </p:txBody>
+      </p:sp>
+      <p:sp>
+        <p:nvSpPr>
+          <p:cNvPr id="25" name="TextBox 24"/>
+          <p:cNvSpPr txBox="1"/>
+          <p:nvPr/>
+        </p:nvSpPr>
+        <p:spPr>
+          <a:xfrm>
+            <a:off x="7660105" y="5129960"/>
+            <a:ext cx="2011680" cy="402336"/>
+          </a:xfrm>
+          <a:prstGeom prst="rect">
+            <a:avLst/>
+          </a:prstGeom>
+          <a:noFill/>
+        </p:spPr>
+        <p:txBody>
+          <a:bodyPr wrap="none">
+            <a:spAutoFit/>
+          </a:bodyPr>
+          <a:lstStyle/>
+          <a:p>
+            <a:pPr algn="l">
+              <a:spcAft>
+                <a:spcPts val="0"/>
+              </a:spcAft>
+            </a:pPr>
+            <a:r>
+              <a:rPr sz="1800" b="1">
+                <a:solidFill>
+                  <a:srgbClr val="1B2330"/>
+                </a:solidFill>
+                <a:latin typeface="Microsoft JhengHei"/>
+              </a:rPr>
+              <a:t>寫測試項目</a:t>
+            </a:r>
+          </a:p>
+        </p:txBody>
+      </p:sp>
+      <p:sp>
+        <p:nvSpPr>
+          <p:cNvPr id="26" name="TextBox 25"/>
+          <p:cNvSpPr txBox="1"/>
+          <p:nvPr/>
+        </p:nvSpPr>
+        <p:spPr>
+          <a:xfrm>
+            <a:off x="5090464" y="6035040"/>
+            <a:ext cx="2011680" cy="402336"/>
+          </a:xfrm>
+          <a:prstGeom prst="rect">
+            <a:avLst/>
+          </a:prstGeom>
+          <a:noFill/>
+        </p:spPr>
+        <p:txBody>
+          <a:bodyPr wrap="none">
+            <a:spAutoFit/>
+          </a:bodyPr>
+          <a:lstStyle/>
+          <a:p>
+            <a:pPr algn="ctr">
+              <a:spcAft>
+                <a:spcPts val="0"/>
+              </a:spcAft>
+            </a:pPr>
+            <a:r>
+              <a:rPr sz="1800" b="1">
+                <a:solidFill>
+                  <a:srgbClr val="1B2330"/>
+                </a:solidFill>
+                <a:latin typeface="Microsoft JhengHei"/>
+              </a:rPr>
+              <a:t>開發</a:t>
+            </a:r>
+          </a:p>
+        </p:txBody>
+      </p:sp>
+      <p:sp>
+        <p:nvSpPr>
+          <p:cNvPr id="27" name="TextBox 26"/>
+          <p:cNvSpPr txBox="1"/>
+          <p:nvPr/>
+        </p:nvSpPr>
+        <p:spPr>
+          <a:xfrm>
+            <a:off x="2520823" y="5129960"/>
+            <a:ext cx="2011680" cy="402336"/>
+          </a:xfrm>
+          <a:prstGeom prst="rect">
+            <a:avLst/>
+          </a:prstGeom>
+          <a:noFill/>
+        </p:spPr>
+        <p:txBody>
+          <a:bodyPr wrap="none">
+            <a:spAutoFit/>
+          </a:bodyPr>
+          <a:lstStyle/>
+          <a:p>
+            <a:pPr algn="r">
+              <a:spcAft>
+                <a:spcPts val="0"/>
+              </a:spcAft>
+            </a:pPr>
+            <a:r>
+              <a:rPr sz="1800" b="1">
+                <a:solidFill>
+                  <a:srgbClr val="1B2330"/>
+                </a:solidFill>
+                <a:latin typeface="Microsoft JhengHei"/>
+              </a:rPr>
+              <a:t>驗證</a:t>
+            </a:r>
+          </a:p>
+        </p:txBody>
+      </p:sp>
+      <p:sp>
+        <p:nvSpPr>
+          <p:cNvPr id="28" name="TextBox 27"/>
+          <p:cNvSpPr txBox="1"/>
+          <p:nvPr/>
+        </p:nvSpPr>
+        <p:spPr>
+          <a:xfrm>
+            <a:off x="1835200" y="3474719"/>
+            <a:ext cx="2011680" cy="402336"/>
+          </a:xfrm>
+          <a:prstGeom prst="rect">
+            <a:avLst/>
+          </a:prstGeom>
+          <a:noFill/>
+        </p:spPr>
+        <p:txBody>
+          <a:bodyPr wrap="none">
+            <a:spAutoFit/>
+          </a:bodyPr>
+          <a:lstStyle/>
+          <a:p>
+            <a:pPr algn="r">
+              <a:spcAft>
+                <a:spcPts val="0"/>
+              </a:spcAft>
+            </a:pPr>
+            <a:r>
+              <a:rPr sz="1800" b="1">
+                <a:solidFill>
+                  <a:srgbClr val="1B2330"/>
+                </a:solidFill>
+                <a:latin typeface="Microsoft JhengHei"/>
+              </a:rPr>
+              <a:t>部署</a:t>
+            </a:r>
+          </a:p>
+        </p:txBody>
+      </p:sp>
+      <p:sp>
+        <p:nvSpPr>
+          <p:cNvPr id="29" name="TextBox 28"/>
+          <p:cNvSpPr txBox="1"/>
+          <p:nvPr/>
+        </p:nvSpPr>
+        <p:spPr>
+          <a:xfrm>
+            <a:off x="2520823" y="1819479"/>
+            <a:ext cx="2011680" cy="402336"/>
+          </a:xfrm>
+          <a:prstGeom prst="rect">
+            <a:avLst/>
+          </a:prstGeom>
+          <a:noFill/>
+        </p:spPr>
+        <p:txBody>
+          <a:bodyPr wrap="none">
+            <a:spAutoFit/>
+          </a:bodyPr>
+          <a:lstStyle/>
+          <a:p>
+            <a:pPr algn="r">
+              <a:spcAft>
+                <a:spcPts val="0"/>
+              </a:spcAft>
+            </a:pPr>
+            <a:r>
+              <a:rPr sz="1800" b="1">
+                <a:solidFill>
+                  <a:srgbClr val="B4690E"/>
+                </a:solidFill>
+                <a:latin typeface="Microsoft JhengHei"/>
+              </a:rPr>
+              <a:t>更新 Wiki</a:t>
+            </a:r>
+          </a:p>
+        </p:txBody>
+      </p:sp>
+      <p:sp>
+        <p:nvSpPr>
+          <p:cNvPr id="30" name="TextBox 29"/>
+          <p:cNvSpPr txBox="1"/>
+          <p:nvPr/>
+        </p:nvSpPr>
+        <p:spPr>
+          <a:xfrm>
+            <a:off x="731520" y="6382512"/>
+            <a:ext cx="10698480" cy="411480"/>
+          </a:xfrm>
+          <a:prstGeom prst="rect">
+            <a:avLst/>
+          </a:prstGeom>
+          <a:noFill/>
+        </p:spPr>
+        <p:txBody>
           <a:bodyPr wrap="square">
             <a:spAutoFit/>
           </a:bodyPr>
@@ -6574,7 +6744,7 @@
                 </a:solidFill>
                 <a:latin typeface="Microsoft JhengHei"/>
               </a:rPr>
-              <a:t>每一圈都小、都能驗收、錯了能退回 — 閉環讓品質可控；驗收與 wiki 又回流成下一輪需求。</a:t>
+              <a:t>每一圈都小、都能驗收、錯了能退回 — 閉環讓品質可控；驗收與更新後的 wiki 又回流成下一輪需求。</a:t>
             </a:r>
           </a:p>
         </p:txBody>
